--- a/IACyC_2026_Joel_Mwende_ppt.pptx
+++ b/IACyC_2026_Joel_Mwende_ppt.pptx
@@ -47,6 +47,4658 @@
     </p:ext>
   </p:extLst>
 </p:presentation>
+</file>
+
+<file path=ppt/notesMasters/notesMaster1.xml><?xml version="1.0" encoding="utf-8"?>
+<p:notesMaster xmlns:a="http://schemas.openxmlformats.org/drawingml/2006/main" xmlns:p="http://schemas.openxmlformats.org/presentationml/2006/main" xmlns:r="http://schemas.openxmlformats.org/officeDocument/2006/relationships">
+  <p:cSld>
+    <p:bg>
+      <p:bgRef idx="1001">
+        <a:schemeClr val="bg1"/>
+      </p:bgRef>
+    </p:bg>
+    <p:spTree>
+      <p:nvGrpSpPr>
+        <p:cNvPr id="1" name=""/>
+        <p:cNvGrpSpPr/>
+        <p:nvPr/>
+      </p:nvGrpSpPr>
+      <p:grpSpPr>
+        <a:xfrm>
+          <a:off x="0" y="0"/>
+          <a:ext cx="0" cy="0"/>
+          <a:chOff x="0" y="0"/>
+          <a:chExt cx="0" cy="0"/>
+        </a:xfrm>
+      </p:grpSpPr>
+      <p:sp>
+        <p:nvSpPr>
+          <p:cNvPr id="2" name="Header Placeholder 1"/>
+          <p:cNvSpPr>
+            <a:spLocks noGrp="1"/>
+          </p:cNvSpPr>
+          <p:nvPr>
+            <p:ph type="hdr" sz="quarter"/>
+          </p:nvPr>
+        </p:nvSpPr>
+        <p:spPr>
+          <a:xfrm>
+            <a:off x="0" y="0"/>
+            <a:ext cx="2971800" cy="457200"/>
+          </a:xfrm>
+          <a:prstGeom prst="rect">
+            <a:avLst/>
+          </a:prstGeom>
+        </p:spPr>
+        <p:txBody>
+          <a:bodyPr vert="horz" lIns="91440" tIns="45720" rIns="91440" bIns="45720" rtlCol="0"/>
+          <a:lstStyle>
+            <a:lvl1pPr algn="l">
+              <a:defRPr sz="1200"/>
+            </a:lvl1pPr>
+          </a:lstStyle>
+          <a:p>
+            <a:endParaRPr lang="en-US"/>
+          </a:p>
+        </p:txBody>
+      </p:sp>
+      <p:sp>
+        <p:nvSpPr>
+          <p:cNvPr id="3" name="Date Placeholder 2"/>
+          <p:cNvSpPr>
+            <a:spLocks noGrp="1"/>
+          </p:cNvSpPr>
+          <p:nvPr>
+            <p:ph type="dt" idx="1"/>
+          </p:nvPr>
+        </p:nvSpPr>
+        <p:spPr>
+          <a:xfrm>
+            <a:off x="3884613" y="0"/>
+            <a:ext cx="2971800" cy="457200"/>
+          </a:xfrm>
+          <a:prstGeom prst="rect">
+            <a:avLst/>
+          </a:prstGeom>
+        </p:spPr>
+        <p:txBody>
+          <a:bodyPr vert="horz" lIns="91440" tIns="45720" rIns="91440" bIns="45720" rtlCol="0"/>
+          <a:lstStyle>
+            <a:lvl1pPr algn="r">
+              <a:defRPr sz="1200"/>
+            </a:lvl1pPr>
+          </a:lstStyle>
+          <a:p>
+            <a:fld id="{0F89C1C7-3DCD-1040-A9CF-14679D8B5DDD}" type="datetimeFigureOut">
+              <a:rPr lang="en-US" smtClean="0"/>
+              <a:t>10/17/16</a:t>
+            </a:fld>
+            <a:endParaRPr lang="en-US"/>
+          </a:p>
+        </p:txBody>
+      </p:sp>
+      <p:sp>
+        <p:nvSpPr>
+          <p:cNvPr id="4" name="Slide Image Placeholder 3"/>
+          <p:cNvSpPr>
+            <a:spLocks noGrp="1" noRot="1" noChangeAspect="1"/>
+          </p:cNvSpPr>
+          <p:nvPr>
+            <p:ph type="sldImg" idx="2"/>
+          </p:nvPr>
+        </p:nvSpPr>
+        <p:spPr>
+          <a:xfrm>
+            <a:off x="1143000" y="685800"/>
+            <a:ext cx="4572000" cy="3429000"/>
+          </a:xfrm>
+          <a:prstGeom prst="rect">
+            <a:avLst/>
+          </a:prstGeom>
+          <a:noFill/>
+          <a:ln w="12700">
+            <a:solidFill>
+              <a:prstClr val="black"/>
+            </a:solidFill>
+          </a:ln>
+        </p:spPr>
+        <p:txBody>
+          <a:bodyPr vert="horz" lIns="91440" tIns="45720" rIns="91440" bIns="45720" rtlCol="0" anchor="ctr"/>
+          <a:lstStyle/>
+          <a:p>
+            <a:endParaRPr lang="en-US"/>
+          </a:p>
+        </p:txBody>
+      </p:sp>
+      <p:sp>
+        <p:nvSpPr>
+          <p:cNvPr id="5" name="Notes Placeholder 4"/>
+          <p:cNvSpPr>
+            <a:spLocks noGrp="1"/>
+          </p:cNvSpPr>
+          <p:nvPr>
+            <p:ph type="body" sz="quarter" idx="3"/>
+          </p:nvPr>
+        </p:nvSpPr>
+        <p:spPr>
+          <a:xfrm>
+            <a:off x="685800" y="4343400"/>
+            <a:ext cx="5486400" cy="4114800"/>
+          </a:xfrm>
+          <a:prstGeom prst="rect">
+            <a:avLst/>
+          </a:prstGeom>
+        </p:spPr>
+        <p:txBody>
+          <a:bodyPr vert="horz" lIns="91440" tIns="45720" rIns="91440" bIns="45720" rtlCol="0"/>
+          <a:lstStyle/>
+          <a:p>
+            <a:pPr lvl="0"/>
+            <a:r>
+              <a:rPr lang="en-US" smtClean="0"/>
+              <a:t>Click to edit Master text styles</a:t>
+            </a:r>
+          </a:p>
+          <a:p>
+            <a:pPr lvl="1"/>
+            <a:r>
+              <a:rPr lang="en-US" smtClean="0"/>
+              <a:t>Second level</a:t>
+            </a:r>
+          </a:p>
+          <a:p>
+            <a:pPr lvl="2"/>
+            <a:r>
+              <a:rPr lang="en-US" smtClean="0"/>
+              <a:t>Third level</a:t>
+            </a:r>
+          </a:p>
+          <a:p>
+            <a:pPr lvl="3"/>
+            <a:r>
+              <a:rPr lang="en-US" smtClean="0"/>
+              <a:t>Fourth level</a:t>
+            </a:r>
+          </a:p>
+          <a:p>
+            <a:pPr lvl="4"/>
+            <a:r>
+              <a:rPr lang="en-US" smtClean="0"/>
+              <a:t>Fifth level</a:t>
+            </a:r>
+            <a:endParaRPr lang="en-US"/>
+          </a:p>
+        </p:txBody>
+      </p:sp>
+      <p:sp>
+        <p:nvSpPr>
+          <p:cNvPr id="6" name="Footer Placeholder 5"/>
+          <p:cNvSpPr>
+            <a:spLocks noGrp="1"/>
+          </p:cNvSpPr>
+          <p:nvPr>
+            <p:ph type="ftr" sz="quarter" idx="4"/>
+          </p:nvPr>
+        </p:nvSpPr>
+        <p:spPr>
+          <a:xfrm>
+            <a:off x="0" y="8685213"/>
+            <a:ext cx="2971800" cy="457200"/>
+          </a:xfrm>
+          <a:prstGeom prst="rect">
+            <a:avLst/>
+          </a:prstGeom>
+        </p:spPr>
+        <p:txBody>
+          <a:bodyPr vert="horz" lIns="91440" tIns="45720" rIns="91440" bIns="45720" rtlCol="0" anchor="b"/>
+          <a:lstStyle>
+            <a:lvl1pPr algn="l">
+              <a:defRPr sz="1200"/>
+            </a:lvl1pPr>
+          </a:lstStyle>
+          <a:p>
+            <a:endParaRPr lang="en-US"/>
+          </a:p>
+        </p:txBody>
+      </p:sp>
+      <p:sp>
+        <p:nvSpPr>
+          <p:cNvPr id="7" name="Slide Number Placeholder 6"/>
+          <p:cNvSpPr>
+            <a:spLocks noGrp="1"/>
+          </p:cNvSpPr>
+          <p:nvPr>
+            <p:ph type="sldNum" sz="quarter" idx="5"/>
+          </p:nvPr>
+        </p:nvSpPr>
+        <p:spPr>
+          <a:xfrm>
+            <a:off x="3884613" y="8685213"/>
+            <a:ext cx="2971800" cy="457200"/>
+          </a:xfrm>
+          <a:prstGeom prst="rect">
+            <a:avLst/>
+          </a:prstGeom>
+        </p:spPr>
+        <p:txBody>
+          <a:bodyPr vert="horz" lIns="91440" tIns="45720" rIns="91440" bIns="45720" rtlCol="0" anchor="b"/>
+          <a:lstStyle>
+            <a:lvl1pPr algn="r">
+              <a:defRPr sz="1200"/>
+            </a:lvl1pPr>
+          </a:lstStyle>
+          <a:p>
+            <a:fld id="{BB5E49A5-4136-284D-997B-48E1D791AD67}" type="slidenum">
+              <a:rPr lang="en-US" smtClean="0"/>
+              <a:t>‹#›</a:t>
+            </a:fld>
+            <a:endParaRPr lang="en-US"/>
+          </a:p>
+        </p:txBody>
+      </p:sp>
+    </p:spTree>
+    <p:extLst>
+      <p:ext uri="{BB962C8B-B14F-4D97-AF65-F5344CB8AC3E}">
+        <p14:creationId xmlns:p14="http://schemas.microsoft.com/office/powerpoint/2010/main" val="2623252185"/>
+      </p:ext>
+    </p:extLst>
+  </p:cSld>
+  <p:clrMap bg1="lt1" tx1="dk1" bg2="lt2" tx2="dk2" accent1="accent1" accent2="accent2" accent3="accent3" accent4="accent4" accent5="accent5" accent6="accent6" hlink="hlink" folHlink="folHlink"/>
+  <p:notesStyle>
+    <a:lvl1pPr marL="0" algn="l" defTabSz="457200" rtl="0" eaLnBrk="1" latinLnBrk="0" hangingPunct="1">
+      <a:defRPr sz="1200" kern="1200">
+        <a:solidFill>
+          <a:schemeClr val="tx1"/>
+        </a:solidFill>
+        <a:latin typeface="+mn-lt"/>
+        <a:ea typeface="+mn-ea"/>
+        <a:cs typeface="+mn-cs"/>
+      </a:defRPr>
+    </a:lvl1pPr>
+    <a:lvl2pPr marL="457200" algn="l" defTabSz="457200" rtl="0" eaLnBrk="1" latinLnBrk="0" hangingPunct="1">
+      <a:defRPr sz="1200" kern="1200">
+        <a:solidFill>
+          <a:schemeClr val="tx1"/>
+        </a:solidFill>
+        <a:latin typeface="+mn-lt"/>
+        <a:ea typeface="+mn-ea"/>
+        <a:cs typeface="+mn-cs"/>
+      </a:defRPr>
+    </a:lvl2pPr>
+    <a:lvl3pPr marL="914400" algn="l" defTabSz="457200" rtl="0" eaLnBrk="1" latinLnBrk="0" hangingPunct="1">
+      <a:defRPr sz="1200" kern="1200">
+        <a:solidFill>
+          <a:schemeClr val="tx1"/>
+        </a:solidFill>
+        <a:latin typeface="+mn-lt"/>
+        <a:ea typeface="+mn-ea"/>
+        <a:cs typeface="+mn-cs"/>
+      </a:defRPr>
+    </a:lvl3pPr>
+    <a:lvl4pPr marL="1371600" algn="l" defTabSz="457200" rtl="0" eaLnBrk="1" latinLnBrk="0" hangingPunct="1">
+      <a:defRPr sz="1200" kern="1200">
+        <a:solidFill>
+          <a:schemeClr val="tx1"/>
+        </a:solidFill>
+        <a:latin typeface="+mn-lt"/>
+        <a:ea typeface="+mn-ea"/>
+        <a:cs typeface="+mn-cs"/>
+      </a:defRPr>
+    </a:lvl4pPr>
+    <a:lvl5pPr marL="1828800" algn="l" defTabSz="457200" rtl="0" eaLnBrk="1" latinLnBrk="0" hangingPunct="1">
+      <a:defRPr sz="1200" kern="1200">
+        <a:solidFill>
+          <a:schemeClr val="tx1"/>
+        </a:solidFill>
+        <a:latin typeface="+mn-lt"/>
+        <a:ea typeface="+mn-ea"/>
+        <a:cs typeface="+mn-cs"/>
+      </a:defRPr>
+    </a:lvl5pPr>
+    <a:lvl6pPr marL="2286000" algn="l" defTabSz="457200" rtl="0" eaLnBrk="1" latinLnBrk="0" hangingPunct="1">
+      <a:defRPr sz="1200" kern="1200">
+        <a:solidFill>
+          <a:schemeClr val="tx1"/>
+        </a:solidFill>
+        <a:latin typeface="+mn-lt"/>
+        <a:ea typeface="+mn-ea"/>
+        <a:cs typeface="+mn-cs"/>
+      </a:defRPr>
+    </a:lvl6pPr>
+    <a:lvl7pPr marL="2743200" algn="l" defTabSz="457200" rtl="0" eaLnBrk="1" latinLnBrk="0" hangingPunct="1">
+      <a:defRPr sz="1200" kern="1200">
+        <a:solidFill>
+          <a:schemeClr val="tx1"/>
+        </a:solidFill>
+        <a:latin typeface="+mn-lt"/>
+        <a:ea typeface="+mn-ea"/>
+        <a:cs typeface="+mn-cs"/>
+      </a:defRPr>
+    </a:lvl7pPr>
+    <a:lvl8pPr marL="3200400" algn="l" defTabSz="457200" rtl="0" eaLnBrk="1" latinLnBrk="0" hangingPunct="1">
+      <a:defRPr sz="1200" kern="1200">
+        <a:solidFill>
+          <a:schemeClr val="tx1"/>
+        </a:solidFill>
+        <a:latin typeface="+mn-lt"/>
+        <a:ea typeface="+mn-ea"/>
+        <a:cs typeface="+mn-cs"/>
+      </a:defRPr>
+    </a:lvl8pPr>
+    <a:lvl9pPr marL="3657600" algn="l" defTabSz="457200" rtl="0" eaLnBrk="1" latinLnBrk="0" hangingPunct="1">
+      <a:defRPr sz="1200" kern="1200">
+        <a:solidFill>
+          <a:schemeClr val="tx1"/>
+        </a:solidFill>
+        <a:latin typeface="+mn-lt"/>
+        <a:ea typeface="+mn-ea"/>
+        <a:cs typeface="+mn-cs"/>
+      </a:defRPr>
+    </a:lvl9pPr>
+  </p:notesStyle>
+</p:notesMaster>
+</file>
+
+<file path=ppt/notesSlides/notesSlide1.xml><?xml version="1.0" encoding="utf-8"?>
+<p:notes xmlns:a="http://schemas.openxmlformats.org/drawingml/2006/main" xmlns:p="http://schemas.openxmlformats.org/presentationml/2006/main" xmlns:r="http://schemas.openxmlformats.org/officeDocument/2006/relationships">
+  <p:cSld>
+    <p:spTree>
+      <p:nvGrpSpPr>
+        <p:cNvPr id="1" name=""/>
+        <p:cNvGrpSpPr/>
+        <p:nvPr/>
+      </p:nvGrpSpPr>
+      <p:grpSpPr>
+        <a:xfrm>
+          <a:off x="0" y="0"/>
+          <a:ext cx="0" cy="0"/>
+          <a:chOff x="0" y="0"/>
+          <a:chExt cx="0" cy="0"/>
+        </a:xfrm>
+      </p:grpSpPr>
+      <p:sp>
+        <p:nvSpPr>
+          <p:cNvPr id="2" name="Slide Image Placeholder 1"/>
+          <p:cNvSpPr>
+            <a:spLocks noGrp="1"/>
+          </p:cNvSpPr>
+          <p:nvPr>
+            <p:ph type="sldImg" idx="2"/>
+          </p:nvPr>
+        </p:nvSpPr>
+        <p:spPr/>
+      </p:sp>
+      <p:sp>
+        <p:nvSpPr>
+          <p:cNvPr id="3" name="Notes Placeholder 2"/>
+          <p:cNvSpPr>
+            <a:spLocks noGrp="1"/>
+          </p:cNvSpPr>
+          <p:nvPr>
+            <p:ph type="body" idx="3" sz="quarter"/>
+          </p:nvPr>
+        </p:nvSpPr>
+        <p:spPr/>
+        <p:txBody>
+          <a:bodyPr/>
+          <a:lstStyle/>
+          <a:p>
+            <a:r>
+              <a:t>HOW TO USE THESE NOTES</a:t>
+            </a:r>
+          </a:p>
+          <a:p>
+            <a:r>
+              <a:t>Every slide has a [~X min] tag: that is your ON-STAGE time budget for a 20-minute</a:t>
+            </a:r>
+          </a:p>
+          <a:p>
+            <a:r>
+              <a:t>talk (about 18 minutes of talking, leaving a couple of minutes of slack for</a:t>
+            </a:r>
+          </a:p>
+          <a:p>
+            <a:r>
+              <a:t>nerves, a slow laptop, or the chair running late). The "WHAT TO SAY" section is</a:t>
+            </a:r>
+          </a:p>
+          <a:p>
+            <a:r>
+              <a:t>what to actually try to say out loud in that time - keep it conversational, not</a:t>
+            </a:r>
+          </a:p>
+          <a:p>
+            <a:r>
+              <a:t>read word for word. Everything under "KEY TERMS" and "WHAT THE RESULT MEANS" is</a:t>
+            </a:r>
+          </a:p>
+          <a:p>
+            <a:r>
+              <a:t>for YOU to read beforehand so you understand the material cold and can answer</a:t>
+            </a:r>
+          </a:p>
+          <a:p>
+            <a:r>
+              <a:t>follow-up questions confidently - you do not need to recite those definitions on</a:t>
+            </a:r>
+          </a:p>
+          <a:p>
+            <a:r>
+              <a:t>stage unless someone in the room clearly does not know the term.</a:t>
+            </a:r>
+          </a:p>
+          <a:p/>
+          <a:p>
+            <a:r>
+              <a:t>[~0:30]</a:t>
+            </a:r>
+          </a:p>
+          <a:p/>
+          <a:p>
+            <a:r>
+              <a:t>WHY THIS SLIDE</a:t>
+            </a:r>
+          </a:p>
+          <a:p>
+            <a:r>
+              <a:t>This is the only slide where the room is not yet listening for content - they are</a:t>
+            </a:r>
+          </a:p>
+          <a:p>
+            <a:r>
+              <a:t>sizing you up. Speak slowly, make eye contact, do not rush the title.</a:t>
+            </a:r>
+          </a:p>
+          <a:p/>
+          <a:p>
+            <a:r>
+              <a:t>WHAT TO SAY</a:t>
+            </a:r>
+          </a:p>
+          <a:p>
+            <a:r>
+              <a:t>"Good [morning/afternoon], I'm Joel Mwende. This is joint work with my</a:t>
+            </a:r>
+          </a:p>
+          <a:p>
+            <a:r>
+              <a:t>supervisors, Professor Reiner Creutzburg and Professor Tuğçe Ballı, and my</a:t>
+            </a:r>
+          </a:p>
+          <a:p>
+            <a:r>
+              <a:t>co-supervisor Navaneeth Shivananjappa - I did this as my master's thesis in the</a:t>
+            </a:r>
+          </a:p>
+          <a:p>
+            <a:r>
+              <a:t>CyberMACS programme, jointly between SRH Berlin and Kadir Has University, so it's</a:t>
+            </a:r>
+          </a:p>
+          <a:p>
+            <a:r>
+              <a:t>good to be presenting it here in Istanbul. The title's a mouthful, so let me</a:t>
+            </a:r>
+          </a:p>
+          <a:p>
+            <a:r>
+              <a:t>translate it into one sentence: we take a pile of raw security alerts, and we</a:t>
+            </a:r>
+          </a:p>
+          <a:p>
+            <a:r>
+              <a:t>build a system that turns them into a trustworthy incident report, and the trick</a:t>
+            </a:r>
+          </a:p>
+          <a:p>
+            <a:r>
+              <a:t>that makes it trustworthy is anchoring the AI's search step in the actual</a:t>
+            </a:r>
+          </a:p>
+          <a:p>
+            <a:r>
+              <a:t>behaviour it sees - rather than letting it search freely and hope for the best."</a:t>
+            </a:r>
+          </a:p>
+          <a:p/>
+          <a:p>
+            <a:r>
+              <a:t>KEY TERMS</a:t>
+            </a:r>
+          </a:p>
+          <a:p>
+            <a:r>
+              <a:t>SIEM: Security Information and Event Management - the software a company's</a:t>
+            </a:r>
+          </a:p>
+          <a:p>
+            <a:r>
+              <a:t>security team uses to collect every security-relevant log (failed logins,</a:t>
+            </a:r>
+          </a:p>
+          <a:p>
+            <a:r>
+              <a:t>network traffic, firewall alerts) into one place, so analysts have one screen</a:t>
+            </a:r>
+          </a:p>
+          <a:p>
+            <a:r>
+              <a:t>to watch instead of a hundred different systems.</a:t>
+            </a:r>
+          </a:p>
+          <a:p>
+            <a:r>
+              <a:t>SOC: Security Operations Centre - the team of analysts who watch a SIEM around</a:t>
+            </a:r>
+          </a:p>
+          <a:p>
+            <a:r>
+              <a:t>the clock and decide which alerts are real problems.</a:t>
+            </a:r>
+          </a:p>
+          <a:p/>
+          <a:p>
+            <a:r>
+              <a:t>IF ASKED / IF STUCK</a:t>
+            </a:r>
+          </a:p>
+          <a:p>
+            <a:r>
+              <a:t>If your mind blanks here, just say your name and "this is about making AI</a:t>
+            </a:r>
+          </a:p>
+          <a:p>
+            <a:r>
+              <a:t>security tools that can be trusted, and that run without sending your data to</a:t>
+            </a:r>
+          </a:p>
+          <a:p>
+            <a:r>
+              <a:t>the cloud" - that one sentence is the entire talk in miniature, and everything</a:t>
+            </a:r>
+          </a:p>
+          <a:p>
+            <a:r>
+              <a:t>else is detail.</a:t>
+            </a:r>
+          </a:p>
+        </p:txBody>
+      </p:sp>
+      <p:sp>
+        <p:nvSpPr>
+          <p:cNvPr id="4" name="Slide Number Placeholder 3"/>
+          <p:cNvSpPr>
+            <a:spLocks noGrp="1"/>
+          </p:cNvSpPr>
+          <p:nvPr>
+            <p:ph type="sldNum" idx="5" sz="quarter"/>
+          </p:nvPr>
+        </p:nvSpPr>
+        <p:spPr/>
+      </p:sp>
+    </p:spTree>
+  </p:cSld>
+  <p:clrMapOvr>
+    <a:masterClrMapping/>
+  </p:clrMapOvr>
+</p:notes>
+</file>
+
+<file path=ppt/notesSlides/notesSlide10.xml><?xml version="1.0" encoding="utf-8"?>
+<p:notes xmlns:a="http://schemas.openxmlformats.org/drawingml/2006/main" xmlns:p="http://schemas.openxmlformats.org/presentationml/2006/main" xmlns:r="http://schemas.openxmlformats.org/officeDocument/2006/relationships">
+  <p:cSld>
+    <p:spTree>
+      <p:nvGrpSpPr>
+        <p:cNvPr id="1" name=""/>
+        <p:cNvGrpSpPr/>
+        <p:nvPr/>
+      </p:nvGrpSpPr>
+      <p:grpSpPr>
+        <a:xfrm>
+          <a:off x="0" y="0"/>
+          <a:ext cx="0" cy="0"/>
+          <a:chOff x="0" y="0"/>
+          <a:chExt cx="0" cy="0"/>
+        </a:xfrm>
+      </p:grpSpPr>
+      <p:sp>
+        <p:nvSpPr>
+          <p:cNvPr id="2" name="Slide Image Placeholder 1"/>
+          <p:cNvSpPr>
+            <a:spLocks noGrp="1"/>
+          </p:cNvSpPr>
+          <p:nvPr>
+            <p:ph type="sldImg" idx="2"/>
+          </p:nvPr>
+        </p:nvSpPr>
+        <p:spPr/>
+      </p:sp>
+      <p:sp>
+        <p:nvSpPr>
+          <p:cNvPr id="3" name="Notes Placeholder 2"/>
+          <p:cNvSpPr>
+            <a:spLocks noGrp="1"/>
+          </p:cNvSpPr>
+          <p:nvPr>
+            <p:ph type="body" idx="3" sz="quarter"/>
+          </p:nvPr>
+        </p:nvSpPr>
+        <p:spPr/>
+        <p:txBody>
+          <a:bodyPr/>
+          <a:lstStyle/>
+          <a:p>
+            <a:r>
+              <a:t>[~1:30]</a:t>
+            </a:r>
+          </a:p>
+          <a:p/>
+          <a:p>
+            <a:r>
+              <a:t>WHY THIS SLIDE</a:t>
+            </a:r>
+          </a:p>
+          <a:p>
+            <a:r>
+              <a:t>The generalisation test: does the idea only work on the one dataset it was</a:t>
+            </a:r>
+          </a:p>
+          <a:p>
+            <a:r>
+              <a:t>designed around, or does it transfer to a genuinely different kind of</a:t>
+            </a:r>
+          </a:p>
+          <a:p>
+            <a:r>
+              <a:t>evidence? This answers "isn't this just overfit to one benchmark?" before</a:t>
+            </a:r>
+          </a:p>
+          <a:p>
+            <a:r>
+              <a:t>anyone has to ask it.</a:t>
+            </a:r>
+          </a:p>
+          <a:p/>
+          <a:p>
+            <a:r>
+              <a:t>WHAT TO SAY</a:t>
+            </a:r>
+          </a:p>
+          <a:p>
+            <a:r>
+              <a:t>Remind the room this is the OTHER dataset from slide 6 - host-level system</a:t>
+            </a:r>
+          </a:p>
+          <a:p>
+            <a:r>
+              <a:t>logs from the red-team exercise, a different "language" of evidence than</a:t>
+            </a:r>
+          </a:p>
+          <a:p>
+            <a:r>
+              <a:t>network flows. "Grounded F1 is our method on; Baseline is the same unscoped-</a:t>
+            </a:r>
+          </a:p>
+          <a:p>
+            <a:r>
+              <a:t>search idea from the last slide, applied here instead. Every single model</a:t>
+            </a:r>
+          </a:p>
+          <a:p>
+            <a:r>
+              <a:t>improves by about 0.43 in F1 - on a scale of 0 to 1, that is a large jump, not</a:t>
+            </a:r>
+          </a:p>
+          <a:p>
+            <a:r>
+              <a:t>a marginal one: it's the difference between getting roughly a quarter of</a:t>
+            </a:r>
+          </a:p>
+          <a:p>
+            <a:r>
+              <a:t>cases right and getting roughly two-thirds or more right." Then: "The</a:t>
+            </a:r>
+          </a:p>
+          <a:p>
+            <a:r>
+              <a:t>confidence intervals for grounded and baseline don't overlap at all for any</a:t>
+            </a:r>
+          </a:p>
+          <a:p>
+            <a:r>
+              <a:t>model - so despite this being a small evaluation, we can be confident this</a:t>
+            </a:r>
+          </a:p>
+          <a:p>
+            <a:r>
+              <a:t>improvement is real, not just lucky sampling." Then explain the</a:t>
+            </a:r>
+          </a:p>
+          <a:p>
+            <a:r>
+              <a:t>precision/recall pair concretely, since this is a "define the result" moment:</a:t>
+            </a:r>
+          </a:p>
+          <a:p>
+            <a:r>
+              <a:t>"Precision near 1.00 means when this system DOES name a specific technique, it</a:t>
+            </a:r>
+          </a:p>
+          <a:p>
+            <a:r>
+              <a:t>is almost always right - very trustworthy when it speaks up. Recall around</a:t>
+            </a:r>
+          </a:p>
+          <a:p>
+            <a:r>
+              <a:t>0.5 means it only catches about half of the real cases it should flag - it</a:t>
+            </a:r>
+          </a:p>
+          <a:p>
+            <a:r>
+              <a:t>stays quiet rather than guess when it's not confident." Explain why that's</a:t>
+            </a:r>
+          </a:p>
+          <a:p>
+            <a:r>
+              <a:t>actually the right tradeoff for this use case: "For a real analyst, a</a:t>
+            </a:r>
+          </a:p>
+          <a:p>
+            <a:r>
+              <a:t>cautious assistant that's almost always right when it does speak is more</a:t>
+            </a:r>
+          </a:p>
+          <a:p>
+            <a:r>
+              <a:t>useful than one that guesses constantly and cries wolf - false alarms are</a:t>
+            </a:r>
+          </a:p>
+          <a:p>
+            <a:r>
+              <a:t>exactly the alert-fatigue problem from the start of the talk." Close with the</a:t>
+            </a:r>
+          </a:p>
+          <a:p>
+            <a:r>
+              <a:t>surprising bit: "Interestingly, the model ranking flips - the WORST model on</a:t>
+            </a:r>
+          </a:p>
+          <a:p>
+            <a:r>
+              <a:t>network flows becomes the BEST model here, which tells us the 'best AI model'</a:t>
+            </a:r>
+          </a:p>
+          <a:p>
+            <a:r>
+              <a:t>isn't a fixed, universal answer; it depends on the kind of evidence."</a:t>
+            </a:r>
+          </a:p>
+          <a:p/>
+          <a:p>
+            <a:r>
+              <a:t>KEY TERMS</a:t>
+            </a:r>
+          </a:p>
+          <a:p>
+            <a:r>
+              <a:t>(Precision, recall, and confidence intervals were defined on slides 6 and 7 -</a:t>
+            </a:r>
+          </a:p>
+          <a:p>
+            <a:r>
+              <a:t>this slide is where you actually USE those definitions on a new result, so</a:t>
+            </a:r>
+          </a:p>
+          <a:p>
+            <a:r>
+              <a:t>lean on the earlier explanation rather than re-deriving it from scratch.)</a:t>
+            </a:r>
+          </a:p>
+          <a:p/>
+          <a:p>
+            <a:r>
+              <a:t>WHAT THE RESULT MEANS</a:t>
+            </a:r>
+          </a:p>
+          <a:p>
+            <a:r>
+              <a:t>The idea is not a one-dataset trick - it holds up on a structurally different</a:t>
+            </a:r>
+          </a:p>
+          <a:p>
+            <a:r>
+              <a:t>kind of security data, which is the strongest kind of evidence for</a:t>
+            </a:r>
+          </a:p>
+          <a:p>
+            <a:r>
+              <a:t>generalisation a single paper can offer without testing a third dataset.</a:t>
+            </a:r>
+          </a:p>
+          <a:p/>
+          <a:p>
+            <a:r>
+              <a:t>IF ASKED / IF STUCK</a:t>
+            </a:r>
+          </a:p>
+          <a:p>
+            <a:r>
+              <a:t>If asked "why does the model ranking flip?" - the honest, cited answer: this</a:t>
+            </a:r>
+          </a:p>
+          <a:p>
+            <a:r>
+              <a:t>dataset's finer-grained behaviour vocabulary rewards the kind of varied</a:t>
+            </a:r>
+          </a:p>
+          <a:p>
+            <a:r>
+              <a:t>relation use that looked like noise on the simpler network-flow data - a</a:t>
+            </a:r>
+          </a:p>
+          <a:p>
+            <a:r>
+              <a:t>model being "too eager" to use different behaviour labels hurt it on one</a:t>
+            </a:r>
+          </a:p>
+          <a:p>
+            <a:r>
+              <a:t>dataset and helped it on the other.</a:t>
+            </a:r>
+          </a:p>
+        </p:txBody>
+      </p:sp>
+      <p:sp>
+        <p:nvSpPr>
+          <p:cNvPr id="4" name="Slide Number Placeholder 3"/>
+          <p:cNvSpPr>
+            <a:spLocks noGrp="1"/>
+          </p:cNvSpPr>
+          <p:nvPr>
+            <p:ph type="sldNum" idx="5" sz="quarter"/>
+          </p:nvPr>
+        </p:nvSpPr>
+        <p:spPr/>
+      </p:sp>
+    </p:spTree>
+  </p:cSld>
+  <p:clrMapOvr>
+    <a:masterClrMapping/>
+  </p:clrMapOvr>
+</p:notes>
+</file>
+
+<file path=ppt/notesSlides/notesSlide11.xml><?xml version="1.0" encoding="utf-8"?>
+<p:notes xmlns:a="http://schemas.openxmlformats.org/drawingml/2006/main" xmlns:p="http://schemas.openxmlformats.org/presentationml/2006/main" xmlns:r="http://schemas.openxmlformats.org/officeDocument/2006/relationships">
+  <p:cSld>
+    <p:spTree>
+      <p:nvGrpSpPr>
+        <p:cNvPr id="1" name=""/>
+        <p:cNvGrpSpPr/>
+        <p:nvPr/>
+      </p:nvGrpSpPr>
+      <p:grpSpPr>
+        <a:xfrm>
+          <a:off x="0" y="0"/>
+          <a:ext cx="0" cy="0"/>
+          <a:chOff x="0" y="0"/>
+          <a:chExt cx="0" cy="0"/>
+        </a:xfrm>
+      </p:grpSpPr>
+      <p:sp>
+        <p:nvSpPr>
+          <p:cNvPr id="2" name="Slide Image Placeholder 1"/>
+          <p:cNvSpPr>
+            <a:spLocks noGrp="1"/>
+          </p:cNvSpPr>
+          <p:nvPr>
+            <p:ph type="sldImg" idx="2"/>
+          </p:nvPr>
+        </p:nvSpPr>
+        <p:spPr/>
+      </p:sp>
+      <p:sp>
+        <p:nvSpPr>
+          <p:cNvPr id="3" name="Notes Placeholder 2"/>
+          <p:cNvSpPr>
+            <a:spLocks noGrp="1"/>
+          </p:cNvSpPr>
+          <p:nvPr>
+            <p:ph type="body" idx="3" sz="quarter"/>
+          </p:nvPr>
+        </p:nvSpPr>
+        <p:spPr/>
+        <p:txBody>
+          <a:bodyPr/>
+          <a:lstStyle/>
+          <a:p>
+            <a:r>
+              <a:t>[~1:30]</a:t>
+            </a:r>
+          </a:p>
+          <a:p/>
+          <a:p>
+            <a:r>
+              <a:t>WHY THIS SLIDE</a:t>
+            </a:r>
+          </a:p>
+          <a:p>
+            <a:r>
+              <a:t>A genuinely counter-intuitive, memorable finding, and a warning to the field</a:t>
+            </a:r>
+          </a:p>
+          <a:p>
+            <a:r>
+              <a:t>about a real evaluation mistake. This is a good slide to sound confident and a</a:t>
+            </a:r>
+          </a:p>
+          <a:p>
+            <a:r>
+              <a:t>little bit pleased about - it's a nice piece of intellectual honesty.</a:t>
+            </a:r>
+          </a:p>
+          <a:p/>
+          <a:p>
+            <a:r>
+              <a:t>WHAT TO SAY</a:t>
+            </a:r>
+          </a:p>
+          <a:p>
+            <a:r>
+              <a:t>Define grounding/faithfulness properly here, since this is its full</a:t>
+            </a:r>
+          </a:p>
+          <a:p>
+            <a:r>
+              <a:t>introduction: "Grounding, or faithfulness, measures whether the AI's WRITTEN</a:t>
+            </a:r>
+          </a:p>
+          <a:p>
+            <a:r>
+              <a:t>explanation actually matches the evidence it was given - is it being honest</a:t>
+            </a:r>
+          </a:p>
+          <a:p>
+            <a:r>
+              <a:t>and consistent with its own sources, or is it 'hallucinating,' the term the</a:t>
+            </a:r>
+          </a:p>
+          <a:p>
+            <a:r>
+              <a:t>AI field uses for a model confidently making things up. We measure it using</a:t>
+            </a:r>
+          </a:p>
+          <a:p>
+            <a:r>
+              <a:t>the same embeddings idea from earlier: how numerically similar is the written</a:t>
+            </a:r>
+          </a:p>
+          <a:p>
+            <a:r>
+              <a:t>summary to the reference text it's supposed to be grounded in." Then state the</a:t>
+            </a:r>
+          </a:p>
+          <a:p>
+            <a:r>
+              <a:t>crucial distinction clearly, because it's the entire point of the slide:</a:t>
+            </a:r>
+          </a:p>
+          <a:p>
+            <a:r>
+              <a:t>"Grounding does NOT measure whether the final answer was correct. It only</a:t>
+            </a:r>
+          </a:p>
+          <a:p>
+            <a:r>
+              <a:t>measures whether the explanation is internally consistent with whatever</a:t>
+            </a:r>
+          </a:p>
+          <a:p>
+            <a:r>
+              <a:t>evidence it was handed - even if that evidence led to the wrong conclusion."</a:t>
+            </a:r>
+          </a:p>
+          <a:p>
+            <a:r>
+              <a:t>Walk through the finding: "The coder model writes the best-grounded, most</a:t>
+            </a:r>
+          </a:p>
+          <a:p>
+            <a:r>
+              <a:t>coherent-sounding reports of the three - and it also has the worst</a:t>
+            </a:r>
+          </a:p>
+          <a:p>
+            <a:r>
+              <a:t>classification accuracy. It is very good at confidently and convincingly</a:t>
+            </a:r>
+          </a:p>
+          <a:p>
+            <a:r>
+              <a:t>explaining the wrong attack." Close with the practical warning: "If a company</a:t>
+            </a:r>
+          </a:p>
+          <a:p>
+            <a:r>
+              <a:t>evaluating these tools only checked 'does the report read well and cite its</a:t>
+            </a:r>
+          </a:p>
+          <a:p>
+            <a:r>
+              <a:t>sources,' without separately checking 'did it name the right attack,' they</a:t>
+            </a:r>
+          </a:p>
+          <a:p>
+            <a:r>
+              <a:t>would rank the worst-performing model as the best one - purely because it</a:t>
+            </a:r>
+          </a:p>
+          <a:p>
+            <a:r>
+              <a:t>writes convincing prose. That's a real risk in how these systems tend to get</a:t>
+            </a:r>
+          </a:p>
+          <a:p>
+            <a:r>
+              <a:t>judged in practice, and it's exactly why we insist on reporting both metrics</a:t>
+            </a:r>
+          </a:p>
+          <a:p>
+            <a:r>
+              <a:t>side by side, never grounding alone."</a:t>
+            </a:r>
+          </a:p>
+          <a:p/>
+          <a:p>
+            <a:r>
+              <a:t>KEY TERMS</a:t>
+            </a:r>
+          </a:p>
+          <a:p>
+            <a:r>
+              <a:t>Grounding / faithfulness: agreement between an AI's written output and the</a:t>
+            </a:r>
+          </a:p>
+          <a:p>
+            <a:r>
+              <a:t>actual evidence or reference material it was given.</a:t>
+            </a:r>
+          </a:p>
+          <a:p>
+            <a:r>
+              <a:t>Hallucination: when an AI model states something confidently and fluently that</a:t>
+            </a:r>
+          </a:p>
+          <a:p>
+            <a:r>
+              <a:t>is not actually supported by its input - a well-known failure mode across the</a:t>
+            </a:r>
+          </a:p>
+          <a:p>
+            <a:r>
+              <a:t>whole field, not specific to this paper.</a:t>
+            </a:r>
+          </a:p>
+          <a:p/>
+          <a:p>
+            <a:r>
+              <a:t>WHAT THE RESULT MEANS</a:t>
+            </a:r>
+          </a:p>
+          <a:p>
+            <a:r>
+              <a:t>Correctness and grounding are NOT the same thing and can point in opposite</a:t>
+            </a:r>
+          </a:p>
+          <a:p>
+            <a:r>
+              <a:t>directions. A system can be simultaneously well-written and wrong. This is the</a:t>
+            </a:r>
+          </a:p>
+          <a:p>
+            <a:r>
+              <a:t>paper's argument for why any serious evaluation of AI-generated security</a:t>
+            </a:r>
+          </a:p>
+          <a:p>
+            <a:r>
+              <a:t>reports needs BOTH an accuracy check and a groundedness check - one alone can</a:t>
+            </a:r>
+          </a:p>
+          <a:p>
+            <a:r>
+              <a:t>be actively misleading.</a:t>
+            </a:r>
+          </a:p>
+          <a:p/>
+          <a:p>
+            <a:r>
+              <a:t>IF ASKED / IF STUCK</a:t>
+            </a:r>
+          </a:p>
+          <a:p>
+            <a:r>
+              <a:t>If asked "so is grounding a useless metric then?" - no: it is still valuable</a:t>
+            </a:r>
+          </a:p>
+          <a:p>
+            <a:r>
+              <a:t>for catching a DIFFERENT failure mode (the AI inventing evidence that was</a:t>
+            </a:r>
+          </a:p>
+          <a:p>
+            <a:r>
+              <a:t>never there at all), it just cannot substitute for checking correctness, and</a:t>
+            </a:r>
+          </a:p>
+          <a:p>
+            <a:r>
+              <a:t>the two need to be read together, not as a replacement for each other.</a:t>
+            </a:r>
+          </a:p>
+        </p:txBody>
+      </p:sp>
+      <p:sp>
+        <p:nvSpPr>
+          <p:cNvPr id="4" name="Slide Number Placeholder 3"/>
+          <p:cNvSpPr>
+            <a:spLocks noGrp="1"/>
+          </p:cNvSpPr>
+          <p:nvPr>
+            <p:ph type="sldNum" idx="5" sz="quarter"/>
+          </p:nvPr>
+        </p:nvSpPr>
+        <p:spPr/>
+      </p:sp>
+    </p:spTree>
+  </p:cSld>
+  <p:clrMapOvr>
+    <a:masterClrMapping/>
+  </p:clrMapOvr>
+</p:notes>
+</file>
+
+<file path=ppt/notesSlides/notesSlide12.xml><?xml version="1.0" encoding="utf-8"?>
+<p:notes xmlns:a="http://schemas.openxmlformats.org/drawingml/2006/main" xmlns:p="http://schemas.openxmlformats.org/presentationml/2006/main" xmlns:r="http://schemas.openxmlformats.org/officeDocument/2006/relationships">
+  <p:cSld>
+    <p:spTree>
+      <p:nvGrpSpPr>
+        <p:cNvPr id="1" name=""/>
+        <p:cNvGrpSpPr/>
+        <p:nvPr/>
+      </p:nvGrpSpPr>
+      <p:grpSpPr>
+        <a:xfrm>
+          <a:off x="0" y="0"/>
+          <a:ext cx="0" cy="0"/>
+          <a:chOff x="0" y="0"/>
+          <a:chExt cx="0" cy="0"/>
+        </a:xfrm>
+      </p:grpSpPr>
+      <p:sp>
+        <p:nvSpPr>
+          <p:cNvPr id="2" name="Slide Image Placeholder 1"/>
+          <p:cNvSpPr>
+            <a:spLocks noGrp="1"/>
+          </p:cNvSpPr>
+          <p:nvPr>
+            <p:ph type="sldImg" idx="2"/>
+          </p:nvPr>
+        </p:nvSpPr>
+        <p:spPr/>
+      </p:sp>
+      <p:sp>
+        <p:nvSpPr>
+          <p:cNvPr id="3" name="Notes Placeholder 2"/>
+          <p:cNvSpPr>
+            <a:spLocks noGrp="1"/>
+          </p:cNvSpPr>
+          <p:nvPr>
+            <p:ph type="body" idx="3" sz="quarter"/>
+          </p:nvPr>
+        </p:nvSpPr>
+        <p:spPr/>
+        <p:txBody>
+          <a:bodyPr/>
+          <a:lstStyle/>
+          <a:p>
+            <a:r>
+              <a:t>[~1:00]</a:t>
+            </a:r>
+          </a:p>
+          <a:p/>
+          <a:p>
+            <a:r>
+              <a:t>WHY THIS SLIDE</a:t>
+            </a:r>
+          </a:p>
+          <a:p>
+            <a:r>
+              <a:t>Academic honesty, and pre-empting the two hardest questions a sharp reviewer</a:t>
+            </a:r>
+          </a:p>
+          <a:p>
+            <a:r>
+              <a:t>in the audience is likely to ask. Handling this well BEFORE Q&amp;A makes the</a:t>
+            </a:r>
+          </a:p>
+          <a:p>
+            <a:r>
+              <a:t>actual Q&amp;A much easier.</a:t>
+            </a:r>
+          </a:p>
+          <a:p/>
+          <a:p>
+            <a:r>
+              <a:t>WHAT TO SAY</a:t>
+            </a:r>
+          </a:p>
+          <a:p>
+            <a:r>
+              <a:t>First limitation: "Our system's understanding is limited by what information</a:t>
+            </a:r>
+          </a:p>
+          <a:p>
+            <a:r>
+              <a:t>even makes it into the sentence at step 1. Concretely: at the level of 'which</a:t>
+            </a:r>
+          </a:p>
+          <a:p>
+            <a:r>
+              <a:t>port, how many packets, how big,' several genuinely different attacker actions</a:t>
+            </a:r>
+          </a:p>
+          <a:p>
+            <a:r>
+              <a:t>look almost statistically identical - so no amount of clever AI reasoning</a:t>
+            </a:r>
+          </a:p>
+          <a:p>
+            <a:r>
+              <a:t>downstream can recover information that was simply never captured in the first</a:t>
+            </a:r>
+          </a:p>
+          <a:p>
+            <a:r>
+              <a:t>place. Fixing this means capturing richer detail per alert, which is future</a:t>
+            </a:r>
+          </a:p>
+          <a:p>
+            <a:r>
+              <a:t>work." Second limitation, the harder one, worth explaining carefully rather</a:t>
+            </a:r>
+          </a:p>
+          <a:p>
+            <a:r>
+              <a:t>than rushing: "The small lookup table connecting behaviours to official</a:t>
+            </a:r>
+          </a:p>
+          <a:p>
+            <a:r>
+              <a:t>technique IDs was built by hand, by the same person who also decided what the</a:t>
+            </a:r>
+          </a:p>
+          <a:p>
+            <a:r>
+              <a:t>correct answer is for each test case. That's a legitimate worry - maybe the</a:t>
+            </a:r>
+          </a:p>
+          <a:p>
+            <a:r>
+              <a:t>map already secretly knows the answer, rather than the system genuinely</a:t>
+            </a:r>
+          </a:p>
+          <a:p>
+            <a:r>
+              <a:t>reasoning. Three things push back on that concern: first, the map is</a:t>
+            </a:r>
+          </a:p>
+          <a:p>
+            <a:r>
+              <a:t>one-to-many - one behaviour can point to several possible techniques, it</a:t>
+            </a:r>
+          </a:p>
+          <a:p>
+            <a:r>
+              <a:t>doesn't just hand over a single unique answer. Second, we separately tested</a:t>
+            </a:r>
+          </a:p>
+          <a:p>
+            <a:r>
+              <a:t>removing a hand-tuned preference rule from the final scoring step, and it</a:t>
+            </a:r>
+          </a:p>
+          <a:p>
+            <a:r>
+              <a:t>barely changed any predictions - so the results aren't propped up by some</a:t>
+            </a:r>
+          </a:p>
+          <a:p>
+            <a:r>
+              <a:t>hidden manual shortcut. Third, and most convincingly, on the DARPA dataset,</a:t>
+            </a:r>
+          </a:p>
+          <a:p>
+            <a:r>
+              <a:t>where the correct answers came from an independent official report rather</a:t>
+            </a:r>
+          </a:p>
+          <a:p>
+            <a:r>
+              <a:t>than our own judgement, that same lookup table only reaches about 50% recall -</a:t>
+            </a:r>
+          </a:p>
+          <a:p>
+            <a:r>
+              <a:t>if it really were secretly encoding the answer key, it should have scored</a:t>
+            </a:r>
+          </a:p>
+          <a:p>
+            <a:r>
+              <a:t>close to 100% there too, and it doesn't."</a:t>
+            </a:r>
+          </a:p>
+          <a:p/>
+          <a:p>
+            <a:r>
+              <a:t>KEY TERMS</a:t>
+            </a:r>
+          </a:p>
+          <a:p>
+            <a:r>
+              <a:t>Circularity (the general concern, not a term used on the slide itself): when</a:t>
+            </a:r>
+          </a:p>
+          <a:p>
+            <a:r>
+              <a:t>the thing being tested and the standard it's tested against are built by the</a:t>
+            </a:r>
+          </a:p>
+          <a:p>
+            <a:r>
+              <a:t>same process or person, so a good score might just reflect that shared</a:t>
+            </a:r>
+          </a:p>
+          <a:p>
+            <a:r>
+              <a:t>construction rather than genuine capability.</a:t>
+            </a:r>
+          </a:p>
+          <a:p>
+            <a:r>
+              <a:t>Recall (reminder from slide 7): of everything that was actually true, how much</a:t>
+            </a:r>
+          </a:p>
+          <a:p>
+            <a:r>
+              <a:t>did we correctly identify - here, of all the real DARPA attack techniques,</a:t>
+            </a:r>
+          </a:p>
+          <a:p>
+            <a:r>
+              <a:t>how many did the hand-built map correctly reach.</a:t>
+            </a:r>
+          </a:p>
+          <a:p/>
+          <a:p>
+            <a:r>
+              <a:t>WHAT THE RESULT MEANS</a:t>
+            </a:r>
+          </a:p>
+          <a:p>
+            <a:r>
+              <a:t>Both limitations are honestly reported constraints on how far the results</a:t>
+            </a:r>
+          </a:p>
+          <a:p>
+            <a:r>
+              <a:t>generalise, not flaws that invalidate the findings - and the paper gives</a:t>
+            </a:r>
+          </a:p>
+          <a:p>
+            <a:r>
+              <a:t>concrete evidence (the DARPA recall figure especially) rather than just</a:t>
+            </a:r>
+          </a:p>
+          <a:p>
+            <a:r>
+              <a:t>asserting the concern away.</a:t>
+            </a:r>
+          </a:p>
+          <a:p/>
+          <a:p>
+            <a:r>
+              <a:t>IF ASKED / IF STUCK</a:t>
+            </a:r>
+          </a:p>
+          <a:p>
+            <a:r>
+              <a:t>If a reviewer pushes hard on circularity: the single strongest one-line answer</a:t>
+            </a:r>
+          </a:p>
+          <a:p>
+            <a:r>
+              <a:t>is "the same mapping only reaches 50% recall on an independently-sourced</a:t>
+            </a:r>
+          </a:p>
+          <a:p>
+            <a:r>
+              <a:t>ground truth - a mapping that was secretly cheating would not fail on data it</a:t>
+            </a:r>
+          </a:p>
+          <a:p>
+            <a:r>
+              <a:t>had no hand in labelling."</a:t>
+            </a:r>
+          </a:p>
+        </p:txBody>
+      </p:sp>
+      <p:sp>
+        <p:nvSpPr>
+          <p:cNvPr id="4" name="Slide Number Placeholder 3"/>
+          <p:cNvSpPr>
+            <a:spLocks noGrp="1"/>
+          </p:cNvSpPr>
+          <p:nvPr>
+            <p:ph type="sldNum" idx="5" sz="quarter"/>
+          </p:nvPr>
+        </p:nvSpPr>
+        <p:spPr/>
+      </p:sp>
+    </p:spTree>
+  </p:cSld>
+  <p:clrMapOvr>
+    <a:masterClrMapping/>
+  </p:clrMapOvr>
+</p:notes>
+</file>
+
+<file path=ppt/notesSlides/notesSlide13.xml><?xml version="1.0" encoding="utf-8"?>
+<p:notes xmlns:a="http://schemas.openxmlformats.org/drawingml/2006/main" xmlns:p="http://schemas.openxmlformats.org/presentationml/2006/main" xmlns:r="http://schemas.openxmlformats.org/officeDocument/2006/relationships">
+  <p:cSld>
+    <p:spTree>
+      <p:nvGrpSpPr>
+        <p:cNvPr id="1" name=""/>
+        <p:cNvGrpSpPr/>
+        <p:nvPr/>
+      </p:nvGrpSpPr>
+      <p:grpSpPr>
+        <a:xfrm>
+          <a:off x="0" y="0"/>
+          <a:ext cx="0" cy="0"/>
+          <a:chOff x="0" y="0"/>
+          <a:chExt cx="0" cy="0"/>
+        </a:xfrm>
+      </p:grpSpPr>
+      <p:sp>
+        <p:nvSpPr>
+          <p:cNvPr id="2" name="Slide Image Placeholder 1"/>
+          <p:cNvSpPr>
+            <a:spLocks noGrp="1"/>
+          </p:cNvSpPr>
+          <p:nvPr>
+            <p:ph type="sldImg" idx="2"/>
+          </p:nvPr>
+        </p:nvSpPr>
+        <p:spPr/>
+      </p:sp>
+      <p:sp>
+        <p:nvSpPr>
+          <p:cNvPr id="3" name="Notes Placeholder 2"/>
+          <p:cNvSpPr>
+            <a:spLocks noGrp="1"/>
+          </p:cNvSpPr>
+          <p:nvPr>
+            <p:ph type="body" idx="3" sz="quarter"/>
+          </p:nvPr>
+        </p:nvSpPr>
+        <p:spPr/>
+        <p:txBody>
+          <a:bodyPr/>
+          <a:lstStyle/>
+          <a:p>
+            <a:r>
+              <a:t>[~0:45]</a:t>
+            </a:r>
+          </a:p>
+          <a:p/>
+          <a:p>
+            <a:r>
+              <a:t>WHY THIS SLIDE</a:t>
+            </a:r>
+          </a:p>
+          <a:p>
+            <a:r>
+              <a:t>The "what did we actually add to the field" slide - summarised in the</a:t>
+            </a:r>
+          </a:p>
+          <a:p>
+            <a:r>
+              <a:t>categories researchers use to judge a paper's contribution, rather than</a:t>
+            </a:r>
+          </a:p>
+          <a:p>
+            <a:r>
+              <a:t>restating numbers already shown.</a:t>
+            </a:r>
+          </a:p>
+          <a:p/>
+          <a:p>
+            <a:r>
+              <a:t>WHAT TO SAY</a:t>
+            </a:r>
+          </a:p>
+          <a:p>
+            <a:r>
+              <a:t>Explain the three words as CATEGORIES of contribution, then tie each to one</a:t>
+            </a:r>
+          </a:p>
+          <a:p>
+            <a:r>
+              <a:t>thing already shown: "Architectural means a methods or design idea - ours is</a:t>
+            </a:r>
+          </a:p>
+          <a:p>
+            <a:r>
+              <a:t>that anchoring retrieval in extracted behaviour turns an open search over 691</a:t>
+            </a:r>
+          </a:p>
+          <a:p>
+            <a:r>
+              <a:t>techniques into a closed-set choice, and we proved that with the ablation a</a:t>
+            </a:r>
+          </a:p>
+          <a:p>
+            <a:r>
+              <a:t>few slides back, where removing the constraint collapsed performance.</a:t>
+            </a:r>
+          </a:p>
+          <a:p>
+            <a:r>
+              <a:t>Empirical means a set of measured results - ours span three models and two</a:t>
+            </a:r>
+          </a:p>
+          <a:p>
+            <a:r>
+              <a:t>very different datasets, all on one consumer laptop, and show the model</a:t>
+            </a:r>
+          </a:p>
+          <a:p>
+            <a:r>
+              <a:t>ranking is not fixed, it depends on the data. Evaluative means a way of</a:t>
+            </a:r>
+          </a:p>
+          <a:p>
+            <a:r>
+              <a:t>judging or measuring things - ours is the dual-metric warning from the</a:t>
+            </a:r>
+          </a:p>
+          <a:p>
+            <a:r>
+              <a:t>correctness-versus-grounding slide: report both, because grounding alone can</a:t>
+            </a:r>
+          </a:p>
+          <a:p>
+            <a:r>
+              <a:t>rank the worst model first."</a:t>
+            </a:r>
+          </a:p>
+          <a:p/>
+          <a:p>
+            <a:r>
+              <a:t>KEY TERMS</a:t>
+            </a:r>
+          </a:p>
+          <a:p>
+            <a:r>
+              <a:t>(No new terms - this slide is a summary label for findings already explained</a:t>
+            </a:r>
+          </a:p>
+          <a:p>
+            <a:r>
+              <a:t>in detail on slides 8, 9, 10, and 11.)</a:t>
+            </a:r>
+          </a:p>
+          <a:p/>
+          <a:p>
+            <a:r>
+              <a:t>WHAT THE RESULT MEANS</a:t>
+            </a:r>
+          </a:p>
+          <a:p>
+            <a:r>
+              <a:t>This is not a new finding - it's how to correctly categorise the findings</a:t>
+            </a:r>
+          </a:p>
+          <a:p>
+            <a:r>
+              <a:t>you've already shown when someone later asks "so what's the contribution of</a:t>
+            </a:r>
+          </a:p>
+          <a:p>
+            <a:r>
+              <a:t>this paper?"</a:t>
+            </a:r>
+          </a:p>
+          <a:p/>
+          <a:p>
+            <a:r>
+              <a:t>IF ASKED / IF STUCK</a:t>
+            </a:r>
+          </a:p>
+          <a:p>
+            <a:r>
+              <a:t>If you're short on time, this slide can be compressed to one sentence: "Three</a:t>
+            </a:r>
+          </a:p>
+          <a:p>
+            <a:r>
+              <a:t>things: the constraint itself is what works, it works across models and</a:t>
+            </a:r>
+          </a:p>
+          <a:p>
+            <a:r>
+              <a:t>datasets, and correctness and grounding need to be measured separately."</a:t>
+            </a:r>
+          </a:p>
+        </p:txBody>
+      </p:sp>
+      <p:sp>
+        <p:nvSpPr>
+          <p:cNvPr id="4" name="Slide Number Placeholder 3"/>
+          <p:cNvSpPr>
+            <a:spLocks noGrp="1"/>
+          </p:cNvSpPr>
+          <p:nvPr>
+            <p:ph type="sldNum" idx="5" sz="quarter"/>
+          </p:nvPr>
+        </p:nvSpPr>
+        <p:spPr/>
+      </p:sp>
+    </p:spTree>
+  </p:cSld>
+  <p:clrMapOvr>
+    <a:masterClrMapping/>
+  </p:clrMapOvr>
+</p:notes>
+</file>
+
+<file path=ppt/notesSlides/notesSlide14.xml><?xml version="1.0" encoding="utf-8"?>
+<p:notes xmlns:a="http://schemas.openxmlformats.org/drawingml/2006/main" xmlns:p="http://schemas.openxmlformats.org/presentationml/2006/main" xmlns:r="http://schemas.openxmlformats.org/officeDocument/2006/relationships">
+  <p:cSld>
+    <p:spTree>
+      <p:nvGrpSpPr>
+        <p:cNvPr id="1" name=""/>
+        <p:cNvGrpSpPr/>
+        <p:nvPr/>
+      </p:nvGrpSpPr>
+      <p:grpSpPr>
+        <a:xfrm>
+          <a:off x="0" y="0"/>
+          <a:ext cx="0" cy="0"/>
+          <a:chOff x="0" y="0"/>
+          <a:chExt cx="0" cy="0"/>
+        </a:xfrm>
+      </p:grpSpPr>
+      <p:sp>
+        <p:nvSpPr>
+          <p:cNvPr id="2" name="Slide Image Placeholder 1"/>
+          <p:cNvSpPr>
+            <a:spLocks noGrp="1"/>
+          </p:cNvSpPr>
+          <p:nvPr>
+            <p:ph type="sldImg" idx="2"/>
+          </p:nvPr>
+        </p:nvSpPr>
+        <p:spPr/>
+      </p:sp>
+      <p:sp>
+        <p:nvSpPr>
+          <p:cNvPr id="3" name="Notes Placeholder 2"/>
+          <p:cNvSpPr>
+            <a:spLocks noGrp="1"/>
+          </p:cNvSpPr>
+          <p:nvPr>
+            <p:ph type="body" idx="3" sz="quarter"/>
+          </p:nvPr>
+        </p:nvSpPr>
+        <p:spPr/>
+        <p:txBody>
+          <a:bodyPr/>
+          <a:lstStyle/>
+          <a:p>
+            <a:r>
+              <a:t>[~0:45]</a:t>
+            </a:r>
+          </a:p>
+          <a:p/>
+          <a:p>
+            <a:r>
+              <a:t>WHY THIS SLIDE</a:t>
+            </a:r>
+          </a:p>
+          <a:p>
+            <a:r>
+              <a:t>The closing summary and the forward-looking view - leave the room with the one</a:t>
+            </a:r>
+          </a:p>
+          <a:p>
+            <a:r>
+              <a:t>sentence to remember, and the sense that this is a live research direction,</a:t>
+            </a:r>
+          </a:p>
+          <a:p>
+            <a:r>
+              <a:t>not a closed, finished topic.</a:t>
+            </a:r>
+          </a:p>
+          <a:p/>
+          <a:p>
+            <a:r>
+              <a:t>WHAT TO SAY</a:t>
+            </a:r>
+          </a:p>
+          <a:p>
+            <a:r>
+              <a:t>Restate the main finding even more simply than the slide text: "The short</a:t>
+            </a:r>
+          </a:p>
+          <a:p>
+            <a:r>
+              <a:t>version: giving the AI a graph built from real observed behaviour, instead of</a:t>
+            </a:r>
+          </a:p>
+          <a:p>
+            <a:r>
+              <a:t>letting it search everything, made every single model we tried better - and</a:t>
+            </a:r>
+          </a:p>
+          <a:p>
+            <a:r>
+              <a:t>every mistake that's left traces back to one specific step, reading the raw</a:t>
+            </a:r>
+          </a:p>
+          <a:p>
+            <a:r>
+              <a:t>evidence, not to the search itself." Then one plain sentence per future-work</a:t>
+            </a:r>
+          </a:p>
+          <a:p>
+            <a:r>
+              <a:t>bullet: "Capturing richer detail per alert would raise the ceiling from the</a:t>
+            </a:r>
+          </a:p>
+          <a:p>
+            <a:r>
+              <a:t>first limitation slide. Having someone who has never seen the test answers</a:t>
+            </a:r>
+          </a:p>
+          <a:p>
+            <a:r>
+              <a:t>build the lookup table would directly settle the circularity question for</a:t>
+            </a:r>
+          </a:p>
+          <a:p>
+            <a:r>
+              <a:t>good. Letting the system take multiple passes instead of one shot could catch</a:t>
+            </a:r>
+          </a:p>
+          <a:p>
+            <a:r>
+              <a:t>its own mistakes. And having real human security analysts judge whether the</a:t>
+            </a:r>
+          </a:p>
+          <a:p>
+            <a:r>
+              <a:t>reports are actually useful in practice - not just automated metrics - is</a:t>
+            </a:r>
+          </a:p>
+          <a:p>
+            <a:r>
+              <a:t>the natural next validation step."</a:t>
+            </a:r>
+          </a:p>
+          <a:p/>
+          <a:p>
+            <a:r>
+              <a:t>KEY TERMS</a:t>
+            </a:r>
+          </a:p>
+          <a:p>
+            <a:r>
+              <a:t>(No new terms.)</a:t>
+            </a:r>
+          </a:p>
+          <a:p/>
+          <a:p>
+            <a:r>
+              <a:t>WHAT THE RESULT MEANS</a:t>
+            </a:r>
+          </a:p>
+          <a:p>
+            <a:r>
+              <a:t>This slide has no new numbers - it is the "so what happens next" close.</a:t>
+            </a:r>
+          </a:p>
+          <a:p/>
+          <a:p>
+            <a:r>
+              <a:t>IF ASKED / IF STUCK</a:t>
+            </a:r>
+          </a:p>
+          <a:p>
+            <a:r>
+              <a:t>If time is short, you can skip straight from the first sentence to "thank</a:t>
+            </a:r>
+          </a:p>
+          <a:p>
+            <a:r>
+              <a:t>you" and mention future work only if someone asks about it in Q&amp;A.</a:t>
+            </a:r>
+          </a:p>
+        </p:txBody>
+      </p:sp>
+      <p:sp>
+        <p:nvSpPr>
+          <p:cNvPr id="4" name="Slide Number Placeholder 3"/>
+          <p:cNvSpPr>
+            <a:spLocks noGrp="1"/>
+          </p:cNvSpPr>
+          <p:nvPr>
+            <p:ph type="sldNum" idx="5" sz="quarter"/>
+          </p:nvPr>
+        </p:nvSpPr>
+        <p:spPr/>
+      </p:sp>
+    </p:spTree>
+  </p:cSld>
+  <p:clrMapOvr>
+    <a:masterClrMapping/>
+  </p:clrMapOvr>
+</p:notes>
+</file>
+
+<file path=ppt/notesSlides/notesSlide15.xml><?xml version="1.0" encoding="utf-8"?>
+<p:notes xmlns:a="http://schemas.openxmlformats.org/drawingml/2006/main" xmlns:p="http://schemas.openxmlformats.org/presentationml/2006/main" xmlns:r="http://schemas.openxmlformats.org/officeDocument/2006/relationships">
+  <p:cSld>
+    <p:spTree>
+      <p:nvGrpSpPr>
+        <p:cNvPr id="1" name=""/>
+        <p:cNvGrpSpPr/>
+        <p:nvPr/>
+      </p:nvGrpSpPr>
+      <p:grpSpPr>
+        <a:xfrm>
+          <a:off x="0" y="0"/>
+          <a:ext cx="0" cy="0"/>
+          <a:chOff x="0" y="0"/>
+          <a:chExt cx="0" cy="0"/>
+        </a:xfrm>
+      </p:grpSpPr>
+      <p:sp>
+        <p:nvSpPr>
+          <p:cNvPr id="2" name="Slide Image Placeholder 1"/>
+          <p:cNvSpPr>
+            <a:spLocks noGrp="1"/>
+          </p:cNvSpPr>
+          <p:nvPr>
+            <p:ph type="sldImg" idx="2"/>
+          </p:nvPr>
+        </p:nvSpPr>
+        <p:spPr/>
+      </p:sp>
+      <p:sp>
+        <p:nvSpPr>
+          <p:cNvPr id="3" name="Notes Placeholder 2"/>
+          <p:cNvSpPr>
+            <a:spLocks noGrp="1"/>
+          </p:cNvSpPr>
+          <p:nvPr>
+            <p:ph type="body" idx="3" sz="quarter"/>
+          </p:nvPr>
+        </p:nvSpPr>
+        <p:spPr/>
+        <p:txBody>
+          <a:bodyPr/>
+          <a:lstStyle/>
+          <a:p>
+            <a:r>
+              <a:t>[~0:10]</a:t>
+            </a:r>
+          </a:p>
+          <a:p/>
+          <a:p>
+            <a:r>
+              <a:t>WHY THIS SLIDE</a:t>
+            </a:r>
+          </a:p>
+          <a:p>
+            <a:r>
+              <a:t>A formal requirement, not a teaching moment - nobody expects you to read a</a:t>
+            </a:r>
+          </a:p>
+          <a:p>
+            <a:r>
+              <a:t>reference list aloud.</a:t>
+            </a:r>
+          </a:p>
+          <a:p/>
+          <a:p>
+            <a:r>
+              <a:t>WHAT TO SAY</a:t>
+            </a:r>
+          </a:p>
+          <a:p>
+            <a:r>
+              <a:t>"I won't read through every citation here, but this and the next slide cover</a:t>
+            </a:r>
+          </a:p>
+          <a:p>
+            <a:r>
+              <a:t>the key related work this builds on - happy to point anyone to a specific one</a:t>
+            </a:r>
+          </a:p>
+          <a:p>
+            <a:r>
+              <a:t>afterwards." Move on immediately.</a:t>
+            </a:r>
+          </a:p>
+          <a:p/>
+          <a:p>
+            <a:r>
+              <a:t>KEY TERMS / WHAT THE RESULT MEANS</a:t>
+            </a:r>
+          </a:p>
+          <a:p>
+            <a:r>
+              <a:t>Not applicable.</a:t>
+            </a:r>
+          </a:p>
+          <a:p/>
+          <a:p>
+            <a:r>
+              <a:t>IF ASKED / IF STUCK</a:t>
+            </a:r>
+          </a:p>
+          <a:p>
+            <a:r>
+              <a:t>If someone in Q&amp;A asks about a specific related system by name, you can say</a:t>
+            </a:r>
+          </a:p>
+          <a:p>
+            <a:r>
+              <a:t>"that's on the references slide, let's connect afterwards and I'll send you</a:t>
+            </a:r>
+          </a:p>
+          <a:p>
+            <a:r>
+              <a:t>the exact citation."</a:t>
+            </a:r>
+          </a:p>
+        </p:txBody>
+      </p:sp>
+      <p:sp>
+        <p:nvSpPr>
+          <p:cNvPr id="4" name="Slide Number Placeholder 3"/>
+          <p:cNvSpPr>
+            <a:spLocks noGrp="1"/>
+          </p:cNvSpPr>
+          <p:nvPr>
+            <p:ph type="sldNum" idx="5" sz="quarter"/>
+          </p:nvPr>
+        </p:nvSpPr>
+        <p:spPr/>
+      </p:sp>
+    </p:spTree>
+  </p:cSld>
+  <p:clrMapOvr>
+    <a:masterClrMapping/>
+  </p:clrMapOvr>
+</p:notes>
+</file>
+
+<file path=ppt/notesSlides/notesSlide16.xml><?xml version="1.0" encoding="utf-8"?>
+<p:notes xmlns:a="http://schemas.openxmlformats.org/drawingml/2006/main" xmlns:p="http://schemas.openxmlformats.org/presentationml/2006/main" xmlns:r="http://schemas.openxmlformats.org/officeDocument/2006/relationships">
+  <p:cSld>
+    <p:spTree>
+      <p:nvGrpSpPr>
+        <p:cNvPr id="1" name=""/>
+        <p:cNvGrpSpPr/>
+        <p:nvPr/>
+      </p:nvGrpSpPr>
+      <p:grpSpPr>
+        <a:xfrm>
+          <a:off x="0" y="0"/>
+          <a:ext cx="0" cy="0"/>
+          <a:chOff x="0" y="0"/>
+          <a:chExt cx="0" cy="0"/>
+        </a:xfrm>
+      </p:grpSpPr>
+      <p:sp>
+        <p:nvSpPr>
+          <p:cNvPr id="2" name="Slide Image Placeholder 1"/>
+          <p:cNvSpPr>
+            <a:spLocks noGrp="1"/>
+          </p:cNvSpPr>
+          <p:nvPr>
+            <p:ph type="sldImg" idx="2"/>
+          </p:nvPr>
+        </p:nvSpPr>
+        <p:spPr/>
+      </p:sp>
+      <p:sp>
+        <p:nvSpPr>
+          <p:cNvPr id="3" name="Notes Placeholder 2"/>
+          <p:cNvSpPr>
+            <a:spLocks noGrp="1"/>
+          </p:cNvSpPr>
+          <p:nvPr>
+            <p:ph type="body" idx="3" sz="quarter"/>
+          </p:nvPr>
+        </p:nvSpPr>
+        <p:spPr/>
+        <p:txBody>
+          <a:bodyPr/>
+          <a:lstStyle/>
+          <a:p>
+            <a:r>
+              <a:t>[~0:10]</a:t>
+            </a:r>
+          </a:p>
+          <a:p/>
+          <a:p>
+            <a:r>
+              <a:t>WHY THIS SLIDE</a:t>
+            </a:r>
+          </a:p>
+          <a:p>
+            <a:r>
+              <a:t>Continuation of the reference list (it did not fit on one slide).</a:t>
+            </a:r>
+          </a:p>
+          <a:p/>
+          <a:p>
+            <a:r>
+              <a:t>WHAT TO SAY</a:t>
+            </a:r>
+          </a:p>
+          <a:p>
+            <a:r>
+              <a:t>Same as the previous slide - do not read it aloud, briefly acknowledge it and</a:t>
+            </a:r>
+          </a:p>
+          <a:p>
+            <a:r>
+              <a:t>move to the closing slide.</a:t>
+            </a:r>
+          </a:p>
+          <a:p/>
+          <a:p>
+            <a:r>
+              <a:t>KEY TERMS / WHAT THE RESULT MEANS</a:t>
+            </a:r>
+          </a:p>
+          <a:p>
+            <a:r>
+              <a:t>Not applicable.</a:t>
+            </a:r>
+          </a:p>
+          <a:p/>
+          <a:p>
+            <a:r>
+              <a:t>IF ASKED / IF STUCK</a:t>
+            </a:r>
+          </a:p>
+          <a:p>
+            <a:r>
+              <a:t>If you're running long on time, you can skip straight past both reference</a:t>
+            </a:r>
+          </a:p>
+          <a:p>
+            <a:r>
+              <a:t>slides with just "full reference list is here" while advancing.</a:t>
+            </a:r>
+          </a:p>
+        </p:txBody>
+      </p:sp>
+      <p:sp>
+        <p:nvSpPr>
+          <p:cNvPr id="4" name="Slide Number Placeholder 3"/>
+          <p:cNvSpPr>
+            <a:spLocks noGrp="1"/>
+          </p:cNvSpPr>
+          <p:nvPr>
+            <p:ph type="sldNum" idx="5" sz="quarter"/>
+          </p:nvPr>
+        </p:nvSpPr>
+        <p:spPr/>
+      </p:sp>
+    </p:spTree>
+  </p:cSld>
+  <p:clrMapOvr>
+    <a:masterClrMapping/>
+  </p:clrMapOvr>
+</p:notes>
+</file>
+
+<file path=ppt/notesSlides/notesSlide17.xml><?xml version="1.0" encoding="utf-8"?>
+<p:notes xmlns:a="http://schemas.openxmlformats.org/drawingml/2006/main" xmlns:p="http://schemas.openxmlformats.org/presentationml/2006/main" xmlns:r="http://schemas.openxmlformats.org/officeDocument/2006/relationships">
+  <p:cSld>
+    <p:spTree>
+      <p:nvGrpSpPr>
+        <p:cNvPr id="1" name=""/>
+        <p:cNvGrpSpPr/>
+        <p:nvPr/>
+      </p:nvGrpSpPr>
+      <p:grpSpPr>
+        <a:xfrm>
+          <a:off x="0" y="0"/>
+          <a:ext cx="0" cy="0"/>
+          <a:chOff x="0" y="0"/>
+          <a:chExt cx="0" cy="0"/>
+        </a:xfrm>
+      </p:grpSpPr>
+      <p:sp>
+        <p:nvSpPr>
+          <p:cNvPr id="2" name="Slide Image Placeholder 1"/>
+          <p:cNvSpPr>
+            <a:spLocks noGrp="1"/>
+          </p:cNvSpPr>
+          <p:nvPr>
+            <p:ph type="sldImg" idx="2"/>
+          </p:nvPr>
+        </p:nvSpPr>
+        <p:spPr/>
+      </p:sp>
+      <p:sp>
+        <p:nvSpPr>
+          <p:cNvPr id="3" name="Notes Placeholder 2"/>
+          <p:cNvSpPr>
+            <a:spLocks noGrp="1"/>
+          </p:cNvSpPr>
+          <p:nvPr>
+            <p:ph type="body" idx="3" sz="quarter"/>
+          </p:nvPr>
+        </p:nvSpPr>
+        <p:spPr/>
+        <p:txBody>
+          <a:bodyPr/>
+          <a:lstStyle/>
+          <a:p>
+            <a:r>
+              <a:t>[~0:15]</a:t>
+            </a:r>
+          </a:p>
+          <a:p/>
+          <a:p>
+            <a:r>
+              <a:t>WHY THIS SLIDE</a:t>
+            </a:r>
+          </a:p>
+          <a:p>
+            <a:r>
+              <a:t>Signal clearly that the talk is over and invite questions - respect the</a:t>
+            </a:r>
+          </a:p>
+          <a:p>
+            <a:r>
+              <a:t>moderator's time and don't let the ending trail off awkwardly.</a:t>
+            </a:r>
+          </a:p>
+          <a:p/>
+          <a:p>
+            <a:r>
+              <a:t>WHAT TO SAY</a:t>
+            </a:r>
+          </a:p>
+          <a:p>
+            <a:r>
+              <a:t>"Thank you - I'm happy to take any questions." If time is genuinely short, add:</a:t>
+            </a:r>
+          </a:p>
+          <a:p>
+            <a:r>
+              <a:t>"and if we run out of time, please do find me afterwards, or during the coffee</a:t>
+            </a:r>
+          </a:p>
+          <a:p>
+            <a:r>
+              <a:t>break - I'd love to talk about it more."</a:t>
+            </a:r>
+          </a:p>
+          <a:p/>
+          <a:p>
+            <a:r>
+              <a:t>KEY TERMS / WHAT THE RESULT MEANS</a:t>
+            </a:r>
+          </a:p>
+          <a:p>
+            <a:r>
+              <a:t>Not applicable.</a:t>
+            </a:r>
+          </a:p>
+          <a:p/>
+          <a:p>
+            <a:r>
+              <a:t>IF ASKED / IF STUCK</a:t>
+            </a:r>
+          </a:p>
+          <a:p>
+            <a:r>
+              <a:t>The three questions most likely to come up, with where to point back to if</a:t>
+            </a:r>
+          </a:p>
+          <a:p>
+            <a:r>
+              <a:t>your mind goes blank in the moment: (1) "Isn't your bridge mapping circular?"</a:t>
+            </a:r>
+          </a:p>
+          <a:p>
+            <a:r>
+              <a:t>- point back to slide 12, lead with the DARPA 50% recall figure. (2) "Where do</a:t>
+            </a:r>
+          </a:p>
+          <a:p>
+            <a:r>
+              <a:t>your errors actually come from?" - point back to slide 8, lead with "every</a:t>
+            </a:r>
+          </a:p>
+          <a:p>
+            <a:r>
+              <a:t>model's accuracy equals its reachability." (3) "Does this only work on your</a:t>
+            </a:r>
+          </a:p>
+          <a:p>
+            <a:r>
+              <a:t>one dataset?" - point back to slide 10, lead with the +0.43 F1 transfer result</a:t>
+            </a:r>
+          </a:p>
+          <a:p>
+            <a:r>
+              <a:t>with disjoint confidence intervals.</a:t>
+            </a:r>
+          </a:p>
+        </p:txBody>
+      </p:sp>
+      <p:sp>
+        <p:nvSpPr>
+          <p:cNvPr id="4" name="Slide Number Placeholder 3"/>
+          <p:cNvSpPr>
+            <a:spLocks noGrp="1"/>
+          </p:cNvSpPr>
+          <p:nvPr>
+            <p:ph type="sldNum" idx="5" sz="quarter"/>
+          </p:nvPr>
+        </p:nvSpPr>
+        <p:spPr/>
+      </p:sp>
+    </p:spTree>
+  </p:cSld>
+  <p:clrMapOvr>
+    <a:masterClrMapping/>
+  </p:clrMapOvr>
+</p:notes>
+</file>
+
+<file path=ppt/notesSlides/notesSlide2.xml><?xml version="1.0" encoding="utf-8"?>
+<p:notes xmlns:a="http://schemas.openxmlformats.org/drawingml/2006/main" xmlns:p="http://schemas.openxmlformats.org/presentationml/2006/main" xmlns:r="http://schemas.openxmlformats.org/officeDocument/2006/relationships">
+  <p:cSld>
+    <p:spTree>
+      <p:nvGrpSpPr>
+        <p:cNvPr id="1" name=""/>
+        <p:cNvGrpSpPr/>
+        <p:nvPr/>
+      </p:nvGrpSpPr>
+      <p:grpSpPr>
+        <a:xfrm>
+          <a:off x="0" y="0"/>
+          <a:ext cx="0" cy="0"/>
+          <a:chOff x="0" y="0"/>
+          <a:chExt cx="0" cy="0"/>
+        </a:xfrm>
+      </p:grpSpPr>
+      <p:sp>
+        <p:nvSpPr>
+          <p:cNvPr id="2" name="Slide Image Placeholder 1"/>
+          <p:cNvSpPr>
+            <a:spLocks noGrp="1"/>
+          </p:cNvSpPr>
+          <p:nvPr>
+            <p:ph type="sldImg" idx="2"/>
+          </p:nvPr>
+        </p:nvSpPr>
+        <p:spPr/>
+      </p:sp>
+      <p:sp>
+        <p:nvSpPr>
+          <p:cNvPr id="3" name="Notes Placeholder 2"/>
+          <p:cNvSpPr>
+            <a:spLocks noGrp="1"/>
+          </p:cNvSpPr>
+          <p:nvPr>
+            <p:ph type="body" idx="3" sz="quarter"/>
+          </p:nvPr>
+        </p:nvSpPr>
+        <p:spPr/>
+        <p:txBody>
+          <a:bodyPr/>
+          <a:lstStyle/>
+          <a:p>
+            <a:r>
+              <a:t>[~1:00]</a:t>
+            </a:r>
+          </a:p>
+          <a:p/>
+          <a:p>
+            <a:r>
+              <a:t>WHY THIS SLIDE</a:t>
+            </a:r>
+          </a:p>
+          <a:p>
+            <a:r>
+              <a:t>Before anyone cares about your solution, they need to feel the problem. This is</a:t>
+            </a:r>
+          </a:p>
+          <a:p>
+            <a:r>
+              <a:t>the classic opening move in any research talk: establish why anyone in the room</a:t>
+            </a:r>
+          </a:p>
+          <a:p>
+            <a:r>
+              <a:t>should spend the next 18 minutes listening to you.</a:t>
+            </a:r>
+          </a:p>
+          <a:p/>
+          <a:p>
+            <a:r>
+              <a:t>WHAT TO SAY</a:t>
+            </a:r>
+          </a:p>
+          <a:p>
+            <a:r>
+              <a:t>Paint a concrete picture rather than reading the bullets: "Imagine a bank's</a:t>
+            </a:r>
+          </a:p>
+          <a:p>
+            <a:r>
+              <a:t>security team. Every second, alerts are firing - someone's VPN login looked odd,</a:t>
+            </a:r>
+          </a:p>
+          <a:p>
+            <a:r>
+              <a:t>a server got an unusual number of connections, a file changed permissions.</a:t>
+            </a:r>
+          </a:p>
+          <a:p>
+            <a:r>
+              <a:t>Thousands of these a day. The vast majority are nothing - a false alarm - but</a:t>
+            </a:r>
+          </a:p>
+          <a:p>
+            <a:r>
+              <a:t>somewhere in that pile might be one real attacker. Four things make this</a:t>
+            </a:r>
+          </a:p>
+          <a:p>
+            <a:r>
+              <a:t>genuinely hard today." Then hit the four bullets in your own words: (1) the</a:t>
+            </a:r>
+          </a:p>
+          <a:p>
+            <a:r>
+              <a:t>sheer volume plus how many are noise, (2) tools look at each alert in isolation</a:t>
+            </a:r>
+          </a:p>
+          <a:p>
+            <a:r>
+              <a:t>and lose the story of an attack that unfolds across many alerts, (3) when an AI</a:t>
+            </a:r>
+          </a:p>
+          <a:p>
+            <a:r>
+              <a:t>writes a report, we currently judge it by whether it "reads well," not whether</a:t>
+            </a:r>
+          </a:p>
+          <a:p>
+            <a:r>
+              <a:t>it's actually correct against a real authority, and (4) most AI tools for this</a:t>
+            </a:r>
+          </a:p>
+          <a:p>
+            <a:r>
+              <a:t>send your logs to someone else's cloud server, which is simply not allowed for</a:t>
+            </a:r>
+          </a:p>
+          <a:p>
+            <a:r>
+              <a:t>a bank, a hospital, or a government network.</a:t>
+            </a:r>
+          </a:p>
+          <a:p/>
+          <a:p>
+            <a:r>
+              <a:t>KEY TERMS</a:t>
+            </a:r>
+          </a:p>
+          <a:p>
+            <a:r>
+              <a:t>False positive: an alert that LOOKS suspicious but turns out to be harmless -</a:t>
+            </a:r>
+          </a:p>
+          <a:p>
+            <a:r>
+              <a:t>e.g. an employee mistypes their password three times in a row and it looks</a:t>
+            </a:r>
+          </a:p>
+          <a:p>
+            <a:r>
+              <a:t>identical, statistically, to the start of a brute-force attack.</a:t>
+            </a:r>
+          </a:p>
+          <a:p>
+            <a:r>
+              <a:t>False positive rate: of all the alerts the system flagged as suspicious, what</a:t>
+            </a:r>
+          </a:p>
+          <a:p>
+            <a:r>
+              <a:t>fraction were actually harmless. "Up to 70%" means for every 10 alerts a real</a:t>
+            </a:r>
+          </a:p>
+          <a:p>
+            <a:r>
+              <a:t>SOC investigates, as many as 7 can turn out to be nothing - which is exactly</a:t>
+            </a:r>
+          </a:p>
+          <a:p>
+            <a:r>
+              <a:t>why analysts get worn down and start ignoring alerts (this is sometimes called</a:t>
+            </a:r>
+          </a:p>
+          <a:p>
+            <a:r>
+              <a:t>"alert fatigue," though the slide does not use that exact word).</a:t>
+            </a:r>
+          </a:p>
+          <a:p/>
+          <a:p>
+            <a:r>
+              <a:t>WHAT THE RESULT MEANS</a:t>
+            </a:r>
+          </a:p>
+          <a:p>
+            <a:r>
+              <a:t>There is no result to interpret here yet - this slide is pure motivation. Do</a:t>
+            </a:r>
+          </a:p>
+          <a:p>
+            <a:r>
+              <a:t>not spend time justifying the "10,000" or "70%" numbers; they are industry</a:t>
+            </a:r>
+          </a:p>
+          <a:p>
+            <a:r>
+              <a:t>context from the paper's cited sources, not something we measured ourselves.</a:t>
+            </a:r>
+          </a:p>
+          <a:p/>
+          <a:p>
+            <a:r>
+              <a:t>IF ASKED / IF STUCK</a:t>
+            </a:r>
+          </a:p>
+          <a:p>
+            <a:r>
+              <a:t>If someone asks "is 70% a number you measured?" - no, that is a widely cited</a:t>
+            </a:r>
+          </a:p>
+          <a:p>
+            <a:r>
+              <a:t>industry figure from prior published work (cited in the paper), used here only</a:t>
+            </a:r>
+          </a:p>
+          <a:p>
+            <a:r>
+              <a:t>to establish the scale of the problem, not as one of our results.</a:t>
+            </a:r>
+          </a:p>
+        </p:txBody>
+      </p:sp>
+      <p:sp>
+        <p:nvSpPr>
+          <p:cNvPr id="4" name="Slide Number Placeholder 3"/>
+          <p:cNvSpPr>
+            <a:spLocks noGrp="1"/>
+          </p:cNvSpPr>
+          <p:nvPr>
+            <p:ph type="sldNum" idx="5" sz="quarter"/>
+          </p:nvPr>
+        </p:nvSpPr>
+        <p:spPr/>
+      </p:sp>
+    </p:spTree>
+  </p:cSld>
+  <p:clrMapOvr>
+    <a:masterClrMapping/>
+  </p:clrMapOvr>
+</p:notes>
+</file>
+
+<file path=ppt/notesSlides/notesSlide3.xml><?xml version="1.0" encoding="utf-8"?>
+<p:notes xmlns:a="http://schemas.openxmlformats.org/drawingml/2006/main" xmlns:p="http://schemas.openxmlformats.org/presentationml/2006/main" xmlns:r="http://schemas.openxmlformats.org/officeDocument/2006/relationships">
+  <p:cSld>
+    <p:spTree>
+      <p:nvGrpSpPr>
+        <p:cNvPr id="1" name=""/>
+        <p:cNvGrpSpPr/>
+        <p:nvPr/>
+      </p:nvGrpSpPr>
+      <p:grpSpPr>
+        <a:xfrm>
+          <a:off x="0" y="0"/>
+          <a:ext cx="0" cy="0"/>
+          <a:chOff x="0" y="0"/>
+          <a:chExt cx="0" cy="0"/>
+        </a:xfrm>
+      </p:grpSpPr>
+      <p:sp>
+        <p:nvSpPr>
+          <p:cNvPr id="2" name="Slide Image Placeholder 1"/>
+          <p:cNvSpPr>
+            <a:spLocks noGrp="1"/>
+          </p:cNvSpPr>
+          <p:nvPr>
+            <p:ph type="sldImg" idx="2"/>
+          </p:nvPr>
+        </p:nvSpPr>
+        <p:spPr/>
+      </p:sp>
+      <p:sp>
+        <p:nvSpPr>
+          <p:cNvPr id="3" name="Notes Placeholder 2"/>
+          <p:cNvSpPr>
+            <a:spLocks noGrp="1"/>
+          </p:cNvSpPr>
+          <p:nvPr>
+            <p:ph type="body" idx="3" sz="quarter"/>
+          </p:nvPr>
+        </p:nvSpPr>
+        <p:spPr/>
+        <p:txBody>
+          <a:bodyPr/>
+          <a:lstStyle/>
+          <a:p>
+            <a:r>
+              <a:t>[~1:15]</a:t>
+            </a:r>
+          </a:p>
+          <a:p/>
+          <a:p>
+            <a:r>
+              <a:t>WHY THIS SLIDE</a:t>
+            </a:r>
+          </a:p>
+          <a:p>
+            <a:r>
+              <a:t>This is the single sentence of the whole talk a listener should remember even</a:t>
+            </a:r>
+          </a:p>
+          <a:p>
+            <a:r>
+              <a:t>if they forget everything else. Slow down here. This is the paper's thesis</a:t>
+            </a:r>
+          </a:p>
+          <a:p>
+            <a:r>
+              <a:t>statement.</a:t>
+            </a:r>
+          </a:p>
+          <a:p/>
+          <a:p>
+            <a:r>
+              <a:t>WHAT TO SAY</a:t>
+            </a:r>
+          </a:p>
+          <a:p>
+            <a:r>
+              <a:t>First explain RAG in one breath, because everything else depends on it: "RAG,</a:t>
+            </a:r>
+          </a:p>
+          <a:p>
+            <a:r>
+              <a:t>Retrieval-Augmented Generation, means instead of asking an AI to just guess an</a:t>
+            </a:r>
+          </a:p>
+          <a:p>
+            <a:r>
+              <a:t>answer from what it memorised during training, you first go fetch some</a:t>
+            </a:r>
+          </a:p>
+          <a:p>
+            <a:r>
+              <a:t>relevant reference material and hand it to the AI as context before it</a:t>
+            </a:r>
+          </a:p>
+          <a:p>
+            <a:r>
+              <a:t>answers - like an open-book exam instead of a closed-book one." Then name the</a:t>
+            </a:r>
+          </a:p>
+          <a:p>
+            <a:r>
+              <a:t>problem with how RAG is normally used for this task: "Existing systems search</a:t>
+            </a:r>
+          </a:p>
+          <a:p>
+            <a:r>
+              <a:t>ALL 691 official attack-technique descriptions, blind, for every single alert -</a:t>
+            </a:r>
+          </a:p>
+          <a:p>
+            <a:r>
+              <a:t>nothing is ruled out ahead of time." Then state the idea: "We build a small</a:t>
+            </a:r>
+          </a:p>
+          <a:p>
+            <a:r>
+              <a:t>knowledge graph from what the alert actually shows the attacker doing, and we</a:t>
+            </a:r>
+          </a:p>
+          <a:p>
+            <a:r>
+              <a:t>use that graph to shrink the search down to only the techniques that are</a:t>
+            </a:r>
+          </a:p>
+          <a:p>
+            <a:r>
+              <a:t>plausible given the evidence. An open search over 691 options becomes a short,</a:t>
+            </a:r>
+          </a:p>
+          <a:p>
+            <a:r>
+              <a:t>justified shortlist." Close with the falsifiability point: "And we don't just</a:t>
+            </a:r>
+          </a:p>
+          <a:p>
+            <a:r>
+              <a:t>claim this helps - we test it directly, by ripping the constraint back out and</a:t>
+            </a:r>
+          </a:p>
+          <a:p>
+            <a:r>
+              <a:t>seeing what happens. If performance collapses, that's proof the constraint</a:t>
+            </a:r>
+          </a:p>
+          <a:p>
+            <a:r>
+              <a:t>itself is doing the work, not just having a good AI model underneath it."</a:t>
+            </a:r>
+          </a:p>
+          <a:p/>
+          <a:p>
+            <a:r>
+              <a:t>KEY TERMS</a:t>
+            </a:r>
+          </a:p>
+          <a:p>
+            <a:r>
+              <a:t>MITRE ATT&amp;CK: a free, industry-standard catalogue of about 691 known attacker</a:t>
+            </a:r>
+          </a:p>
+          <a:p>
+            <a:r>
+              <a:t>techniques (things like "brute-force a password" or "scan a network for open</a:t>
+            </a:r>
+          </a:p>
+          <a:p>
+            <a:r>
+              <a:t>ports"), each with an ID like T1046, maintained by the MITRE Corporation and</a:t>
+            </a:r>
+          </a:p>
+          <a:p>
+            <a:r>
+              <a:t>used across the whole cybersecurity industry as a shared vocabulary for</a:t>
+            </a:r>
+          </a:p>
+          <a:p>
+            <a:r>
+              <a:t>describing what an attacker did.</a:t>
+            </a:r>
+          </a:p>
+          <a:p>
+            <a:r>
+              <a:t>Knowledge graph: a way of storing facts as small (subject, relationship,</a:t>
+            </a:r>
+          </a:p>
+          <a:p>
+            <a:r>
+              <a:t>object) statements - e.g. (attacker, scans, port-22-service) - wired together</a:t>
+            </a:r>
+          </a:p>
+          <a:p>
+            <a:r>
+              <a:t>into a network, so a computer can follow the connections between facts rather</a:t>
+            </a:r>
+          </a:p>
+          <a:p>
+            <a:r>
+              <a:t>than just reading loose paragraphs of text.</a:t>
+            </a:r>
+          </a:p>
+          <a:p>
+            <a:r>
+              <a:t>Open-domain similarity search: searching a huge pile of candidates by how</a:t>
+            </a:r>
+          </a:p>
+          <a:p>
+            <a:r>
+              <a:t>similar each one numerically "sounds" to your query (via embeddings - defined</a:t>
+            </a:r>
+          </a:p>
+          <a:p>
+            <a:r>
+              <a:t>on slide 5/6), with nothing ruled out in advance. The whole haystack is always</a:t>
+            </a:r>
+          </a:p>
+          <a:p>
+            <a:r>
+              <a:t>in play.</a:t>
+            </a:r>
+          </a:p>
+          <a:p>
+            <a:r>
+              <a:t>Closed-set choice: the opposite - only a short, pre-filtered list of</a:t>
+            </a:r>
+          </a:p>
+          <a:p>
+            <a:r>
+              <a:t>candidates is even allowed to be considered, which sharply cuts the chance of</a:t>
+            </a:r>
+          </a:p>
+          <a:p>
+            <a:r>
+              <a:t>picking something irrelevant.</a:t>
+            </a:r>
+          </a:p>
+          <a:p/>
+          <a:p>
+            <a:r>
+              <a:t>WHAT THE RESULT MEANS</a:t>
+            </a:r>
+          </a:p>
+          <a:p>
+            <a:r>
+              <a:t>This slide states the HYPOTHESIS, not a result. The rest of the talk is the</a:t>
+            </a:r>
+          </a:p>
+          <a:p>
+            <a:r>
+              <a:t>evidence for and against it.</a:t>
+            </a:r>
+          </a:p>
+          <a:p/>
+          <a:p>
+            <a:r>
+              <a:t>IF ASKED / IF STUCK</a:t>
+            </a:r>
+          </a:p>
+          <a:p>
+            <a:r>
+              <a:t>If pressed "how is this different from normal RAG?" - normal RAG restricts</a:t>
+            </a:r>
+          </a:p>
+          <a:p>
+            <a:r>
+              <a:t>WHAT TEXT gets embedded and searched; we additionally restrict WHICH ANSWERS</a:t>
+            </a:r>
+          </a:p>
+          <a:p>
+            <a:r>
+              <a:t>are even eligible to be returned, using evidence extracted from the alert</a:t>
+            </a:r>
+          </a:p>
+          <a:p>
+            <a:r>
+              <a:t>itself, before the search ever runs.</a:t>
+            </a:r>
+          </a:p>
+        </p:txBody>
+      </p:sp>
+      <p:sp>
+        <p:nvSpPr>
+          <p:cNvPr id="4" name="Slide Number Placeholder 3"/>
+          <p:cNvSpPr>
+            <a:spLocks noGrp="1"/>
+          </p:cNvSpPr>
+          <p:nvPr>
+            <p:ph type="sldNum" idx="5" sz="quarter"/>
+          </p:nvPr>
+        </p:nvSpPr>
+        <p:spPr/>
+      </p:sp>
+    </p:spTree>
+  </p:cSld>
+  <p:clrMapOvr>
+    <a:masterClrMapping/>
+  </p:clrMapOvr>
+</p:notes>
+</file>
+
+<file path=ppt/notesSlides/notesSlide4.xml><?xml version="1.0" encoding="utf-8"?>
+<p:notes xmlns:a="http://schemas.openxmlformats.org/drawingml/2006/main" xmlns:p="http://schemas.openxmlformats.org/presentationml/2006/main" xmlns:r="http://schemas.openxmlformats.org/officeDocument/2006/relationships">
+  <p:cSld>
+    <p:spTree>
+      <p:nvGrpSpPr>
+        <p:cNvPr id="1" name=""/>
+        <p:cNvGrpSpPr/>
+        <p:nvPr/>
+      </p:nvGrpSpPr>
+      <p:grpSpPr>
+        <a:xfrm>
+          <a:off x="0" y="0"/>
+          <a:ext cx="0" cy="0"/>
+          <a:chOff x="0" y="0"/>
+          <a:chExt cx="0" cy="0"/>
+        </a:xfrm>
+      </p:grpSpPr>
+      <p:sp>
+        <p:nvSpPr>
+          <p:cNvPr id="2" name="Slide Image Placeholder 1"/>
+          <p:cNvSpPr>
+            <a:spLocks noGrp="1"/>
+          </p:cNvSpPr>
+          <p:nvPr>
+            <p:ph type="sldImg" idx="2"/>
+          </p:nvPr>
+        </p:nvSpPr>
+        <p:spPr/>
+      </p:sp>
+      <p:sp>
+        <p:nvSpPr>
+          <p:cNvPr id="3" name="Notes Placeholder 2"/>
+          <p:cNvSpPr>
+            <a:spLocks noGrp="1"/>
+          </p:cNvSpPr>
+          <p:nvPr>
+            <p:ph type="body" idx="3" sz="quarter"/>
+          </p:nvPr>
+        </p:nvSpPr>
+        <p:spPr/>
+        <p:txBody>
+          <a:bodyPr/>
+          <a:lstStyle/>
+          <a:p>
+            <a:r>
+              <a:t>[~1:15]</a:t>
+            </a:r>
+          </a:p>
+          <a:p/>
+          <a:p>
+            <a:r>
+              <a:t>WHY THIS SLIDE</a:t>
+            </a:r>
+          </a:p>
+          <a:p>
+            <a:r>
+              <a:t>Give the audience a map before the deep dive on the next slide. Nobody should</a:t>
+            </a:r>
+          </a:p>
+          <a:p>
+            <a:r>
+              <a:t>be confused about where they are in the pipeline once you start giving detail.</a:t>
+            </a:r>
+          </a:p>
+          <a:p/>
+          <a:p>
+            <a:r>
+              <a:t>WHAT TO SAY</a:t>
+            </a:r>
+          </a:p>
+          <a:p>
+            <a:r>
+              <a:t>Walk left to right, one short phrase per box - do not over-explain yet, slide 5</a:t>
+            </a:r>
+          </a:p>
+          <a:p>
+            <a:r>
+              <a:t>does that: "Raw logs come in. Step 1 turns each one into a plain-English</a:t>
+            </a:r>
+          </a:p>
+          <a:p>
+            <a:r>
+              <a:t>sentence. Step 2 turns that sentence into a list of numbers capturing its</a:t>
+            </a:r>
+          </a:p>
+          <a:p>
+            <a:r>
+              <a:t>meaning. Step 3 groups similar alerts into incidents. Step 4 is where a local</a:t>
+            </a:r>
+          </a:p>
+          <a:p>
+            <a:r>
+              <a:t>AI model reads a group and writes down, in a strict format, what behaviour it</a:t>
+            </a:r>
+          </a:p>
+          <a:p>
+            <a:r>
+              <a:t>thinks it's seeing. Step 5 wires those behaviours into a graph connected to the</a:t>
+            </a:r>
+          </a:p>
+          <a:p>
+            <a:r>
+              <a:t>official ATT&amp;CK catalogue. That graph then constrains step 6, the search - see</a:t>
+            </a:r>
+          </a:p>
+          <a:p>
+            <a:r>
+              <a:t>the arrow looping back - so only plausible techniques are considered. Step 7</a:t>
+            </a:r>
+          </a:p>
+          <a:p>
+            <a:r>
+              <a:t>writes the final report." Then explicitly call out the "unsupervised" box:</a:t>
+            </a:r>
+          </a:p>
+          <a:p>
+            <a:r>
+              <a:t>"Steps 1 through 4 never see the correct answer. They only see raw evidence.</a:t>
+            </a:r>
+          </a:p>
+          <a:p>
+            <a:r>
+              <a:t>The true label is used only afterwards, to SCORE the system - never to help it</a:t>
+            </a:r>
+          </a:p>
+          <a:p>
+            <a:r>
+              <a:t>decide. That matters because it proves the system isn't just memorising</a:t>
+            </a:r>
+          </a:p>
+          <a:p>
+            <a:r>
+              <a:t>answers; it has to actually reason from evidence."</a:t>
+            </a:r>
+          </a:p>
+          <a:p/>
+          <a:p>
+            <a:r>
+              <a:t>KEY TERMS</a:t>
+            </a:r>
+          </a:p>
+          <a:p>
+            <a:r>
+              <a:t>Unsupervised: the model is never shown the correct label while it is doing its</a:t>
+            </a:r>
+          </a:p>
+          <a:p>
+            <a:r>
+              <a:t>job - only the raw evidence. The label exists somewhere in our test data, but</a:t>
+            </a:r>
+          </a:p>
+          <a:p>
+            <a:r>
+              <a:t>it is locked away and used only afterward, for grading.</a:t>
+            </a:r>
+          </a:p>
+          <a:p/>
+          <a:p>
+            <a:r>
+              <a:t>WHAT THE RESULT MEANS</a:t>
+            </a:r>
+          </a:p>
+          <a:p>
+            <a:r>
+              <a:t>No results yet - this is architecture. Save the numbers for slides 7 onward.</a:t>
+            </a:r>
+          </a:p>
+          <a:p/>
+          <a:p>
+            <a:r>
+              <a:t>IF ASKED / IF STUCK</a:t>
+            </a:r>
+          </a:p>
+          <a:p>
+            <a:r>
+              <a:t>If you lose your place, just point at the diagram and say "there are seven</a:t>
+            </a:r>
+          </a:p>
+          <a:p>
+            <a:r>
+              <a:t>steps; the first four figure out what happened, the last three decide what to</a:t>
+            </a:r>
+          </a:p>
+          <a:p>
+            <a:r>
+              <a:t>call it and how to report it" - that framing recovers you instantly.</a:t>
+            </a:r>
+          </a:p>
+        </p:txBody>
+      </p:sp>
+      <p:sp>
+        <p:nvSpPr>
+          <p:cNvPr id="4" name="Slide Number Placeholder 3"/>
+          <p:cNvSpPr>
+            <a:spLocks noGrp="1"/>
+          </p:cNvSpPr>
+          <p:nvPr>
+            <p:ph type="sldNum" idx="5" sz="quarter"/>
+          </p:nvPr>
+        </p:nvSpPr>
+        <p:spPr/>
+      </p:sp>
+    </p:spTree>
+  </p:cSld>
+  <p:clrMapOvr>
+    <a:masterClrMapping/>
+  </p:clrMapOvr>
+</p:notes>
+</file>
+
+<file path=ppt/notesSlides/notesSlide5.xml><?xml version="1.0" encoding="utf-8"?>
+<p:notes xmlns:a="http://schemas.openxmlformats.org/drawingml/2006/main" xmlns:p="http://schemas.openxmlformats.org/presentationml/2006/main" xmlns:r="http://schemas.openxmlformats.org/officeDocument/2006/relationships">
+  <p:cSld>
+    <p:spTree>
+      <p:nvGrpSpPr>
+        <p:cNvPr id="1" name=""/>
+        <p:cNvGrpSpPr/>
+        <p:nvPr/>
+      </p:nvGrpSpPr>
+      <p:grpSpPr>
+        <a:xfrm>
+          <a:off x="0" y="0"/>
+          <a:ext cx="0" cy="0"/>
+          <a:chOff x="0" y="0"/>
+          <a:chExt cx="0" cy="0"/>
+        </a:xfrm>
+      </p:grpSpPr>
+      <p:sp>
+        <p:nvSpPr>
+          <p:cNvPr id="2" name="Slide Image Placeholder 1"/>
+          <p:cNvSpPr>
+            <a:spLocks noGrp="1"/>
+          </p:cNvSpPr>
+          <p:nvPr>
+            <p:ph type="sldImg" idx="2"/>
+          </p:nvPr>
+        </p:nvSpPr>
+        <p:spPr/>
+      </p:sp>
+      <p:sp>
+        <p:nvSpPr>
+          <p:cNvPr id="3" name="Notes Placeholder 2"/>
+          <p:cNvSpPr>
+            <a:spLocks noGrp="1"/>
+          </p:cNvSpPr>
+          <p:nvPr>
+            <p:ph type="body" idx="3" sz="quarter"/>
+          </p:nvPr>
+        </p:nvSpPr>
+        <p:spPr/>
+        <p:txBody>
+          <a:bodyPr/>
+          <a:lstStyle/>
+          <a:p>
+            <a:r>
+              <a:t>[~1:30]</a:t>
+            </a:r>
+          </a:p>
+          <a:p/>
+          <a:p>
+            <a:r>
+              <a:t>WHY THIS SLIDE</a:t>
+            </a:r>
+          </a:p>
+          <a:p>
+            <a:r>
+              <a:t>This is the mechanism slide - HOW each step actually works, condensed. This is</a:t>
+            </a:r>
+          </a:p>
+          <a:p>
+            <a:r>
+              <a:t>also where two of the most important technical terms in the whole talk</a:t>
+            </a:r>
+          </a:p>
+          <a:p>
+            <a:r>
+              <a:t>(embeddings, JSON schema) need to land clearly, because everything after this</a:t>
+            </a:r>
+          </a:p>
+          <a:p>
+            <a:r>
+              <a:t>slide assumes the audience has them.</a:t>
+            </a:r>
+          </a:p>
+          <a:p/>
+          <a:p>
+            <a:r>
+              <a:t>WHAT TO SAY</a:t>
+            </a:r>
+          </a:p>
+          <a:p>
+            <a:r>
+              <a:t>Point 1 (steps 1-3): "Every alert becomes a sentence using a fixed, deterministic</a:t>
+            </a:r>
+          </a:p>
+          <a:p>
+            <a:r>
+              <a:t>template - no AI writing here, no randomness. Same input always gives the exact</a:t>
+            </a:r>
+          </a:p>
+          <a:p>
+            <a:r>
+              <a:t>same sentence. That's on purpose: it means the process is fully reproducible,</a:t>
+            </a:r>
+          </a:p>
+          <a:p>
+            <a:r>
+              <a:t>and it means we can definitively withhold the true label from these early</a:t>
+            </a:r>
+          </a:p>
+          <a:p>
+            <a:r>
+              <a:t>steps and prove nothing is leaking through." Point 2 (step 4): "A local AI</a:t>
+            </a:r>
+          </a:p>
+          <a:p>
+            <a:r>
+              <a:t>model reads a group of alerts and has to fill in a strict form: pick ONE</a:t>
+            </a:r>
+          </a:p>
+          <a:p>
+            <a:r>
+              <a:t>behaviour label from a fixed list - seven options for network alerts, ten for</a:t>
+            </a:r>
+          </a:p>
+          <a:p>
+            <a:r>
+              <a:t>host-level alerts - and name a subject and a target. It is not allowed to</a:t>
+            </a:r>
+          </a:p>
+          <a:p>
+            <a:r>
+              <a:t>freestyle in plain English." Explain WHY this matters in one sentence: "If you</a:t>
+            </a:r>
+          </a:p>
+          <a:p>
+            <a:r>
+              <a:t>just ask an AI 'what happened here?' in free text, you get a different phrasing</a:t>
+            </a:r>
+          </a:p>
+          <a:p>
+            <a:r>
+              <a:t>every time, and you can't compare or count anything. Forcing a fixed vocabulary</a:t>
+            </a:r>
+          </a:p>
+          <a:p>
+            <a:r>
+              <a:t>makes every answer directly comparable, and machine-checkable." Point 3 (step</a:t>
+            </a:r>
+          </a:p>
+          <a:p>
+            <a:r>
+              <a:t>5): "We built, by hand, a lookup table: if the behaviour is 'brute-forces</a:t>
+            </a:r>
+          </a:p>
+          <a:p>
+            <a:r>
+              <a:t>credential,' only these THREE specific official ATT&amp;CK IDs are allowed as</a:t>
+            </a:r>
+          </a:p>
+          <a:p>
+            <a:r>
+              <a:t>candidates, out of the full 691. That's the constraint from the previous</a:t>
+            </a:r>
+          </a:p>
+          <a:p>
+            <a:r>
+              <a:t>slide, made concrete." Point 4 (steps 6-7): give a vivid example: "So if the</a:t>
+            </a:r>
+          </a:p>
+          <a:p>
+            <a:r>
+              <a:t>evidence only shows port-scanning behaviour, the system will never even</a:t>
+            </a:r>
+          </a:p>
+          <a:p>
+            <a:r>
+              <a:t>consider 'data theft' as a possible answer - it's simply not on that</a:t>
+            </a:r>
+          </a:p>
+          <a:p>
+            <a:r>
+              <a:t>behaviour's allowed list."</a:t>
+            </a:r>
+          </a:p>
+          <a:p/>
+          <a:p>
+            <a:r>
+              <a:t>KEY TERMS</a:t>
+            </a:r>
+          </a:p>
+          <a:p>
+            <a:r>
+              <a:t>Embedding: turning a sentence into a list of numbers (a vector) that captures</a:t>
+            </a:r>
+          </a:p>
+          <a:p>
+            <a:r>
+              <a:t>its MEANING, so that two sentences which mean similar things end up numerically</a:t>
+            </a:r>
+          </a:p>
+          <a:p>
+            <a:r>
+              <a:t>close together, even if they use completely different words. Think of it as</a:t>
+            </a:r>
+          </a:p>
+          <a:p>
+            <a:r>
+              <a:t>plotting every sentence as a point on a map, where similar meanings live near</a:t>
+            </a:r>
+          </a:p>
+          <a:p>
+            <a:r>
+              <a:t>each other.</a:t>
+            </a:r>
+          </a:p>
+          <a:p>
+            <a:r>
+              <a:t>JSON: a simple, structured text format computers use to exchange data - like a</a:t>
+            </a:r>
+          </a:p>
+          <a:p>
+            <a:r>
+              <a:t>form with fixed, named fields, instead of a free paragraph.</a:t>
+            </a:r>
+          </a:p>
+          <a:p>
+            <a:r>
+              <a:t>Schema: a strict template that says exactly which fields must exist in that</a:t>
+            </a:r>
+          </a:p>
+          <a:p>
+            <a:r>
+              <a:t>form and what values are allowed in each one - e.g. "the relation field can</a:t>
+            </a:r>
+          </a:p>
+          <a:p>
+            <a:r>
+              <a:t>ONLY be one of these seven exact words, nothing else."</a:t>
+            </a:r>
+          </a:p>
+          <a:p>
+            <a:r>
+              <a:t>Grammar-constrained decoding: the technical name for forcing the AI model to</a:t>
+            </a:r>
+          </a:p>
+          <a:p>
+            <a:r>
+              <a:t>only ever produce text that fits the schema - it is mechanically incapable of</a:t>
+            </a:r>
+          </a:p>
+          <a:p>
+            <a:r>
+              <a:t>writing something outside the allowed format, the same way a multiple-choice</a:t>
+            </a:r>
+          </a:p>
+          <a:p>
+            <a:r>
+              <a:t>exam mechanically prevents an essay answer.</a:t>
+            </a:r>
+          </a:p>
+          <a:p/>
+          <a:p>
+            <a:r>
+              <a:t>WHAT THE RESULT MEANS</a:t>
+            </a:r>
+          </a:p>
+          <a:p>
+            <a:r>
+              <a:t>"Schema-valid output in 100% of cases" means every single time we asked the</a:t>
+            </a:r>
+          </a:p>
+          <a:p>
+            <a:r>
+              <a:t>model to fill in this structured form, across every alert group tested, it did</a:t>
+            </a:r>
+          </a:p>
+          <a:p>
+            <a:r>
+              <a:t>so with zero formatting errors. We never had to throw away a broken answer or</a:t>
+            </a:r>
+          </a:p>
+          <a:p>
+            <a:r>
+              <a:t>patch one by hand. That is what lets this run unattended and at scale - a</a:t>
+            </a:r>
+          </a:p>
+          <a:p>
+            <a:r>
+              <a:t>system that occasionally produces garbled output would need constant human</a:t>
+            </a:r>
+          </a:p>
+          <a:p>
+            <a:r>
+              <a:t>babysitting.</a:t>
+            </a:r>
+          </a:p>
+          <a:p/>
+          <a:p>
+            <a:r>
+              <a:t>IF ASKED / IF STUCK</a:t>
+            </a:r>
+          </a:p>
+          <a:p>
+            <a:r>
+              <a:t>If asked "what if the AI wants to describe something not in the seven-word</a:t>
+            </a:r>
+          </a:p>
+          <a:p>
+            <a:r>
+              <a:t>list?" - it literally cannot; the decoding is mechanically constrained, the</a:t>
+            </a:r>
+          </a:p>
+          <a:p>
+            <a:r>
+              <a:t>same way a dropdown menu on a website only lets you pick a listed option.</a:t>
+            </a:r>
+          </a:p>
+        </p:txBody>
+      </p:sp>
+      <p:sp>
+        <p:nvSpPr>
+          <p:cNvPr id="4" name="Slide Number Placeholder 3"/>
+          <p:cNvSpPr>
+            <a:spLocks noGrp="1"/>
+          </p:cNvSpPr>
+          <p:nvPr>
+            <p:ph type="sldNum" idx="5" sz="quarter"/>
+          </p:nvPr>
+        </p:nvSpPr>
+        <p:spPr/>
+      </p:sp>
+    </p:spTree>
+  </p:cSld>
+  <p:clrMapOvr>
+    <a:masterClrMapping/>
+  </p:clrMapOvr>
+</p:notes>
+</file>
+
+<file path=ppt/notesSlides/notesSlide6.xml><?xml version="1.0" encoding="utf-8"?>
+<p:notes xmlns:a="http://schemas.openxmlformats.org/drawingml/2006/main" xmlns:p="http://schemas.openxmlformats.org/presentationml/2006/main" xmlns:r="http://schemas.openxmlformats.org/officeDocument/2006/relationships">
+  <p:cSld>
+    <p:spTree>
+      <p:nvGrpSpPr>
+        <p:cNvPr id="1" name=""/>
+        <p:cNvGrpSpPr/>
+        <p:nvPr/>
+      </p:nvGrpSpPr>
+      <p:grpSpPr>
+        <a:xfrm>
+          <a:off x="0" y="0"/>
+          <a:ext cx="0" cy="0"/>
+          <a:chOff x="0" y="0"/>
+          <a:chExt cx="0" cy="0"/>
+        </a:xfrm>
+      </p:grpSpPr>
+      <p:sp>
+        <p:nvSpPr>
+          <p:cNvPr id="2" name="Slide Image Placeholder 1"/>
+          <p:cNvSpPr>
+            <a:spLocks noGrp="1"/>
+          </p:cNvSpPr>
+          <p:nvPr>
+            <p:ph type="sldImg" idx="2"/>
+          </p:nvPr>
+        </p:nvSpPr>
+        <p:spPr/>
+      </p:sp>
+      <p:sp>
+        <p:nvSpPr>
+          <p:cNvPr id="3" name="Notes Placeholder 2"/>
+          <p:cNvSpPr>
+            <a:spLocks noGrp="1"/>
+          </p:cNvSpPr>
+          <p:nvPr>
+            <p:ph type="body" idx="3" sz="quarter"/>
+          </p:nvPr>
+        </p:nvSpPr>
+        <p:spPr/>
+        <p:txBody>
+          <a:bodyPr/>
+          <a:lstStyle/>
+          <a:p>
+            <a:r>
+              <a:t>[~1:45]</a:t>
+            </a:r>
+          </a:p>
+          <a:p/>
+          <a:p>
+            <a:r>
+              <a:t>WHY THIS SLIDE</a:t>
+            </a:r>
+          </a:p>
+          <a:p>
+            <a:r>
+              <a:t>The "how we tested it" methods slide. This slide also has to carry almost all</a:t>
+            </a:r>
+          </a:p>
+          <a:p>
+            <a:r>
+              <a:t>of the statistics vocabulary the results slides will assume you already know -</a:t>
+            </a:r>
+          </a:p>
+          <a:p>
+            <a:r>
+              <a:t>front-load it here so slides 7-11 move fast.</a:t>
+            </a:r>
+          </a:p>
+          <a:p/>
+          <a:p>
+            <a:r>
+              <a:t>WHAT TO SAY</a:t>
+            </a:r>
+          </a:p>
+          <a:p>
+            <a:r>
+              <a:t>Datasets: "CIC-IDS-2017 is a public benchmark of recorded network traffic, some</a:t>
+            </a:r>
+          </a:p>
+          <a:p>
+            <a:r>
+              <a:t>normal, some real attacks like brute force, port scans, denial of service -</a:t>
+            </a:r>
+          </a:p>
+          <a:p>
+            <a:r>
+              <a:t>used across the security research community so our numbers are comparable to</a:t>
+            </a:r>
+          </a:p>
+          <a:p>
+            <a:r>
+              <a:t>other papers. Our sample was about 14,000 individual network connections, or</a:t>
+            </a:r>
+          </a:p>
+          <a:p>
+            <a:r>
+              <a:t>'flows.' DARPA E3 is a completely different, harder benchmark: real ethical</a:t>
+            </a:r>
+          </a:p>
+          <a:p>
+            <a:r>
+              <a:t>hackers were hired to break into a network, and every action on the machines</a:t>
+            </a:r>
+          </a:p>
+          <a:p>
+            <a:r>
+              <a:t>was logged - a different kind of evidence entirely, host activity instead of</a:t>
+            </a:r>
+          </a:p>
+          <a:p>
+            <a:r>
+              <a:t>network traffic. We use it to test whether the idea generalises to a totally</a:t>
+            </a:r>
+          </a:p>
+          <a:p>
+            <a:r>
+              <a:t>different kind of data, not just the one we designed around." Models: "We</a:t>
+            </a:r>
+          </a:p>
+          <a:p>
+            <a:r>
+              <a:t>tested three different open, freely available AI models, at three sizes - 12</a:t>
+            </a:r>
+          </a:p>
+          <a:p>
+            <a:r>
+              <a:t>billion, 7.6 billion, and 3.1 billion parameters - to check whether this needs</a:t>
+            </a:r>
+          </a:p>
+          <a:p>
+            <a:r>
+              <a:t>an expensive giant model, or whether even a small one benefits." Hardware:</a:t>
+            </a:r>
+          </a:p>
+          <a:p>
+            <a:r>
+              <a:t>"Everything ran on one ordinary laptop, an entry-level gaming GPU with only 4</a:t>
+            </a:r>
+          </a:p>
+          <a:p>
+            <a:r>
+              <a:t>gigabytes of video memory. That's deliberate: it proves this can run</a:t>
+            </a:r>
+          </a:p>
+          <a:p>
+            <a:r>
+              <a:t>completely on-premises, with no log data ever leaving the building, which</a:t>
+            </a:r>
+          </a:p>
+          <a:p>
+            <a:r>
+              <a:t>matters enormously for the privacy point from slide 2." Baseline: "Every result</a:t>
+            </a:r>
+          </a:p>
+          <a:p>
+            <a:r>
+              <a:t>we show compares our full method against a baseline - the exact same model,</a:t>
+            </a:r>
+          </a:p>
+          <a:p>
+            <a:r>
+              <a:t>the exact same evidence, with ONLY the graph constraint switched off. That's</a:t>
+            </a:r>
+          </a:p>
+          <a:p>
+            <a:r>
+              <a:t>the scientific control: if something changes, we know exactly what caused it."</a:t>
+            </a:r>
+          </a:p>
+          <a:p/>
+          <a:p>
+            <a:r>
+              <a:t>KEY TERMS</a:t>
+            </a:r>
+          </a:p>
+          <a:p>
+            <a:r>
+              <a:t>Parameters: the adjustable internal numbers a neural network learns during</a:t>
+            </a:r>
+          </a:p>
+          <a:p>
+            <a:r>
+              <a:t>training - loosely, more parameters usually means a more capable but slower,</a:t>
+            </a:r>
+          </a:p>
+          <a:p>
+            <a:r>
+              <a:t>more memory-hungry model.</a:t>
+            </a:r>
+          </a:p>
+          <a:p>
+            <a:r>
+              <a:t>VRAM: video memory, the memory on a graphics card - the main bottleneck for</a:t>
+            </a:r>
+          </a:p>
+          <a:p>
+            <a:r>
+              <a:t>running AI models on your own machine rather than a data-centre server. 4GB is</a:t>
+            </a:r>
+          </a:p>
+          <a:p>
+            <a:r>
+              <a:t>a modest, consumer-laptop amount.</a:t>
+            </a:r>
+          </a:p>
+          <a:p>
+            <a:r>
+              <a:t>Exact match: did the model's final answer EXACTLY equal the one correct</a:t>
+            </a:r>
+          </a:p>
+          <a:p>
+            <a:r>
+              <a:t>official technique ID? All or nothing, no partial credit.</a:t>
+            </a:r>
+          </a:p>
+          <a:p>
+            <a:r>
+              <a:t>Macro F1: a single score that treats every category equally, even rare ones -</a:t>
+            </a:r>
+          </a:p>
+          <a:p>
+            <a:r>
+              <a:t>properly defined on the next slide, where it matters most.</a:t>
+            </a:r>
+          </a:p>
+          <a:p>
+            <a:r>
+              <a:t>Retrieval hit rate: when we searched for the answer, was the correct one</a:t>
+            </a:r>
+          </a:p>
+          <a:p>
+            <a:r>
+              <a:t>present ANYWHERE in the shortlist at all, regardless of whether the system</a:t>
+            </a:r>
+          </a:p>
+          <a:p>
+            <a:r>
+              <a:t>picked it correctly at the end.</a:t>
+            </a:r>
+          </a:p>
+          <a:p>
+            <a:r>
+              <a:t>Report grounding / faithfulness: whether the AI's WRITTEN explanation actually</a:t>
+            </a:r>
+          </a:p>
+          <a:p>
+            <a:r>
+              <a:t>matches the evidence it was given, rather than inventing things - explained in</a:t>
+            </a:r>
+          </a:p>
+          <a:p>
+            <a:r>
+              <a:t>full on slide 11.</a:t>
+            </a:r>
+          </a:p>
+          <a:p>
+            <a:r>
+              <a:t>Bootstrap confidence interval: since we only have a small number of test</a:t>
+            </a:r>
+          </a:p>
+          <a:p>
+            <a:r>
+              <a:t>examples, any single score could be a bit lucky or unlucky. A confidence</a:t>
+            </a:r>
+          </a:p>
+          <a:p>
+            <a:r>
+              <a:t>interval is a range that says "we're confident the true performance sits</a:t>
+            </a:r>
+          </a:p>
+          <a:p>
+            <a:r>
+              <a:t>somewhere in here." Bootstrap is the specific method: a computer resamples</a:t>
+            </a:r>
+          </a:p>
+          <a:p>
+            <a:r>
+              <a:t>(with replacement) from our real test results thousands of times, recomputes</a:t>
+            </a:r>
+          </a:p>
+          <a:p>
+            <a:r>
+              <a:t>the score each time, and looks at how much those recomputed scores spread out.</a:t>
+            </a:r>
+          </a:p>
+          <a:p>
+            <a:r>
+              <a:t>That spread tells us how much the number could plausibly wobble by chance</a:t>
+            </a:r>
+          </a:p>
+          <a:p>
+            <a:r>
+              <a:t>alone, without needing to assume any textbook bell-curve shape. With only 18</a:t>
+            </a:r>
+          </a:p>
+          <a:p>
+            <a:r>
+              <a:t>test cases in the network-flow dataset, a raw number like "83%" sounds very</a:t>
+            </a:r>
+          </a:p>
+          <a:p>
+            <a:r>
+              <a:t>precise but could swing a lot from luck - the interval is what tells us whether</a:t>
+            </a:r>
+          </a:p>
+          <a:p>
+            <a:r>
+              <a:t>a difference between two methods is REAL or just noise.</a:t>
+            </a:r>
+          </a:p>
+          <a:p/>
+          <a:p>
+            <a:r>
+              <a:t>WHAT THE RESULT MEANS</a:t>
+            </a:r>
+          </a:p>
+          <a:p>
+            <a:r>
+              <a:t>No results yet - this is the rulebook for reading every table from here on.</a:t>
+            </a:r>
+          </a:p>
+          <a:p/>
+          <a:p>
+            <a:r>
+              <a:t>IF ASKED / IF STUCK</a:t>
+            </a:r>
+          </a:p>
+          <a:p>
+            <a:r>
+              <a:t>If asked "why 4GB VRAM specifically?" - that's simply the hardware Joel owns; the</a:t>
+            </a:r>
+          </a:p>
+          <a:p>
+            <a:r>
+              <a:t>point being made is that no special data-centre hardware was needed at all.</a:t>
+            </a:r>
+          </a:p>
+        </p:txBody>
+      </p:sp>
+      <p:sp>
+        <p:nvSpPr>
+          <p:cNvPr id="4" name="Slide Number Placeholder 3"/>
+          <p:cNvSpPr>
+            <a:spLocks noGrp="1"/>
+          </p:cNvSpPr>
+          <p:nvPr>
+            <p:ph type="sldNum" idx="5" sz="quarter"/>
+          </p:nvPr>
+        </p:nvSpPr>
+        <p:spPr/>
+      </p:sp>
+    </p:spTree>
+  </p:cSld>
+  <p:clrMapOvr>
+    <a:masterClrMapping/>
+  </p:clrMapOvr>
+</p:notes>
+</file>
+
+<file path=ppt/notesSlides/notesSlide7.xml><?xml version="1.0" encoding="utf-8"?>
+<p:notes xmlns:a="http://schemas.openxmlformats.org/drawingml/2006/main" xmlns:p="http://schemas.openxmlformats.org/presentationml/2006/main" xmlns:r="http://schemas.openxmlformats.org/officeDocument/2006/relationships">
+  <p:cSld>
+    <p:spTree>
+      <p:nvGrpSpPr>
+        <p:cNvPr id="1" name=""/>
+        <p:cNvGrpSpPr/>
+        <p:nvPr/>
+      </p:nvGrpSpPr>
+      <p:grpSpPr>
+        <a:xfrm>
+          <a:off x="0" y="0"/>
+          <a:ext cx="0" cy="0"/>
+          <a:chOff x="0" y="0"/>
+          <a:chExt cx="0" cy="0"/>
+        </a:xfrm>
+      </p:grpSpPr>
+      <p:sp>
+        <p:nvSpPr>
+          <p:cNvPr id="2" name="Slide Image Placeholder 1"/>
+          <p:cNvSpPr>
+            <a:spLocks noGrp="1"/>
+          </p:cNvSpPr>
+          <p:nvPr>
+            <p:ph type="sldImg" idx="2"/>
+          </p:nvPr>
+        </p:nvSpPr>
+        <p:spPr/>
+      </p:sp>
+      <p:sp>
+        <p:nvSpPr>
+          <p:cNvPr id="3" name="Notes Placeholder 2"/>
+          <p:cNvSpPr>
+            <a:spLocks noGrp="1"/>
+          </p:cNvSpPr>
+          <p:nvPr>
+            <p:ph type="body" idx="3" sz="quarter"/>
+          </p:nvPr>
+        </p:nvSpPr>
+        <p:spPr/>
+        <p:txBody>
+          <a:bodyPr/>
+          <a:lstStyle/>
+          <a:p>
+            <a:r>
+              <a:t>[~1:45]</a:t>
+            </a:r>
+          </a:p>
+          <a:p/>
+          <a:p>
+            <a:r>
+              <a:t>WHY THIS SLIDE</a:t>
+            </a:r>
+          </a:p>
+          <a:p>
+            <a:r>
+              <a:t>The first hard numbers. The audience needs to be able to actually READ this</a:t>
+            </a:r>
+          </a:p>
+          <a:p>
+            <a:r>
+              <a:t>table, not just be told "our numbers are good" - so teach the table, don't just</a:t>
+            </a:r>
+          </a:p>
+          <a:p>
+            <a:r>
+              <a:t>recite it.</a:t>
+            </a:r>
+          </a:p>
+          <a:p/>
+          <a:p>
+            <a:r>
+              <a:t>WHAT TO SAY</a:t>
+            </a:r>
+          </a:p>
+          <a:p>
+            <a:r>
+              <a:t>"Grounded means our full method, with the graph restriction switched on.</a:t>
+            </a:r>
+          </a:p>
+          <a:p>
+            <a:r>
+              <a:t>Baseline means the same model with it switched off - a direct guess, no graph</a:t>
+            </a:r>
+          </a:p>
+          <a:p>
+            <a:r>
+              <a:t>help. Take the top row: with grounding, Mistral-Nemo gets the exact right</a:t>
+            </a:r>
+          </a:p>
+          <a:p>
+            <a:r>
+              <a:t>answer 83.3% of the time; without it, only 55.6%. That's about 28 percentage</a:t>
+            </a:r>
+          </a:p>
+          <a:p>
+            <a:r>
+              <a:t>points of raw accuracy gained just by adding the constraint." Then explain WHY</a:t>
+            </a:r>
+          </a:p>
+          <a:p>
+            <a:r>
+              <a:t>you should look at macro F1, not exact match, as the real headline - this is</a:t>
+            </a:r>
+          </a:p>
+          <a:p>
+            <a:r>
+              <a:t>the single most important explanatory move on this slide: "One attack type</a:t>
+            </a:r>
+          </a:p>
+          <a:p>
+            <a:r>
+              <a:t>covers 14 of our 18 test cases. That's an imbalanced test set - a model could</a:t>
+            </a:r>
+          </a:p>
+          <a:p>
+            <a:r>
+              <a:t>score deceptively well on exact match just by always guessing that one common</a:t>
+            </a:r>
+          </a:p>
+          <a:p>
+            <a:r>
+              <a:t>type, without being any good at recognising anything else. Macro F1 fixes</a:t>
+            </a:r>
+          </a:p>
+          <a:p>
+            <a:r>
+              <a:t>that: it scores each category SEPARATELY, then averages those scores equally,</a:t>
+            </a:r>
+          </a:p>
+          <a:p>
+            <a:r>
+              <a:t>so getting a rare category wrong counts just as much as getting the common one</a:t>
+            </a:r>
+          </a:p>
+          <a:p>
+            <a:r>
+              <a:t>wrong. That's why we report Mistral-Nemo's macro F1 DOUBLING, from 0.200 to</a:t>
+            </a:r>
+          </a:p>
+          <a:p>
+            <a:r>
+              <a:t>0.400, as the real headline number of this table." Close on the two baselines</a:t>
+            </a:r>
+          </a:p>
+          <a:p>
+            <a:r>
+              <a:t>scoring exactly zero: "Without our method's help, the two smaller models never</a:t>
+            </a:r>
+          </a:p>
+          <a:p>
+            <a:r>
+              <a:t>correctly named a single attack technique, for any category, on their own. The</a:t>
+            </a:r>
+          </a:p>
+          <a:p>
+            <a:r>
+              <a:t>raw AI guess alone was essentially useless here - which is exactly why the</a:t>
+            </a:r>
+          </a:p>
+          <a:p>
+            <a:r>
+              <a:t>improvement from grounding looks so dramatic for them. Slide 8 explains why."</a:t>
+            </a:r>
+          </a:p>
+          <a:p/>
+          <a:p>
+            <a:r>
+              <a:t>KEY TERMS</a:t>
+            </a:r>
+          </a:p>
+          <a:p>
+            <a:r>
+              <a:t>F1 score: the "harmonic mean" of precision and recall (a way of averaging that</a:t>
+            </a:r>
+          </a:p>
+          <a:p>
+            <a:r>
+              <a:t>punishes a big gap between the two, rather than a simple average, which is what</a:t>
+            </a:r>
+          </a:p>
+          <a:p>
+            <a:r>
+              <a:t>"harmonic mean" specifically means here in one line).</a:t>
+            </a:r>
+          </a:p>
+          <a:p>
+            <a:r>
+              <a:t>Precision: of everything the model CLAIMED was attack type X, how much of that</a:t>
+            </a:r>
+          </a:p>
+          <a:p>
+            <a:r>
+              <a:t>actually WAS X - are you trustworthy when you speak up.</a:t>
+            </a:r>
+          </a:p>
+          <a:p>
+            <a:r>
+              <a:t>Recall: of everything that ACTUALLY was attack type X, how much did the model</a:t>
+            </a:r>
+          </a:p>
+          <a:p>
+            <a:r>
+              <a:t>correctly catch - are you thorough, or do you miss things.</a:t>
+            </a:r>
+          </a:p>
+          <a:p>
+            <a:r>
+              <a:t>Why F1 combines both: a model could cheat by being ultra-cautious (rarely</a:t>
+            </a:r>
+          </a:p>
+          <a:p>
+            <a:r>
+              <a:t>wrong when it speaks, but misses almost everything - high precision, terrible</a:t>
+            </a:r>
+          </a:p>
+          <a:p>
+            <a:r>
+              <a:t>recall) or ultra-aggressive (catches everything but cries wolf constantly -</a:t>
+            </a:r>
+          </a:p>
+          <a:p>
+            <a:r>
+              <a:t>high recall, terrible precision). F1 stops either extreme from looking falsely</a:t>
+            </a:r>
+          </a:p>
+          <a:p>
+            <a:r>
+              <a:t>good on its own.</a:t>
+            </a:r>
+          </a:p>
+          <a:p>
+            <a:r>
+              <a:t>Macro-averaged: computing a metric separately for EACH category and then</a:t>
+            </a:r>
+          </a:p>
+          <a:p>
+            <a:r>
+              <a:t>averaging those per-category scores with equal weight, so a common category</a:t>
+            </a:r>
+          </a:p>
+          <a:p>
+            <a:r>
+              <a:t>can't drown out the rare ones the way a single combined average would.</a:t>
+            </a:r>
+          </a:p>
+          <a:p/>
+          <a:p>
+            <a:r>
+              <a:t>WHAT THE RESULT MEANS</a:t>
+            </a:r>
+          </a:p>
+          <a:p>
+            <a:r>
+              <a:t>Mistral-Nemo genuinely gets better with grounding on both measures. The two</a:t>
+            </a:r>
+          </a:p>
+          <a:p>
+            <a:r>
+              <a:t>Qwen models go from "useless alone" to "somewhat useful with help" - a bigger</a:t>
+            </a:r>
+          </a:p>
+          <a:p>
+            <a:r>
+              <a:t>relative jump, even though their absolute numbers stay lower than</a:t>
+            </a:r>
+          </a:p>
+          <a:p>
+            <a:r>
+              <a:t>Mistral-Nemo's. Slide 8 explains exactly why the three models differ this much.</a:t>
+            </a:r>
+          </a:p>
+          <a:p/>
+          <a:p>
+            <a:r>
+              <a:t>IF ASKED / IF STUCK</a:t>
+            </a:r>
+          </a:p>
+          <a:p>
+            <a:r>
+              <a:t>If asked "why not just always report exact match, it's simpler?" - because</a:t>
+            </a:r>
+          </a:p>
+          <a:p>
+            <a:r>
+              <a:t>exact match can be inflated by an imbalanced test set, exactly as shown here;</a:t>
+            </a:r>
+          </a:p>
+          <a:p>
+            <a:r>
+              <a:t>macro F1 is the fairer number when one category dominates.</a:t>
+            </a:r>
+          </a:p>
+        </p:txBody>
+      </p:sp>
+      <p:sp>
+        <p:nvSpPr>
+          <p:cNvPr id="4" name="Slide Number Placeholder 3"/>
+          <p:cNvSpPr>
+            <a:spLocks noGrp="1"/>
+          </p:cNvSpPr>
+          <p:nvPr>
+            <p:ph type="sldNum" idx="5" sz="quarter"/>
+          </p:nvPr>
+        </p:nvSpPr>
+        <p:spPr/>
+      </p:sp>
+    </p:spTree>
+  </p:cSld>
+  <p:clrMapOvr>
+    <a:masterClrMapping/>
+  </p:clrMapOvr>
+</p:notes>
+</file>
+
+<file path=ppt/notesSlides/notesSlide8.xml><?xml version="1.0" encoding="utf-8"?>
+<p:notes xmlns:a="http://schemas.openxmlformats.org/drawingml/2006/main" xmlns:p="http://schemas.openxmlformats.org/presentationml/2006/main" xmlns:r="http://schemas.openxmlformats.org/officeDocument/2006/relationships">
+  <p:cSld>
+    <p:spTree>
+      <p:nvGrpSpPr>
+        <p:cNvPr id="1" name=""/>
+        <p:cNvGrpSpPr/>
+        <p:nvPr/>
+      </p:nvGrpSpPr>
+      <p:grpSpPr>
+        <a:xfrm>
+          <a:off x="0" y="0"/>
+          <a:ext cx="0" cy="0"/>
+          <a:chOff x="0" y="0"/>
+          <a:chExt cx="0" cy="0"/>
+        </a:xfrm>
+      </p:grpSpPr>
+      <p:sp>
+        <p:nvSpPr>
+          <p:cNvPr id="2" name="Slide Image Placeholder 1"/>
+          <p:cNvSpPr>
+            <a:spLocks noGrp="1"/>
+          </p:cNvSpPr>
+          <p:nvPr>
+            <p:ph type="sldImg" idx="2"/>
+          </p:nvPr>
+        </p:nvSpPr>
+        <p:spPr/>
+      </p:sp>
+      <p:sp>
+        <p:nvSpPr>
+          <p:cNvPr id="3" name="Notes Placeholder 2"/>
+          <p:cNvSpPr>
+            <a:spLocks noGrp="1"/>
+          </p:cNvSpPr>
+          <p:nvPr>
+            <p:ph type="body" idx="3" sz="quarter"/>
+          </p:nvPr>
+        </p:nvSpPr>
+        <p:spPr/>
+        <p:txBody>
+          <a:bodyPr/>
+          <a:lstStyle/>
+          <a:p>
+            <a:r>
+              <a:t>[~2:00 - the most important slide in the talk, do not rush]</a:t>
+            </a:r>
+          </a:p>
+          <a:p/>
+          <a:p>
+            <a:r>
+              <a:t>WHY THIS SLIDE</a:t>
+            </a:r>
+          </a:p>
+          <a:p>
+            <a:r>
+              <a:t>This is the paper's central empirical finding - the one insight worth</a:t>
+            </a:r>
+          </a:p>
+          <a:p>
+            <a:r>
+              <a:t>remembering if the audience remembers only one thing. Slow down, make eye</a:t>
+            </a:r>
+          </a:p>
+          <a:p>
+            <a:r>
+              <a:t>contact, say this one clearly.</a:t>
+            </a:r>
+          </a:p>
+          <a:p/>
+          <a:p>
+            <a:r>
+              <a:t>WHAT TO SAY</a:t>
+            </a:r>
+          </a:p>
+          <a:p>
+            <a:r>
+              <a:t>Explain "Reachable" first, with a concrete framing: "For each of our 18 test</a:t>
+            </a:r>
+          </a:p>
+          <a:p>
+            <a:r>
+              <a:t>cases, we ask: did the AI even manage to describe the RIGHT KIND of behaviour,</a:t>
+            </a:r>
+          </a:p>
+          <a:p>
+            <a:r>
+              <a:t>such that the correct answer was somewhere on its shortlist at all? If the</a:t>
+            </a:r>
+          </a:p>
+          <a:p>
+            <a:r>
+              <a:t>model completely misread the evidence - say, called a brute-force attack a</a:t>
+            </a:r>
+          </a:p>
+          <a:p>
+            <a:r>
+              <a:t>port scan - then the correct answer was never even an option, no matter how</a:t>
+            </a:r>
+          </a:p>
+          <a:p>
+            <a:r>
+              <a:t>good the final pick is. Mistral-Nemo's evidence was reachable in 15 of the 18</a:t>
+            </a:r>
+          </a:p>
+          <a:p>
+            <a:r>
+              <a:t>cases; Qwen-Coder's, only 2 of 18." Then "Rerank correct": "Of the cases where</a:t>
+            </a:r>
+          </a:p>
+          <a:p>
+            <a:r>
+              <a:t>the right answer WAS reachable, how often did the final selection step</a:t>
+            </a:r>
+          </a:p>
+          <a:p>
+            <a:r>
+              <a:t>actually pick it? Mistral got 15 out of 15 - it never missed once the right</a:t>
+            </a:r>
+          </a:p>
+          <a:p>
+            <a:r>
+              <a:t>option was available to it. Same story for the other two: 2 out of 2, and 5</a:t>
+            </a:r>
+          </a:p>
+          <a:p>
+            <a:r>
+              <a:t>out of 5." Now say the key insight slowly, word for word close to this: "Every</a:t>
+            </a:r>
+          </a:p>
+          <a:p>
+            <a:r>
+              <a:t>model's accuracy exactly equals its reachability. The number of times a model</a:t>
+            </a:r>
+          </a:p>
+          <a:p>
+            <a:r>
+              <a:t>got the final answer exactly right is exactly equal to the number of times the</a:t>
+            </a:r>
+          </a:p>
+          <a:p>
+            <a:r>
+              <a:t>right answer was even on its list to begin with. That means the final</a:t>
+            </a:r>
+          </a:p>
+          <a:p>
+            <a:r>
+              <a:t>picking step - the search and reranking - made ZERO mistakes, across all</a:t>
+            </a:r>
+          </a:p>
+          <a:p>
+            <a:r>
+              <a:t>three models, all 22 solvable cases combined. Every single error, one hundred</a:t>
+            </a:r>
+          </a:p>
+          <a:p>
+            <a:r>
+              <a:t>percent of them, happened earlier, when the AI was reading the raw alert and</a:t>
+            </a:r>
+          </a:p>
+          <a:p>
+            <a:r>
+              <a:t>deciding what behaviour it was looking at." Land the implication: "That tells</a:t>
+            </a:r>
+          </a:p>
+          <a:p>
+            <a:r>
+              <a:t>us exactly where to spend future effort: not on the search machinery, which</a:t>
+            </a:r>
+          </a:p>
+          <a:p>
+            <a:r>
+              <a:t>already works essentially perfectly - on making the AI read raw evidence more</a:t>
+            </a:r>
+          </a:p>
+          <a:p>
+            <a:r>
+              <a:t>carefully in the first place."</a:t>
+            </a:r>
+          </a:p>
+          <a:p/>
+          <a:p>
+            <a:r>
+              <a:t>KEY TERMS</a:t>
+            </a:r>
+          </a:p>
+          <a:p>
+            <a:r>
+              <a:t>Reachable: the correct answer was present somewhere in the model's restricted</a:t>
+            </a:r>
+          </a:p>
+          <a:p>
+            <a:r>
+              <a:t>candidate shortlist, whether or not it was ultimately chosen.</a:t>
+            </a:r>
+          </a:p>
+          <a:p>
+            <a:r>
+              <a:t>Reranking: the final step where the system scores its shortlist and picks the</a:t>
+            </a:r>
+          </a:p>
+          <a:p>
+            <a:r>
+              <a:t>single best candidate.</a:t>
+            </a:r>
+          </a:p>
+          <a:p/>
+          <a:p>
+            <a:r>
+              <a:t>WHAT THE RESULT MEANS</a:t>
+            </a:r>
+          </a:p>
+          <a:p>
+            <a:r>
+              <a:t>This is a clean, complete error attribution: it locates 100% of the mistakes in</a:t>
+            </a:r>
+          </a:p>
+          <a:p>
+            <a:r>
+              <a:t>ONE stage of a seven-stage pipeline (the behaviour-extraction step, step 4),</a:t>
+            </a:r>
+          </a:p>
+          <a:p>
+            <a:r>
+              <a:t>and shows the remaining six stages are, in this evaluation, essentially</a:t>
+            </a:r>
+          </a:p>
+          <a:p>
+            <a:r>
+              <a:t>flawless. That is a strong, specific, falsifiable claim - and it is exactly</a:t>
+            </a:r>
+          </a:p>
+          <a:p>
+            <a:r>
+              <a:t>the kind of finding reviewers value, because it tells the field precisely</a:t>
+            </a:r>
+          </a:p>
+          <a:p>
+            <a:r>
+              <a:t>where to invest next, rather than vaguely saying "the system could be better."</a:t>
+            </a:r>
+          </a:p>
+          <a:p/>
+          <a:p>
+            <a:r>
+              <a:t>IF ASKED / IF STUCK</a:t>
+            </a:r>
+          </a:p>
+          <a:p>
+            <a:r>
+              <a:t>Likely question: "why is Qwen-Coder so much worse at reading the evidence?"</a:t>
+            </a:r>
+          </a:p>
+          <a:p>
+            <a:r>
+              <a:t>Answer: this coder-specialised model tends to misread almost every alert as</a:t>
+            </a:r>
+          </a:p>
+          <a:p>
+            <a:r>
+              <a:t>one specific pattern (a traffic flood) even when it's actually a port scan,</a:t>
+            </a:r>
+          </a:p>
+          <a:p>
+            <a:r>
+              <a:t>because the two look nearly identical in raw statistics except for one subtle</a:t>
+            </a:r>
+          </a:p>
+          <a:p>
+            <a:r>
+              <a:t>signal - how many DIFFERENT destination ports were touched - which this model</a:t>
+            </a:r>
+          </a:p>
+          <a:p>
+            <a:r>
+              <a:t>does not weigh properly, while the general-purpose model does. If you get</a:t>
+            </a:r>
+          </a:p>
+          <a:p>
+            <a:r>
+              <a:t>stuck mid-explanation, fall back to the one-line version: "the search step is</a:t>
+            </a:r>
+          </a:p>
+          <a:p>
+            <a:r>
+              <a:t>basically perfect; all our errors come from the AI misreading the evidence</a:t>
+            </a:r>
+          </a:p>
+          <a:p>
+            <a:r>
+              <a:t>before search even starts."</a:t>
+            </a:r>
+          </a:p>
+        </p:txBody>
+      </p:sp>
+      <p:sp>
+        <p:nvSpPr>
+          <p:cNvPr id="4" name="Slide Number Placeholder 3"/>
+          <p:cNvSpPr>
+            <a:spLocks noGrp="1"/>
+          </p:cNvSpPr>
+          <p:nvPr>
+            <p:ph type="sldNum" idx="5" sz="quarter"/>
+          </p:nvPr>
+        </p:nvSpPr>
+        <p:spPr/>
+      </p:sp>
+    </p:spTree>
+  </p:cSld>
+  <p:clrMapOvr>
+    <a:masterClrMapping/>
+  </p:clrMapOvr>
+</p:notes>
+</file>
+
+<file path=ppt/notesSlides/notesSlide9.xml><?xml version="1.0" encoding="utf-8"?>
+<p:notes xmlns:a="http://schemas.openxmlformats.org/drawingml/2006/main" xmlns:p="http://schemas.openxmlformats.org/presentationml/2006/main" xmlns:r="http://schemas.openxmlformats.org/officeDocument/2006/relationships">
+  <p:cSld>
+    <p:spTree>
+      <p:nvGrpSpPr>
+        <p:cNvPr id="1" name=""/>
+        <p:cNvGrpSpPr/>
+        <p:nvPr/>
+      </p:nvGrpSpPr>
+      <p:grpSpPr>
+        <a:xfrm>
+          <a:off x="0" y="0"/>
+          <a:ext cx="0" cy="0"/>
+          <a:chOff x="0" y="0"/>
+          <a:chExt cx="0" cy="0"/>
+        </a:xfrm>
+      </p:grpSpPr>
+      <p:sp>
+        <p:nvSpPr>
+          <p:cNvPr id="2" name="Slide Image Placeholder 1"/>
+          <p:cNvSpPr>
+            <a:spLocks noGrp="1"/>
+          </p:cNvSpPr>
+          <p:nvPr>
+            <p:ph type="sldImg" idx="2"/>
+          </p:nvPr>
+        </p:nvSpPr>
+        <p:spPr/>
+      </p:sp>
+      <p:sp>
+        <p:nvSpPr>
+          <p:cNvPr id="3" name="Notes Placeholder 2"/>
+          <p:cNvSpPr>
+            <a:spLocks noGrp="1"/>
+          </p:cNvSpPr>
+          <p:nvPr>
+            <p:ph type="body" idx="3" sz="quarter"/>
+          </p:nvPr>
+        </p:nvSpPr>
+        <p:spPr/>
+        <p:txBody>
+          <a:bodyPr/>
+          <a:lstStyle/>
+          <a:p>
+            <a:r>
+              <a:t>[~1:30]</a:t>
+            </a:r>
+          </a:p>
+          <a:p/>
+          <a:p>
+            <a:r>
+              <a:t>WHY THIS SLIDE</a:t>
+            </a:r>
+          </a:p>
+          <a:p>
+            <a:r>
+              <a:t>This directly answers the sceptic's obvious pushback: "maybe your results just</a:t>
+            </a:r>
+          </a:p>
+          <a:p>
+            <a:r>
+              <a:t>come from having a good AI model, not from your graph idea." This slide proves</a:t>
+            </a:r>
+          </a:p>
+          <a:p>
+            <a:r>
+              <a:t>that alternative explanation wrong. Framing this correctly matters a lot for</a:t>
+            </a:r>
+          </a:p>
+          <a:p>
+            <a:r>
+              <a:t>how the paper is judged.</a:t>
+            </a:r>
+          </a:p>
+          <a:p/>
+          <a:p>
+            <a:r>
+              <a:t>WHAT TO SAY</a:t>
+            </a:r>
+          </a:p>
+          <a:p>
+            <a:r>
+              <a:t>Define ablation up front, in plain words: "An ablation means deliberately</a:t>
+            </a:r>
+          </a:p>
+          <a:p>
+            <a:r>
+              <a:t>switching off one specific piece of a system to see how much worse things get</a:t>
+            </a:r>
+          </a:p>
+          <a:p>
+            <a:r>
+              <a:t>without it - it's how you PROVE a component is actually doing something,</a:t>
+            </a:r>
+          </a:p>
+          <a:p>
+            <a:r>
+              <a:t>instead of just assuming it. Here we switched off only the graph's</a:t>
+            </a:r>
+          </a:p>
+          <a:p>
+            <a:r>
+              <a:t>restriction, and changed nothing else - same model, same embeddings, same</a:t>
+            </a:r>
+          </a:p>
+          <a:p>
+            <a:r>
+              <a:t>alerts, same scoring method underneath." Then the result: "Without the</a:t>
+            </a:r>
+          </a:p>
+          <a:p>
+            <a:r>
+              <a:t>restriction, the system is allowed to search freely across all 691 official</a:t>
+            </a:r>
+          </a:p>
+          <a:p>
+            <a:r>
+              <a:t>techniques. Accuracy collapses to essentially zero for two of the three</a:t>
+            </a:r>
+          </a:p>
+          <a:p>
+            <a:r>
+              <a:t>models, and only about 5.6% for the third - compare that to 83.3%, 11.1%, and</a:t>
+            </a:r>
+          </a:p>
+          <a:p>
+            <a:r>
+              <a:t>27.8% with the constraint switched on, from two slides ago." Explain the</a:t>
+            </a:r>
+          </a:p>
+          <a:p>
+            <a:r>
+              <a:t>"right neighbourhood" line: "Even when unrestricted, the free search doesn't</a:t>
+            </a:r>
+          </a:p>
+          <a:p>
+            <a:r>
+              <a:t>pick randomly - it tends to land on something THEMATICALLY related, like a</a:t>
+            </a:r>
+          </a:p>
+          <a:p>
+            <a:r>
+              <a:t>different networking-discovery technique - but it essentially never lands on</a:t>
+            </a:r>
+          </a:p>
+          <a:p>
+            <a:r>
+              <a:t>the exact right one. It's like knowing someone lives somewhere in the same</a:t>
+            </a:r>
+          </a:p>
+          <a:p>
+            <a:r>
+              <a:t>city, versus knowing their exact street address." Close with the conclusion,</a:t>
+            </a:r>
+          </a:p>
+          <a:p>
+            <a:r>
+              <a:t>stated plainly: "This is the proof that the constraint itself, not just having</a:t>
+            </a:r>
+          </a:p>
+          <a:p>
+            <a:r>
+              <a:t>a decent AI model, is what produces the improvement. The exact same search</a:t>
+            </a:r>
+          </a:p>
+          <a:p>
+            <a:r>
+              <a:t>code is running in both cases - only the size of the allowed candidate list</a:t>
+            </a:r>
+          </a:p>
+          <a:p>
+            <a:r>
+              <a:t>changed, and that alone explains almost the entire gap."</a:t>
+            </a:r>
+          </a:p>
+          <a:p/>
+          <a:p>
+            <a:r>
+              <a:t>KEY TERMS</a:t>
+            </a:r>
+          </a:p>
+          <a:p>
+            <a:r>
+              <a:t>Ablation study: an experiment where you remove one component to measure its</a:t>
+            </a:r>
+          </a:p>
+          <a:p>
+            <a:r>
+              <a:t>individual contribution to the overall result.</a:t>
+            </a:r>
+          </a:p>
+          <a:p>
+            <a:r>
+              <a:t>Unscoped / unconstrained retrieval: search with no restriction on which</a:t>
+            </a:r>
+          </a:p>
+          <a:p>
+            <a:r>
+              <a:t>answers are eligible - the "open-domain similarity search" from slide 3, made</a:t>
+            </a:r>
+          </a:p>
+          <a:p>
+            <a:r>
+              <a:t>concrete as an actual tested condition rather than just a described idea.</a:t>
+            </a:r>
+          </a:p>
+          <a:p/>
+          <a:p>
+            <a:r>
+              <a:t>WHAT THE RESULT MEANS</a:t>
+            </a:r>
+          </a:p>
+          <a:p>
+            <a:r>
+              <a:t>This is the paper's strongest piece of causal evidence. It's not just a</a:t>
+            </a:r>
+          </a:p>
+          <a:p>
+            <a:r>
+              <a:t>correlation ("systems with graphs tend to score higher") - it's a controlled</a:t>
+            </a:r>
+          </a:p>
+          <a:p>
+            <a:r>
+              <a:t>experiment on the SAME system, with ONE thing removed, isolating exactly what</a:t>
+            </a:r>
+          </a:p>
+          <a:p>
+            <a:r>
+              <a:t>caused the improvement.</a:t>
+            </a:r>
+          </a:p>
+          <a:p/>
+          <a:p>
+            <a:r>
+              <a:t>IF ASKED / IF STUCK</a:t>
+            </a:r>
+          </a:p>
+          <a:p>
+            <a:r>
+              <a:t>If asked "couldn't a bigger model fix the unscoped version?" - the paper does</a:t>
+            </a:r>
+          </a:p>
+          <a:p>
+            <a:r>
+              <a:t>not directly test that, but the point stands regardless of model size: the</a:t>
+            </a:r>
+          </a:p>
+          <a:p>
+            <a:r>
+              <a:t>core issue is that 691 unrestricted options is simply too large a haystack for</a:t>
+            </a:r>
+          </a:p>
+          <a:p>
+            <a:r>
+              <a:t>similarity search alone to reliably find the one right needle, whatever</a:t>
+            </a:r>
+          </a:p>
+          <a:p>
+            <a:r>
+              <a:t>model is doing the searching.</a:t>
+            </a:r>
+          </a:p>
+        </p:txBody>
+      </p:sp>
+      <p:sp>
+        <p:nvSpPr>
+          <p:cNvPr id="4" name="Slide Number Placeholder 3"/>
+          <p:cNvSpPr>
+            <a:spLocks noGrp="1"/>
+          </p:cNvSpPr>
+          <p:nvPr>
+            <p:ph type="sldNum" idx="5" sz="quarter"/>
+          </p:nvPr>
+        </p:nvSpPr>
+        <p:spPr/>
+      </p:sp>
+    </p:spTree>
+  </p:cSld>
+  <p:clrMapOvr>
+    <a:masterClrMapping/>
+  </p:clrMapOvr>
+</p:notes>
 </file>
 
 <file path=ppt/slideLayouts/slideLayout1.xml><?xml version="1.0" encoding="utf-8"?>
@@ -33078,4 +37730,324 @@
   <a:objectDefaults/>
   <a:extraClrSchemeLst/>
 </a:theme>
+</file>
+
+<file path=ppt/theme/theme2.xml><?xml version="1.0" encoding="utf-8"?>
+<a:theme xmlns:a="http://schemas.openxmlformats.org/drawingml/2006/main" name="Office Theme">
+  <a:themeElements>
+    <a:clrScheme name="Office">
+      <a:dk1>
+        <a:sysClr val="windowText" lastClr="000000"/>
+      </a:dk1>
+      <a:lt1>
+        <a:sysClr val="window" lastClr="FFFFFF"/>
+      </a:lt1>
+      <a:dk2>
+        <a:srgbClr val="1F497D"/>
+      </a:dk2>
+      <a:lt2>
+        <a:srgbClr val="EEECE1"/>
+      </a:lt2>
+      <a:accent1>
+        <a:srgbClr val="4F81BD"/>
+      </a:accent1>
+      <a:accent2>
+        <a:srgbClr val="C0504D"/>
+      </a:accent2>
+      <a:accent3>
+        <a:srgbClr val="9BBB59"/>
+      </a:accent3>
+      <a:accent4>
+        <a:srgbClr val="8064A2"/>
+      </a:accent4>
+      <a:accent5>
+        <a:srgbClr val="4BACC6"/>
+      </a:accent5>
+      <a:accent6>
+        <a:srgbClr val="F79646"/>
+      </a:accent6>
+      <a:hlink>
+        <a:srgbClr val="0000FF"/>
+      </a:hlink>
+      <a:folHlink>
+        <a:srgbClr val="800080"/>
+      </a:folHlink>
+    </a:clrScheme>
+    <a:fontScheme name="Office">
+      <a:majorFont>
+        <a:latin typeface="Calibri"/>
+        <a:ea typeface=""/>
+        <a:cs typeface=""/>
+        <a:font script="Jpan" typeface="ＭＳ Ｐゴシック"/>
+        <a:font script="Hang" typeface="맑은 고딕"/>
+        <a:font script="Hans" typeface="宋体"/>
+        <a:font script="Hant" typeface="新細明體"/>
+        <a:font script="Arab" typeface="Times New Roman"/>
+        <a:font script="Hebr" typeface="Times New Roman"/>
+        <a:font script="Thai" typeface="Angsana New"/>
+        <a:font script="Ethi" typeface="Nyala"/>
+        <a:font script="Beng" typeface="Vrinda"/>
+        <a:font script="Gujr" typeface="Shruti"/>
+        <a:font script="Khmr" typeface="MoolBoran"/>
+        <a:font script="Knda" typeface="Tunga"/>
+        <a:font script="Guru" typeface="Raavi"/>
+        <a:font script="Cans" typeface="Euphemia"/>
+        <a:font script="Cher" typeface="Plantagenet Cherokee"/>
+        <a:font script="Yiii" typeface="Microsoft Yi Baiti"/>
+        <a:font script="Tibt" typeface="Microsoft Himalaya"/>
+        <a:font script="Thaa" typeface="MV Boli"/>
+        <a:font script="Deva" typeface="Mangal"/>
+        <a:font script="Telu" typeface="Gautami"/>
+        <a:font script="Taml" typeface="Latha"/>
+        <a:font script="Syrc" typeface="Estrangelo Edessa"/>
+        <a:font script="Orya" typeface="Kalinga"/>
+        <a:font script="Mlym" typeface="Kartika"/>
+        <a:font script="Laoo" typeface="DokChampa"/>
+        <a:font script="Sinh" typeface="Iskoola Pota"/>
+        <a:font script="Mong" typeface="Mongolian Baiti"/>
+        <a:font script="Viet" typeface="Times New Roman"/>
+        <a:font script="Uigh" typeface="Microsoft Uighur"/>
+        <a:font script="Geor" typeface="Sylfaen"/>
+      </a:majorFont>
+      <a:minorFont>
+        <a:latin typeface="Calibri"/>
+        <a:ea typeface=""/>
+        <a:cs typeface=""/>
+        <a:font script="Jpan" typeface="ＭＳ Ｐゴシック"/>
+        <a:font script="Hang" typeface="맑은 고딕"/>
+        <a:font script="Hans" typeface="宋体"/>
+        <a:font script="Hant" typeface="新細明體"/>
+        <a:font script="Arab" typeface="Arial"/>
+        <a:font script="Hebr" typeface="Arial"/>
+        <a:font script="Thai" typeface="Cordia New"/>
+        <a:font script="Ethi" typeface="Nyala"/>
+        <a:font script="Beng" typeface="Vrinda"/>
+        <a:font script="Gujr" typeface="Shruti"/>
+        <a:font script="Khmr" typeface="DaunPenh"/>
+        <a:font script="Knda" typeface="Tunga"/>
+        <a:font script="Guru" typeface="Raavi"/>
+        <a:font script="Cans" typeface="Euphemia"/>
+        <a:font script="Cher" typeface="Plantagenet Cherokee"/>
+        <a:font script="Yiii" typeface="Microsoft Yi Baiti"/>
+        <a:font script="Tibt" typeface="Microsoft Himalaya"/>
+        <a:font script="Thaa" typeface="MV Boli"/>
+        <a:font script="Deva" typeface="Mangal"/>
+        <a:font script="Telu" typeface="Gautami"/>
+        <a:font script="Taml" typeface="Latha"/>
+        <a:font script="Syrc" typeface="Estrangelo Edessa"/>
+        <a:font script="Orya" typeface="Kalinga"/>
+        <a:font script="Mlym" typeface="Kartika"/>
+        <a:font script="Laoo" typeface="DokChampa"/>
+        <a:font script="Sinh" typeface="Iskoola Pota"/>
+        <a:font script="Mong" typeface="Mongolian Baiti"/>
+        <a:font script="Viet" typeface="Arial"/>
+        <a:font script="Uigh" typeface="Microsoft Uighur"/>
+        <a:font script="Geor" typeface="Sylfaen"/>
+      </a:minorFont>
+    </a:fontScheme>
+    <a:fmtScheme name="Office">
+      <a:fillStyleLst>
+        <a:solidFill>
+          <a:schemeClr val="phClr"/>
+        </a:solidFill>
+        <a:gradFill rotWithShape="1">
+          <a:gsLst>
+            <a:gs pos="0">
+              <a:schemeClr val="phClr">
+                <a:tint val="50000"/>
+                <a:satMod val="300000"/>
+              </a:schemeClr>
+            </a:gs>
+            <a:gs pos="35000">
+              <a:schemeClr val="phClr">
+                <a:tint val="37000"/>
+                <a:satMod val="300000"/>
+              </a:schemeClr>
+            </a:gs>
+            <a:gs pos="100000">
+              <a:schemeClr val="phClr">
+                <a:tint val="15000"/>
+                <a:satMod val="350000"/>
+              </a:schemeClr>
+            </a:gs>
+          </a:gsLst>
+          <a:lin ang="16200000" scaled="1"/>
+        </a:gradFill>
+        <a:gradFill rotWithShape="1">
+          <a:gsLst>
+            <a:gs pos="0">
+              <a:schemeClr val="phClr">
+                <a:tint val="100000"/>
+                <a:shade val="100000"/>
+                <a:satMod val="130000"/>
+              </a:schemeClr>
+            </a:gs>
+            <a:gs pos="100000">
+              <a:schemeClr val="phClr">
+                <a:tint val="50000"/>
+                <a:shade val="100000"/>
+                <a:satMod val="350000"/>
+              </a:schemeClr>
+            </a:gs>
+          </a:gsLst>
+          <a:lin ang="16200000" scaled="0"/>
+        </a:gradFill>
+      </a:fillStyleLst>
+      <a:lnStyleLst>
+        <a:ln w="9525" cap="flat" cmpd="sng" algn="ctr">
+          <a:solidFill>
+            <a:schemeClr val="phClr">
+              <a:shade val="95000"/>
+              <a:satMod val="105000"/>
+            </a:schemeClr>
+          </a:solidFill>
+          <a:prstDash val="solid"/>
+        </a:ln>
+        <a:ln w="25400" cap="flat" cmpd="sng" algn="ctr">
+          <a:solidFill>
+            <a:schemeClr val="phClr"/>
+          </a:solidFill>
+          <a:prstDash val="solid"/>
+        </a:ln>
+        <a:ln w="38100" cap="flat" cmpd="sng" algn="ctr">
+          <a:solidFill>
+            <a:schemeClr val="phClr"/>
+          </a:solidFill>
+          <a:prstDash val="solid"/>
+        </a:ln>
+      </a:lnStyleLst>
+      <a:effectStyleLst>
+        <a:effectStyle>
+          <a:effectLst>
+            <a:outerShdw blurRad="40000" dist="20000" dir="5400000" rotWithShape="0">
+              <a:srgbClr val="000000">
+                <a:alpha val="38000"/>
+              </a:srgbClr>
+            </a:outerShdw>
+          </a:effectLst>
+        </a:effectStyle>
+        <a:effectStyle>
+          <a:effectLst>
+            <a:outerShdw blurRad="40000" dist="23000" dir="5400000" rotWithShape="0">
+              <a:srgbClr val="000000">
+                <a:alpha val="35000"/>
+              </a:srgbClr>
+            </a:outerShdw>
+          </a:effectLst>
+        </a:effectStyle>
+        <a:effectStyle>
+          <a:effectLst>
+            <a:outerShdw blurRad="40000" dist="23000" dir="5400000" rotWithShape="0">
+              <a:srgbClr val="000000">
+                <a:alpha val="35000"/>
+              </a:srgbClr>
+            </a:outerShdw>
+          </a:effectLst>
+          <a:scene3d>
+            <a:camera prst="orthographicFront">
+              <a:rot lat="0" lon="0" rev="0"/>
+            </a:camera>
+            <a:lightRig rig="threePt" dir="t">
+              <a:rot lat="0" lon="0" rev="1200000"/>
+            </a:lightRig>
+          </a:scene3d>
+          <a:sp3d>
+            <a:bevelT w="63500" h="25400"/>
+          </a:sp3d>
+        </a:effectStyle>
+      </a:effectStyleLst>
+      <a:bgFillStyleLst>
+        <a:solidFill>
+          <a:schemeClr val="phClr"/>
+        </a:solidFill>
+        <a:gradFill rotWithShape="1">
+          <a:gsLst>
+            <a:gs pos="0">
+              <a:schemeClr val="phClr">
+                <a:tint val="40000"/>
+                <a:satMod val="350000"/>
+              </a:schemeClr>
+            </a:gs>
+            <a:gs pos="40000">
+              <a:schemeClr val="phClr">
+                <a:tint val="45000"/>
+                <a:shade val="99000"/>
+                <a:satMod val="350000"/>
+              </a:schemeClr>
+            </a:gs>
+            <a:gs pos="100000">
+              <a:schemeClr val="phClr">
+                <a:shade val="20000"/>
+                <a:satMod val="255000"/>
+              </a:schemeClr>
+            </a:gs>
+          </a:gsLst>
+          <a:path path="circle">
+            <a:fillToRect l="50000" t="-80000" r="50000" b="180000"/>
+          </a:path>
+        </a:gradFill>
+        <a:gradFill rotWithShape="1">
+          <a:gsLst>
+            <a:gs pos="0">
+              <a:schemeClr val="phClr">
+                <a:tint val="80000"/>
+                <a:satMod val="300000"/>
+              </a:schemeClr>
+            </a:gs>
+            <a:gs pos="100000">
+              <a:schemeClr val="phClr">
+                <a:shade val="30000"/>
+                <a:satMod val="200000"/>
+              </a:schemeClr>
+            </a:gs>
+          </a:gsLst>
+          <a:path path="circle">
+            <a:fillToRect l="50000" t="50000" r="50000" b="50000"/>
+          </a:path>
+        </a:gradFill>
+      </a:bgFillStyleLst>
+    </a:fmtScheme>
+  </a:themeElements>
+  <a:objectDefaults>
+    <a:spDef>
+      <a:spPr/>
+      <a:bodyPr/>
+      <a:lstStyle/>
+      <a:style>
+        <a:lnRef idx="1">
+          <a:schemeClr val="accent1"/>
+        </a:lnRef>
+        <a:fillRef idx="3">
+          <a:schemeClr val="accent1"/>
+        </a:fillRef>
+        <a:effectRef idx="2">
+          <a:schemeClr val="accent1"/>
+        </a:effectRef>
+        <a:fontRef idx="minor">
+          <a:schemeClr val="lt1"/>
+        </a:fontRef>
+      </a:style>
+    </a:spDef>
+    <a:lnDef>
+      <a:spPr/>
+      <a:bodyPr/>
+      <a:lstStyle/>
+      <a:style>
+        <a:lnRef idx="2">
+          <a:schemeClr val="accent1"/>
+        </a:lnRef>
+        <a:fillRef idx="0">
+          <a:schemeClr val="accent1"/>
+        </a:fillRef>
+        <a:effectRef idx="1">
+          <a:schemeClr val="accent1"/>
+        </a:effectRef>
+        <a:fontRef idx="minor">
+          <a:schemeClr val="tx1"/>
+        </a:fontRef>
+      </a:style>
+    </a:lnDef>
+  </a:objectDefaults>
+  <a:extraClrSchemeLst/>
+</a:theme>
 </file>
--- a/IACyC_2026_Joel_Mwende_ppt.pptx
+++ b/IACyC_2026_Joel_Mwende_ppt.pptx
@@ -7610,7 +7610,7 @@
               </a:rPr>
               <a:t>Ballı</a:t>
             </a:r>
-            <a:endParaRPr sz="1000">
+            <a:endParaRPr sz="1000" dirty="0">
               <a:latin typeface="Microsoft Sans Serif"/>
               <a:cs typeface="Microsoft Sans Serif"/>
             </a:endParaRPr>
@@ -7774,7 +7774,7 @@
               </a:rPr>
               <a:t>University</a:t>
             </a:r>
-            <a:endParaRPr sz="900">
+            <a:endParaRPr sz="900" dirty="0">
               <a:latin typeface="Arial MT"/>
               <a:cs typeface="Arial MT"/>
             </a:endParaRPr>
@@ -8008,7 +8008,7 @@
               </a:rPr>
               <a:t>Istanbul,</a:t>
             </a:r>
-            <a:endParaRPr sz="900">
+            <a:endParaRPr sz="900" dirty="0">
               <a:latin typeface="Arial MT"/>
               <a:cs typeface="Arial MT"/>
             </a:endParaRPr>
@@ -8030,7 +8030,7 @@
                 <a:latin typeface="Arial MT"/>
                 <a:cs typeface="Arial MT"/>
               </a:rPr>
-              <a:t>17–</a:t>
+              <a:t>17</a:t>
             </a:r>
             <a:r>
               <a:rPr sz="900" dirty="0">
@@ -8040,7 +8040,7 @@
                 <a:latin typeface="Arial MT"/>
                 <a:cs typeface="Arial MT"/>
               </a:rPr>
-              <a:t>20 </a:t>
+              <a:t> </a:t>
             </a:r>
             <a:r>
               <a:rPr sz="900" spc="-35" dirty="0">
@@ -8072,7 +8072,7 @@
               </a:rPr>
               <a:t>2026</a:t>
             </a:r>
-            <a:endParaRPr sz="900">
+            <a:endParaRPr sz="900" dirty="0">
               <a:latin typeface="Arial MT"/>
               <a:cs typeface="Arial MT"/>
             </a:endParaRPr>
@@ -8546,7 +8546,13 @@
           <p:cNvGraphicFramePr>
             <a:graphicFrameLocks noGrp="1"/>
           </p:cNvGraphicFramePr>
-          <p:nvPr/>
+          <p:nvPr>
+            <p:extLst>
+              <p:ext uri="{D42A27DB-BD31-4B8C-83A1-F6EECF244321}">
+                <p14:modId xmlns:p14="http://schemas.microsoft.com/office/powerpoint/2010/main" val="1723551505"/>
+              </p:ext>
+            </p:extLst>
+          </p:nvPr>
         </p:nvGraphicFramePr>
         <p:xfrm>
           <a:off x="359994" y="1238757"/>
@@ -8598,7 +8604,7 @@
                       <a:r>
                         <a:rPr sz="1000" spc="-35" dirty="0">
                           <a:solidFill>
-                            <a:srgbClr val="22373A"/>
+                            <a:schemeClr val="tx1"/>
                           </a:solidFill>
                           <a:latin typeface="Microsoft Sans Serif"/>
                           <a:cs typeface="Microsoft Sans Serif"/>
@@ -8608,7 +8614,7 @@
                       <a:r>
                         <a:rPr sz="1000" spc="-20" dirty="0">
                           <a:solidFill>
-                            <a:srgbClr val="22373A"/>
+                            <a:schemeClr val="tx1"/>
                           </a:solidFill>
                           <a:latin typeface="Microsoft Sans Serif"/>
                           <a:cs typeface="Microsoft Sans Serif"/>
@@ -8616,6 +8622,9 @@
                         <a:t>Nemo</a:t>
                       </a:r>
                       <a:endParaRPr sz="1000">
+                        <a:solidFill>
+                          <a:schemeClr val="tx1"/>
+                        </a:solidFill>
                         <a:latin typeface="Microsoft Sans Serif"/>
                         <a:cs typeface="Microsoft Sans Serif"/>
                       </a:endParaRPr>
@@ -8646,7 +8655,7 @@
                       <a:r>
                         <a:rPr sz="1000" spc="-10" dirty="0">
                           <a:solidFill>
-                            <a:srgbClr val="22373A"/>
+                            <a:schemeClr val="tx1"/>
                           </a:solidFill>
                           <a:latin typeface="Microsoft Sans Serif"/>
                           <a:cs typeface="Microsoft Sans Serif"/>
@@ -8654,6 +8663,9 @@
                         <a:t>0.635</a:t>
                       </a:r>
                       <a:endParaRPr sz="1000">
+                        <a:solidFill>
+                          <a:schemeClr val="tx1"/>
+                        </a:solidFill>
                         <a:latin typeface="Microsoft Sans Serif"/>
                         <a:cs typeface="Microsoft Sans Serif"/>
                       </a:endParaRPr>
@@ -8684,7 +8696,7 @@
                       <a:r>
                         <a:rPr sz="1000" spc="-10" dirty="0">
                           <a:solidFill>
-                            <a:srgbClr val="22373A"/>
+                            <a:schemeClr val="tx1"/>
                           </a:solidFill>
                           <a:latin typeface="Microsoft Sans Serif"/>
                           <a:cs typeface="Microsoft Sans Serif"/>
@@ -8692,6 +8704,9 @@
                         <a:t>0.209</a:t>
                       </a:r>
                       <a:endParaRPr sz="1000">
+                        <a:solidFill>
+                          <a:schemeClr val="tx1"/>
+                        </a:solidFill>
                         <a:latin typeface="Microsoft Sans Serif"/>
                         <a:cs typeface="Microsoft Sans Serif"/>
                       </a:endParaRPr>
@@ -8729,7 +8744,7 @@
                       <a:r>
                         <a:rPr sz="1000" spc="-65" dirty="0">
                           <a:solidFill>
-                            <a:srgbClr val="22373A"/>
+                            <a:schemeClr val="tx1"/>
                           </a:solidFill>
                           <a:latin typeface="Microsoft Sans Serif"/>
                           <a:cs typeface="Microsoft Sans Serif"/>
@@ -8739,7 +8754,7 @@
                       <a:r>
                         <a:rPr sz="1000" spc="-50" dirty="0">
                           <a:solidFill>
-                            <a:srgbClr val="22373A"/>
+                            <a:schemeClr val="tx1"/>
                           </a:solidFill>
                           <a:latin typeface="Microsoft Sans Serif"/>
                           <a:cs typeface="Microsoft Sans Serif"/>
@@ -8749,7 +8764,7 @@
                       <a:r>
                         <a:rPr sz="1000" spc="-25" dirty="0">
                           <a:solidFill>
-                            <a:srgbClr val="22373A"/>
+                            <a:schemeClr val="tx1"/>
                           </a:solidFill>
                           <a:latin typeface="Microsoft Sans Serif"/>
                           <a:cs typeface="Microsoft Sans Serif"/>
@@ -8757,6 +8772,9 @@
                         <a:t>7B</a:t>
                       </a:r>
                       <a:endParaRPr sz="1000">
+                        <a:solidFill>
+                          <a:schemeClr val="tx1"/>
+                        </a:solidFill>
                         <a:latin typeface="Microsoft Sans Serif"/>
                         <a:cs typeface="Microsoft Sans Serif"/>
                       </a:endParaRPr>
@@ -8780,14 +8798,17 @@
                       <a:r>
                         <a:rPr sz="1000" spc="-10" dirty="0">
                           <a:solidFill>
-                            <a:srgbClr val="2D7DB8"/>
+                            <a:schemeClr val="tx1"/>
                           </a:solidFill>
                           <a:latin typeface="Microsoft Sans Serif"/>
                           <a:cs typeface="Microsoft Sans Serif"/>
                         </a:rPr>
                         <a:t>0.710</a:t>
                       </a:r>
-                      <a:endParaRPr sz="1000">
+                      <a:endParaRPr sz="1000" dirty="0">
+                        <a:solidFill>
+                          <a:schemeClr val="tx1"/>
+                        </a:solidFill>
                         <a:latin typeface="Microsoft Sans Serif"/>
                         <a:cs typeface="Microsoft Sans Serif"/>
                       </a:endParaRPr>
@@ -8811,7 +8832,7 @@
                       <a:r>
                         <a:rPr sz="1000" spc="-10" dirty="0">
                           <a:solidFill>
-                            <a:srgbClr val="22373A"/>
+                            <a:schemeClr val="tx1"/>
                           </a:solidFill>
                           <a:latin typeface="Microsoft Sans Serif"/>
                           <a:cs typeface="Microsoft Sans Serif"/>
@@ -8819,6 +8840,9 @@
                         <a:t>0.272</a:t>
                       </a:r>
                       <a:endParaRPr sz="1000">
+                        <a:solidFill>
+                          <a:schemeClr val="tx1"/>
+                        </a:solidFill>
                         <a:latin typeface="Microsoft Sans Serif"/>
                         <a:cs typeface="Microsoft Sans Serif"/>
                       </a:endParaRPr>
@@ -8846,7 +8870,7 @@
                       <a:r>
                         <a:rPr sz="1000" spc="-50" dirty="0">
                           <a:solidFill>
-                            <a:srgbClr val="22373A"/>
+                            <a:schemeClr val="tx1"/>
                           </a:solidFill>
                           <a:latin typeface="Microsoft Sans Serif"/>
                           <a:cs typeface="Microsoft Sans Serif"/>
@@ -8856,7 +8880,7 @@
                       <a:r>
                         <a:rPr sz="1000" spc="-25" dirty="0">
                           <a:solidFill>
-                            <a:srgbClr val="22373A"/>
+                            <a:schemeClr val="tx1"/>
                           </a:solidFill>
                           <a:latin typeface="Microsoft Sans Serif"/>
                           <a:cs typeface="Microsoft Sans Serif"/>
@@ -8864,6 +8888,9 @@
                         <a:t>3B</a:t>
                       </a:r>
                       <a:endParaRPr sz="1000">
+                        <a:solidFill>
+                          <a:schemeClr val="tx1"/>
+                        </a:solidFill>
                         <a:latin typeface="Microsoft Sans Serif"/>
                         <a:cs typeface="Microsoft Sans Serif"/>
                       </a:endParaRPr>
@@ -8891,7 +8918,7 @@
                       <a:r>
                         <a:rPr sz="1000" spc="-10" dirty="0">
                           <a:solidFill>
-                            <a:srgbClr val="22373A"/>
+                            <a:schemeClr val="tx1"/>
                           </a:solidFill>
                           <a:latin typeface="Microsoft Sans Serif"/>
                           <a:cs typeface="Microsoft Sans Serif"/>
@@ -8899,6 +8926,9 @@
                         <a:t>0.685</a:t>
                       </a:r>
                       <a:endParaRPr sz="1000">
+                        <a:solidFill>
+                          <a:schemeClr val="tx1"/>
+                        </a:solidFill>
                         <a:latin typeface="Microsoft Sans Serif"/>
                         <a:cs typeface="Microsoft Sans Serif"/>
                       </a:endParaRPr>
@@ -8926,14 +8956,17 @@
                       <a:r>
                         <a:rPr sz="1000" spc="-10" dirty="0">
                           <a:solidFill>
-                            <a:srgbClr val="22373A"/>
+                            <a:schemeClr val="tx1"/>
                           </a:solidFill>
                           <a:latin typeface="Microsoft Sans Serif"/>
                           <a:cs typeface="Microsoft Sans Serif"/>
                         </a:rPr>
                         <a:t>0.254</a:t>
                       </a:r>
-                      <a:endParaRPr sz="1000">
+                      <a:endParaRPr sz="1000" dirty="0">
+                        <a:solidFill>
+                          <a:schemeClr val="tx1"/>
+                        </a:solidFill>
                         <a:latin typeface="Microsoft Sans Serif"/>
                         <a:cs typeface="Microsoft Sans Serif"/>
                       </a:endParaRPr>
@@ -8990,7 +9023,7 @@
             <a:r>
               <a:rPr sz="1000" spc="145" dirty="0">
                 <a:solidFill>
-                  <a:srgbClr val="22373A"/>
+                  <a:schemeClr val="tx1"/>
                 </a:solidFill>
                 <a:latin typeface="Microsoft Sans Serif"/>
                 <a:cs typeface="Microsoft Sans Serif"/>
@@ -9000,7 +9033,7 @@
             <a:r>
               <a:rPr sz="1000" spc="200" dirty="0">
                 <a:solidFill>
-                  <a:srgbClr val="22373A"/>
+                  <a:schemeClr val="tx1"/>
                 </a:solidFill>
                 <a:latin typeface="Microsoft Sans Serif"/>
                 <a:cs typeface="Microsoft Sans Serif"/>
@@ -9010,7 +9043,7 @@
             <a:r>
               <a:rPr sz="1000" dirty="0">
                 <a:solidFill>
-                  <a:srgbClr val="2D7DB8"/>
+                  <a:schemeClr val="tx1"/>
                 </a:solidFill>
                 <a:latin typeface="Microsoft Sans Serif"/>
                 <a:cs typeface="Microsoft Sans Serif"/>
@@ -9020,7 +9053,7 @@
             <a:r>
               <a:rPr sz="1000" spc="20" dirty="0">
                 <a:solidFill>
-                  <a:srgbClr val="2D7DB8"/>
+                  <a:schemeClr val="tx1"/>
                 </a:solidFill>
                 <a:latin typeface="Microsoft Sans Serif"/>
                 <a:cs typeface="Microsoft Sans Serif"/>
@@ -9030,7 +9063,7 @@
             <a:r>
               <a:rPr sz="1000" dirty="0">
                 <a:solidFill>
-                  <a:srgbClr val="2D7DB8"/>
+                  <a:schemeClr val="tx1"/>
                 </a:solidFill>
                 <a:latin typeface="Microsoft Sans Serif"/>
                 <a:cs typeface="Microsoft Sans Serif"/>
@@ -9040,7 +9073,7 @@
             <a:r>
               <a:rPr sz="1000" spc="25" dirty="0">
                 <a:solidFill>
-                  <a:srgbClr val="2D7DB8"/>
+                  <a:schemeClr val="tx1"/>
                 </a:solidFill>
                 <a:latin typeface="Microsoft Sans Serif"/>
                 <a:cs typeface="Microsoft Sans Serif"/>
@@ -9050,7 +9083,7 @@
             <a:r>
               <a:rPr sz="1000" dirty="0">
                 <a:solidFill>
-                  <a:srgbClr val="22373A"/>
+                  <a:schemeClr val="tx1"/>
                 </a:solidFill>
                 <a:latin typeface="Microsoft Sans Serif"/>
                 <a:cs typeface="Microsoft Sans Serif"/>
@@ -9060,7 +9093,7 @@
             <a:r>
               <a:rPr sz="1000" spc="20" dirty="0">
                 <a:solidFill>
-                  <a:srgbClr val="22373A"/>
+                  <a:schemeClr val="tx1"/>
                 </a:solidFill>
                 <a:latin typeface="Microsoft Sans Serif"/>
                 <a:cs typeface="Microsoft Sans Serif"/>
@@ -9070,7 +9103,7 @@
             <a:r>
               <a:rPr sz="1000" spc="-50" dirty="0">
                 <a:solidFill>
-                  <a:srgbClr val="22373A"/>
+                  <a:schemeClr val="tx1"/>
                 </a:solidFill>
                 <a:latin typeface="Microsoft Sans Serif"/>
                 <a:cs typeface="Microsoft Sans Serif"/>
@@ -9080,7 +9113,7 @@
             <a:r>
               <a:rPr sz="1000" spc="25" dirty="0">
                 <a:solidFill>
-                  <a:srgbClr val="22373A"/>
+                  <a:schemeClr val="tx1"/>
                 </a:solidFill>
                 <a:latin typeface="Microsoft Sans Serif"/>
                 <a:cs typeface="Microsoft Sans Serif"/>
@@ -9090,14 +9123,17 @@
             <a:r>
               <a:rPr sz="1000" spc="-20" dirty="0">
                 <a:solidFill>
-                  <a:srgbClr val="22373A"/>
+                  <a:schemeClr val="tx1"/>
                 </a:solidFill>
                 <a:latin typeface="Microsoft Sans Serif"/>
                 <a:cs typeface="Microsoft Sans Serif"/>
               </a:rPr>
               <a:t>model</a:t>
             </a:r>
-            <a:endParaRPr sz="1000">
+            <a:endParaRPr sz="1000" dirty="0">
+              <a:solidFill>
+                <a:schemeClr val="tx1"/>
+              </a:solidFill>
               <a:latin typeface="Microsoft Sans Serif"/>
               <a:cs typeface="Microsoft Sans Serif"/>
             </a:endParaRPr>
@@ -9118,7 +9154,7 @@
             <a:r>
               <a:rPr sz="1000" spc="-45" dirty="0">
                 <a:solidFill>
-                  <a:srgbClr val="22373A"/>
+                  <a:schemeClr val="tx1"/>
                 </a:solidFill>
                 <a:latin typeface="Microsoft Sans Serif"/>
                 <a:cs typeface="Microsoft Sans Serif"/>
@@ -9128,7 +9164,7 @@
             <a:r>
               <a:rPr sz="1000" spc="20" dirty="0">
                 <a:solidFill>
-                  <a:srgbClr val="22373A"/>
+                  <a:schemeClr val="tx1"/>
                 </a:solidFill>
                 <a:latin typeface="Microsoft Sans Serif"/>
                 <a:cs typeface="Microsoft Sans Serif"/>
@@ -9138,7 +9174,7 @@
             <a:r>
               <a:rPr sz="1000" spc="-25" dirty="0">
                 <a:solidFill>
-                  <a:srgbClr val="22373A"/>
+                  <a:schemeClr val="tx1"/>
                 </a:solidFill>
                 <a:latin typeface="Microsoft Sans Serif"/>
                 <a:cs typeface="Microsoft Sans Serif"/>
@@ -9148,7 +9184,7 @@
             <a:r>
               <a:rPr sz="1000" spc="20" dirty="0">
                 <a:solidFill>
-                  <a:srgbClr val="22373A"/>
+                  <a:schemeClr val="tx1"/>
                 </a:solidFill>
                 <a:latin typeface="Microsoft Sans Serif"/>
                 <a:cs typeface="Microsoft Sans Serif"/>
@@ -9158,14 +9194,17 @@
             <a:r>
               <a:rPr sz="1000" spc="-10" dirty="0">
                 <a:solidFill>
-                  <a:srgbClr val="22373A"/>
+                  <a:schemeClr val="tx1"/>
                 </a:solidFill>
                 <a:latin typeface="Microsoft Sans Serif"/>
                 <a:cs typeface="Microsoft Sans Serif"/>
               </a:rPr>
               <a:t>disjoint</a:t>
             </a:r>
-            <a:endParaRPr sz="1000">
+            <a:endParaRPr sz="1000" dirty="0">
+              <a:solidFill>
+                <a:schemeClr val="tx1"/>
+              </a:solidFill>
               <a:latin typeface="Microsoft Sans Serif"/>
               <a:cs typeface="Microsoft Sans Serif"/>
             </a:endParaRPr>
@@ -9186,7 +9225,7 @@
             <a:r>
               <a:rPr sz="1000" spc="-40" dirty="0">
                 <a:solidFill>
-                  <a:srgbClr val="22373A"/>
+                  <a:schemeClr val="tx1"/>
                 </a:solidFill>
                 <a:latin typeface="Microsoft Sans Serif"/>
                 <a:cs typeface="Microsoft Sans Serif"/>
@@ -9196,7 +9235,7 @@
             <a:r>
               <a:rPr sz="1000" spc="20" dirty="0">
                 <a:solidFill>
-                  <a:srgbClr val="22373A"/>
+                  <a:schemeClr val="tx1"/>
                 </a:solidFill>
                 <a:latin typeface="Microsoft Sans Serif"/>
                 <a:cs typeface="Microsoft Sans Serif"/>
@@ -9206,7 +9245,7 @@
             <a:r>
               <a:rPr sz="1000" spc="-25" dirty="0">
                 <a:solidFill>
-                  <a:srgbClr val="22373A"/>
+                  <a:schemeClr val="tx1"/>
                 </a:solidFill>
                 <a:latin typeface="Microsoft Sans Serif"/>
                 <a:cs typeface="Microsoft Sans Serif"/>
@@ -9216,7 +9255,7 @@
             <a:r>
               <a:rPr sz="1000" dirty="0">
                 <a:solidFill>
-                  <a:srgbClr val="22373A"/>
+                  <a:schemeClr val="tx1"/>
                 </a:solidFill>
                 <a:latin typeface="Microsoft Sans Serif"/>
                 <a:cs typeface="Microsoft Sans Serif"/>
@@ -9226,7 +9265,7 @@
             <a:r>
               <a:rPr sz="1000" spc="25" dirty="0">
                 <a:solidFill>
-                  <a:srgbClr val="22373A"/>
+                  <a:schemeClr val="tx1"/>
                 </a:solidFill>
                 <a:latin typeface="Microsoft Sans Serif"/>
                 <a:cs typeface="Microsoft Sans Serif"/>
@@ -9236,7 +9275,7 @@
             <a:r>
               <a:rPr sz="1000" spc="-30" dirty="0">
                 <a:solidFill>
-                  <a:srgbClr val="22373A"/>
+                  <a:schemeClr val="tx1"/>
                 </a:solidFill>
                 <a:latin typeface="Microsoft Sans Serif"/>
                 <a:cs typeface="Microsoft Sans Serif"/>
@@ -9246,7 +9285,7 @@
             <a:r>
               <a:rPr sz="1000" spc="25" dirty="0">
                 <a:solidFill>
-                  <a:srgbClr val="22373A"/>
+                  <a:schemeClr val="tx1"/>
                 </a:solidFill>
                 <a:latin typeface="Microsoft Sans Serif"/>
                 <a:cs typeface="Microsoft Sans Serif"/>
@@ -9256,7 +9295,7 @@
             <a:r>
               <a:rPr sz="1000" i="1" spc="220" dirty="0">
                 <a:solidFill>
-                  <a:srgbClr val="22373A"/>
+                  <a:schemeClr val="tx1"/>
                 </a:solidFill>
                 <a:latin typeface="Arial"/>
                 <a:cs typeface="Arial"/>
@@ -9266,7 +9305,7 @@
             <a:r>
               <a:rPr sz="1000" i="1" spc="10" dirty="0">
                 <a:solidFill>
-                  <a:srgbClr val="22373A"/>
+                  <a:schemeClr val="tx1"/>
                 </a:solidFill>
                 <a:latin typeface="Arial"/>
                 <a:cs typeface="Arial"/>
@@ -9276,14 +9315,17 @@
             <a:r>
               <a:rPr sz="1000" spc="-25" dirty="0">
                 <a:solidFill>
-                  <a:srgbClr val="22373A"/>
+                  <a:schemeClr val="tx1"/>
                 </a:solidFill>
                 <a:latin typeface="Microsoft Sans Serif"/>
                 <a:cs typeface="Microsoft Sans Serif"/>
               </a:rPr>
               <a:t>0.5</a:t>
             </a:r>
-            <a:endParaRPr sz="1000">
+            <a:endParaRPr sz="1000" dirty="0">
+              <a:solidFill>
+                <a:schemeClr val="tx1"/>
+              </a:solidFill>
               <a:latin typeface="Microsoft Sans Serif"/>
               <a:cs typeface="Microsoft Sans Serif"/>
             </a:endParaRPr>
@@ -9955,7 +9997,7 @@
             <a:r>
               <a:rPr sz="1100" spc="-10" dirty="0">
                 <a:solidFill>
-                  <a:srgbClr val="22373A"/>
+                  <a:schemeClr val="tx1"/>
                 </a:solidFill>
                 <a:latin typeface="Arial MT"/>
                 <a:cs typeface="Arial MT"/>
@@ -9965,7 +10007,7 @@
             <a:r>
               <a:rPr sz="1100" spc="-25" dirty="0">
                 <a:solidFill>
-                  <a:srgbClr val="22373A"/>
+                  <a:schemeClr val="tx1"/>
                 </a:solidFill>
                 <a:latin typeface="Arial MT"/>
                 <a:cs typeface="Arial MT"/>
@@ -9975,7 +10017,7 @@
             <a:r>
               <a:rPr sz="1100" spc="-45" dirty="0">
                 <a:solidFill>
-                  <a:srgbClr val="22373A"/>
+                  <a:schemeClr val="tx1"/>
                 </a:solidFill>
                 <a:latin typeface="Arial MT"/>
                 <a:cs typeface="Arial MT"/>
@@ -9985,7 +10027,7 @@
             <a:r>
               <a:rPr sz="1100" spc="-25" dirty="0">
                 <a:solidFill>
-                  <a:srgbClr val="22373A"/>
+                  <a:schemeClr val="tx1"/>
                 </a:solidFill>
                 <a:latin typeface="Arial MT"/>
                 <a:cs typeface="Arial MT"/>
@@ -9995,7 +10037,7 @@
             <a:r>
               <a:rPr sz="1100" spc="-55" dirty="0">
                 <a:solidFill>
-                  <a:srgbClr val="22373A"/>
+                  <a:schemeClr val="tx1"/>
                 </a:solidFill>
                 <a:latin typeface="Arial MT"/>
                 <a:cs typeface="Arial MT"/>
@@ -10005,7 +10047,7 @@
             <a:r>
               <a:rPr sz="1100" spc="-20" dirty="0">
                 <a:solidFill>
-                  <a:srgbClr val="22373A"/>
+                  <a:schemeClr val="tx1"/>
                 </a:solidFill>
                 <a:latin typeface="Arial MT"/>
                 <a:cs typeface="Arial MT"/>
@@ -10015,7 +10057,7 @@
             <a:r>
               <a:rPr sz="1100" spc="-30" dirty="0">
                 <a:solidFill>
-                  <a:srgbClr val="22373A"/>
+                  <a:schemeClr val="tx1"/>
                 </a:solidFill>
                 <a:latin typeface="Arial MT"/>
                 <a:cs typeface="Arial MT"/>
@@ -10025,7 +10067,7 @@
             <a:r>
               <a:rPr sz="1100" spc="-20" dirty="0">
                 <a:solidFill>
-                  <a:srgbClr val="22373A"/>
+                  <a:schemeClr val="tx1"/>
                 </a:solidFill>
                 <a:latin typeface="Arial MT"/>
                 <a:cs typeface="Arial MT"/>
@@ -10035,14 +10077,17 @@
             <a:r>
               <a:rPr sz="1100" spc="-25" dirty="0">
                 <a:solidFill>
-                  <a:srgbClr val="22373A"/>
+                  <a:schemeClr val="tx1"/>
                 </a:solidFill>
                 <a:latin typeface="Arial MT"/>
                 <a:cs typeface="Arial MT"/>
               </a:rPr>
               <a:t>the</a:t>
             </a:r>
-            <a:endParaRPr sz="1100">
+            <a:endParaRPr sz="1100" dirty="0">
+              <a:solidFill>
+                <a:schemeClr val="tx1"/>
+              </a:solidFill>
               <a:latin typeface="Arial MT"/>
               <a:cs typeface="Arial MT"/>
             </a:endParaRPr>
@@ -10056,7 +10101,7 @@
             <a:r>
               <a:rPr sz="1100" spc="-55" dirty="0">
                 <a:solidFill>
-                  <a:srgbClr val="2D7DB8"/>
+                  <a:schemeClr val="tx1"/>
                 </a:solidFill>
                 <a:latin typeface="Arial MT"/>
                 <a:cs typeface="Arial MT"/>
@@ -10066,7 +10111,7 @@
             <a:r>
               <a:rPr sz="1100" spc="-60" dirty="0">
                 <a:solidFill>
-                  <a:srgbClr val="2D7DB8"/>
+                  <a:schemeClr val="tx1"/>
                 </a:solidFill>
                 <a:latin typeface="Arial MT"/>
                 <a:cs typeface="Arial MT"/>
@@ -10076,7 +10121,7 @@
             <a:r>
               <a:rPr sz="1100" spc="-15" dirty="0">
                 <a:solidFill>
-                  <a:srgbClr val="2D7DB8"/>
+                  <a:schemeClr val="tx1"/>
                 </a:solidFill>
                 <a:latin typeface="Arial MT"/>
                 <a:cs typeface="Arial MT"/>
@@ -10086,7 +10131,7 @@
             <a:r>
               <a:rPr sz="1100" spc="-40" dirty="0">
                 <a:solidFill>
-                  <a:srgbClr val="22373A"/>
+                  <a:schemeClr val="tx1"/>
                 </a:solidFill>
                 <a:latin typeface="Arial MT"/>
                 <a:cs typeface="Arial MT"/>
@@ -10096,7 +10141,7 @@
             <a:r>
               <a:rPr sz="1100" spc="-15" dirty="0">
                 <a:solidFill>
-                  <a:srgbClr val="22373A"/>
+                  <a:schemeClr val="tx1"/>
                 </a:solidFill>
                 <a:latin typeface="Arial MT"/>
                 <a:cs typeface="Arial MT"/>
@@ -10106,7 +10151,7 @@
             <a:r>
               <a:rPr sz="1100" spc="-55" dirty="0">
                 <a:solidFill>
-                  <a:srgbClr val="22373A"/>
+                  <a:schemeClr val="tx1"/>
                 </a:solidFill>
                 <a:latin typeface="Arial MT"/>
                 <a:cs typeface="Arial MT"/>
@@ -10116,7 +10161,7 @@
             <a:r>
               <a:rPr sz="1100" spc="-15" dirty="0">
                 <a:solidFill>
-                  <a:srgbClr val="22373A"/>
+                  <a:schemeClr val="tx1"/>
                 </a:solidFill>
                 <a:latin typeface="Arial MT"/>
                 <a:cs typeface="Arial MT"/>
@@ -10126,7 +10171,7 @@
             <a:r>
               <a:rPr sz="1100" dirty="0">
                 <a:solidFill>
-                  <a:srgbClr val="22373A"/>
+                  <a:schemeClr val="tx1"/>
                 </a:solidFill>
                 <a:latin typeface="Arial MT"/>
                 <a:cs typeface="Arial MT"/>
@@ -10136,7 +10181,7 @@
             <a:r>
               <a:rPr sz="1100" spc="-15" dirty="0">
                 <a:solidFill>
-                  <a:srgbClr val="22373A"/>
+                  <a:schemeClr val="tx1"/>
                 </a:solidFill>
                 <a:latin typeface="Arial MT"/>
                 <a:cs typeface="Arial MT"/>
@@ -10146,7 +10191,7 @@
             <a:r>
               <a:rPr sz="1100" spc="-10" dirty="0">
                 <a:solidFill>
-                  <a:srgbClr val="2D7DB8"/>
+                  <a:schemeClr val="tx1"/>
                 </a:solidFill>
                 <a:latin typeface="Arial MT"/>
                 <a:cs typeface="Arial MT"/>
@@ -10156,7 +10201,7 @@
             <a:r>
               <a:rPr sz="1100" spc="-40" dirty="0">
                 <a:solidFill>
-                  <a:srgbClr val="22373A"/>
+                  <a:schemeClr val="tx1"/>
                 </a:solidFill>
                 <a:latin typeface="Arial MT"/>
                 <a:cs typeface="Arial MT"/>
@@ -10166,7 +10211,7 @@
             <a:r>
               <a:rPr sz="1100" spc="95" dirty="0">
                 <a:solidFill>
-                  <a:srgbClr val="22373A"/>
+                  <a:schemeClr val="tx1"/>
                 </a:solidFill>
                 <a:latin typeface="Arial MT"/>
                 <a:cs typeface="Arial MT"/>
@@ -10176,7 +10221,7 @@
             <a:r>
               <a:rPr sz="1100" spc="-25" dirty="0">
                 <a:solidFill>
-                  <a:srgbClr val="22373A"/>
+                  <a:schemeClr val="tx1"/>
                 </a:solidFill>
                 <a:latin typeface="Arial MT"/>
                 <a:cs typeface="Arial MT"/>
@@ -10186,7 +10231,7 @@
             <a:r>
               <a:rPr sz="1100" dirty="0">
                 <a:solidFill>
-                  <a:srgbClr val="22373A"/>
+                  <a:schemeClr val="tx1"/>
                 </a:solidFill>
                 <a:latin typeface="Arial MT"/>
                 <a:cs typeface="Arial MT"/>
@@ -10196,7 +10241,7 @@
             <a:r>
               <a:rPr sz="1100" spc="-25" dirty="0">
                 <a:solidFill>
-                  <a:srgbClr val="22373A"/>
+                  <a:schemeClr val="tx1"/>
                 </a:solidFill>
                 <a:latin typeface="Arial MT"/>
                 <a:cs typeface="Arial MT"/>
@@ -10206,7 +10251,7 @@
             <a:r>
               <a:rPr sz="1100" spc="-70" dirty="0">
                 <a:solidFill>
-                  <a:srgbClr val="22373A"/>
+                  <a:schemeClr val="tx1"/>
                 </a:solidFill>
                 <a:latin typeface="Arial MT"/>
                 <a:cs typeface="Arial MT"/>
@@ -10216,7 +10261,7 @@
             <a:r>
               <a:rPr sz="1100" spc="-80" dirty="0">
                 <a:solidFill>
-                  <a:srgbClr val="22373A"/>
+                  <a:schemeClr val="tx1"/>
                 </a:solidFill>
                 <a:latin typeface="Arial MT"/>
                 <a:cs typeface="Arial MT"/>
@@ -10226,7 +10271,7 @@
             <a:r>
               <a:rPr sz="1100" spc="25" dirty="0">
                 <a:solidFill>
-                  <a:srgbClr val="22373A"/>
+                  <a:schemeClr val="tx1"/>
                 </a:solidFill>
                 <a:latin typeface="Arial MT"/>
                 <a:cs typeface="Arial MT"/>
@@ -10236,7 +10281,7 @@
             <a:r>
               <a:rPr sz="1100" spc="-40" dirty="0">
                 <a:solidFill>
-                  <a:srgbClr val="22373A"/>
+                  <a:schemeClr val="tx1"/>
                 </a:solidFill>
                 <a:latin typeface="Arial MT"/>
                 <a:cs typeface="Arial MT"/>
@@ -10246,7 +10291,7 @@
             <a:r>
               <a:rPr sz="1100" spc="25" dirty="0">
                 <a:solidFill>
-                  <a:srgbClr val="22373A"/>
+                  <a:schemeClr val="tx1"/>
                 </a:solidFill>
                 <a:latin typeface="Arial MT"/>
                 <a:cs typeface="Arial MT"/>
@@ -10256,7 +10301,7 @@
             <a:r>
               <a:rPr sz="1100" spc="-20" dirty="0">
                 <a:solidFill>
-                  <a:srgbClr val="22373A"/>
+                  <a:schemeClr val="tx1"/>
                 </a:solidFill>
                 <a:latin typeface="Arial MT"/>
                 <a:cs typeface="Arial MT"/>
@@ -10266,7 +10311,7 @@
             <a:r>
               <a:rPr sz="1100" spc="25" dirty="0">
                 <a:solidFill>
-                  <a:srgbClr val="22373A"/>
+                  <a:schemeClr val="tx1"/>
                 </a:solidFill>
                 <a:latin typeface="Arial MT"/>
                 <a:cs typeface="Arial MT"/>
@@ -10276,7 +10321,7 @@
             <a:r>
               <a:rPr sz="1100" spc="-25" dirty="0">
                 <a:solidFill>
-                  <a:srgbClr val="22373A"/>
+                  <a:schemeClr val="tx1"/>
                 </a:solidFill>
                 <a:latin typeface="Arial MT"/>
                 <a:cs typeface="Arial MT"/>
@@ -10286,7 +10331,7 @@
             <a:r>
               <a:rPr sz="1100" spc="-40" dirty="0">
                 <a:solidFill>
-                  <a:srgbClr val="22373A"/>
+                  <a:schemeClr val="tx1"/>
                 </a:solidFill>
                 <a:latin typeface="Arial MT"/>
                 <a:cs typeface="Arial MT"/>
@@ -10296,7 +10341,7 @@
             <a:r>
               <a:rPr sz="1100" spc="-35" dirty="0">
                 <a:solidFill>
-                  <a:srgbClr val="22373A"/>
+                  <a:schemeClr val="tx1"/>
                 </a:solidFill>
                 <a:latin typeface="Arial MT"/>
                 <a:cs typeface="Arial MT"/>
@@ -10306,14 +10351,17 @@
             <a:r>
               <a:rPr sz="1100" spc="-10" dirty="0">
                 <a:solidFill>
-                  <a:srgbClr val="22373A"/>
+                  <a:schemeClr val="tx1"/>
                 </a:solidFill>
                 <a:latin typeface="Arial MT"/>
                 <a:cs typeface="Arial MT"/>
               </a:rPr>
               <a:t>attack.</a:t>
             </a:r>
-            <a:endParaRPr sz="1100">
+            <a:endParaRPr sz="1100" dirty="0">
+              <a:solidFill>
+                <a:schemeClr val="tx1"/>
+              </a:solidFill>
               <a:latin typeface="Arial MT"/>
               <a:cs typeface="Arial MT"/>
             </a:endParaRPr>
@@ -11060,6 +11108,10 @@
           </p:nvPr>
         </p:nvSpPr>
         <p:spPr>
+          <a:xfrm>
+            <a:off x="347294" y="619389"/>
+            <a:ext cx="5071211" cy="1475597"/>
+          </a:xfrm>
           <a:prstGeom prst="rect">
             <a:avLst/>
           </a:prstGeom>
@@ -11373,119 +11425,28 @@
                 <a:latin typeface="Arial"/>
                 <a:cs typeface="Arial"/>
               </a:rPr>
-              <a:t>The</a:t>
-            </a:r>
-            <a:r>
-              <a:rPr b="1" spc="5" dirty="0">
+              <a:t>T</a:t>
+            </a:r>
+            <a:r>
+              <a:rPr lang="en-GB" b="1" dirty="0" err="1">
                 <a:latin typeface="Arial"/>
                 <a:cs typeface="Arial"/>
               </a:rPr>
-              <a:t> </a:t>
-            </a:r>
-            <a:r>
-              <a:rPr b="1" spc="-45" dirty="0">
+              <a:t>emplate</a:t>
+            </a:r>
+            <a:r>
+              <a:rPr lang="en-GB" b="1" dirty="0">
                 <a:latin typeface="Arial"/>
                 <a:cs typeface="Arial"/>
               </a:rPr>
-              <a:t>bridge</a:t>
-            </a:r>
-            <a:r>
-              <a:rPr b="1" spc="5" dirty="0">
-                <a:latin typeface="Arial"/>
-                <a:cs typeface="Arial"/>
-              </a:rPr>
-              <a:t> </a:t>
+              <a:t> capturers flow statistics</a:t>
             </a:r>
             <a:r>
               <a:rPr b="1" spc="-10" dirty="0">
                 <a:latin typeface="Arial"/>
                 <a:cs typeface="Arial"/>
               </a:rPr>
-              <a:t>and</a:t>
-            </a:r>
-            <a:r>
-              <a:rPr b="1" spc="5" dirty="0">
-                <a:latin typeface="Arial"/>
-                <a:cs typeface="Arial"/>
-              </a:rPr>
-              <a:t> </a:t>
-            </a:r>
-            <a:r>
-              <a:rPr b="1" dirty="0">
-                <a:latin typeface="Arial"/>
-                <a:cs typeface="Arial"/>
-              </a:rPr>
-              <a:t>the</a:t>
-            </a:r>
-            <a:r>
-              <a:rPr b="1" spc="10" dirty="0">
-                <a:latin typeface="Arial"/>
-                <a:cs typeface="Arial"/>
-              </a:rPr>
-              <a:t> </a:t>
-            </a:r>
-            <a:r>
-              <a:rPr b="1" spc="-40" dirty="0">
-                <a:latin typeface="Arial"/>
-                <a:cs typeface="Arial"/>
-              </a:rPr>
-              <a:t>ground</a:t>
-            </a:r>
-            <a:r>
-              <a:rPr b="1" spc="5" dirty="0">
-                <a:latin typeface="Arial"/>
-                <a:cs typeface="Arial"/>
-              </a:rPr>
-              <a:t> </a:t>
-            </a:r>
-            <a:r>
-              <a:rPr b="1" dirty="0">
-                <a:latin typeface="Arial"/>
-                <a:cs typeface="Arial"/>
-              </a:rPr>
-              <a:t>truth</a:t>
-            </a:r>
-            <a:r>
-              <a:rPr b="1" spc="10" dirty="0">
-                <a:latin typeface="Arial"/>
-                <a:cs typeface="Arial"/>
-              </a:rPr>
-              <a:t> </a:t>
-            </a:r>
-            <a:r>
-              <a:rPr b="1" spc="-60" dirty="0">
-                <a:latin typeface="Arial"/>
-                <a:cs typeface="Arial"/>
-              </a:rPr>
-              <a:t>share</a:t>
-            </a:r>
-            <a:r>
-              <a:rPr b="1" spc="5" dirty="0">
-                <a:latin typeface="Arial"/>
-                <a:cs typeface="Arial"/>
-              </a:rPr>
-              <a:t> </a:t>
-            </a:r>
-            <a:r>
-              <a:rPr b="1" dirty="0">
-                <a:latin typeface="Arial"/>
-                <a:cs typeface="Arial"/>
-              </a:rPr>
-              <a:t>an</a:t>
-            </a:r>
-            <a:r>
-              <a:rPr b="1" spc="5" dirty="0">
-                <a:latin typeface="Arial"/>
-                <a:cs typeface="Arial"/>
-              </a:rPr>
-              <a:t> </a:t>
-            </a:r>
-            <a:r>
-              <a:rPr b="1" spc="-10" dirty="0">
-                <a:latin typeface="Arial"/>
-                <a:cs typeface="Arial"/>
-              </a:rPr>
-              <a:t>author.</a:t>
+              <a:t>.</a:t>
             </a:r>
             <a:r>
               <a:rPr b="1" spc="70" dirty="0">
@@ -11495,248 +11456,113 @@
               <a:t> </a:t>
             </a:r>
             <a:r>
-              <a:rPr dirty="0"/>
-              <a:t>On</a:t>
-            </a:r>
-            <a:r>
-              <a:rPr spc="-25" dirty="0"/>
-              <a:t> </a:t>
-            </a:r>
-            <a:r>
-              <a:rPr spc="-65" dirty="0"/>
-              <a:t>CIC-</a:t>
-            </a:r>
-            <a:r>
-              <a:rPr spc="-35" dirty="0"/>
-              <a:t>IDS</a:t>
-            </a:r>
-            <a:r>
-              <a:rPr spc="-20" dirty="0"/>
-              <a:t> they </a:t>
-            </a:r>
-            <a:r>
-              <a:rPr spc="-10" dirty="0"/>
-              <a:t>share </a:t>
-            </a:r>
-            <a:r>
-              <a:rPr spc="-25" dirty="0"/>
-              <a:t>structure</a:t>
-            </a:r>
-            <a:r>
-              <a:rPr spc="-10" dirty="0"/>
-              <a:t> </a:t>
-            </a:r>
-            <a:r>
-              <a:rPr dirty="0"/>
-              <a:t>–</a:t>
-            </a:r>
-            <a:r>
-              <a:rPr spc="-5" dirty="0"/>
-              <a:t> </a:t>
-            </a:r>
-            <a:r>
-              <a:rPr dirty="0"/>
-              <a:t>but</a:t>
-            </a:r>
-            <a:r>
-              <a:rPr spc="-10" dirty="0"/>
-              <a:t> </a:t>
-            </a:r>
-            <a:r>
-              <a:rPr dirty="0"/>
-              <a:t>the</a:t>
-            </a:r>
-            <a:r>
-              <a:rPr spc="-5" dirty="0"/>
-              <a:t> </a:t>
-            </a:r>
-            <a:r>
-              <a:rPr spc="-50" dirty="0"/>
-              <a:t>mapping</a:t>
-            </a:r>
-            <a:r>
-              <a:rPr spc="-10" dirty="0"/>
-              <a:t> is</a:t>
-            </a:r>
-            <a:r>
-              <a:rPr spc="-5" dirty="0"/>
-              <a:t> </a:t>
-            </a:r>
-            <a:r>
-              <a:rPr spc="-55" dirty="0"/>
-              <a:t>one-</a:t>
-            </a:r>
-            <a:r>
-              <a:rPr spc="-45" dirty="0"/>
-              <a:t>to-</a:t>
-            </a:r>
-            <a:r>
-              <a:rPr spc="-60" dirty="0"/>
-              <a:t>many,</a:t>
-            </a:r>
-            <a:r>
-              <a:rPr spc="-10" dirty="0"/>
-              <a:t> </a:t>
-            </a:r>
-            <a:r>
-              <a:rPr dirty="0"/>
-              <a:t>the</a:t>
-            </a:r>
-            <a:r>
-              <a:rPr spc="-5" dirty="0"/>
-              <a:t> </a:t>
-            </a:r>
-            <a:r>
-              <a:rPr spc="-75" dirty="0"/>
-              <a:t>preference-</a:t>
-            </a:r>
-            <a:r>
-              <a:rPr spc="-45" dirty="0"/>
-              <a:t>rule</a:t>
-            </a:r>
-            <a:r>
-              <a:rPr spc="-5" dirty="0"/>
-              <a:t> </a:t>
-            </a:r>
-            <a:r>
-              <a:rPr spc="-30" dirty="0"/>
-              <a:t>ablation</a:t>
-            </a:r>
-            <a:r>
-              <a:rPr spc="-10" dirty="0"/>
-              <a:t> changes </a:t>
-            </a:r>
-            <a:r>
-              <a:rPr spc="-35" dirty="0"/>
-              <a:t>almost</a:t>
-            </a:r>
-            <a:r>
-              <a:rPr spc="-40" dirty="0"/>
-              <a:t> </a:t>
-            </a:r>
-            <a:r>
-              <a:rPr spc="-10" dirty="0"/>
-              <a:t>no </a:t>
-            </a:r>
-            <a:r>
-              <a:rPr spc="-30" dirty="0"/>
-              <a:t>prediction,</a:t>
-            </a:r>
-            <a:r>
-              <a:rPr spc="-5" dirty="0"/>
-              <a:t> </a:t>
-            </a:r>
-            <a:r>
-              <a:rPr spc="-55" dirty="0"/>
-              <a:t>and</a:t>
-            </a:r>
-            <a:r>
-              <a:rPr spc="-5" dirty="0"/>
-              <a:t> </a:t>
-            </a:r>
-            <a:r>
-              <a:rPr spc="-10" dirty="0"/>
-              <a:t>on</a:t>
-            </a:r>
-            <a:r>
-              <a:rPr spc="-5" dirty="0"/>
-              <a:t> </a:t>
-            </a:r>
-            <a:r>
-              <a:rPr dirty="0"/>
-              <a:t>the</a:t>
-            </a:r>
-            <a:r>
-              <a:rPr spc="-5" dirty="0"/>
-              <a:t> </a:t>
-            </a:r>
-            <a:r>
-              <a:rPr spc="-50" dirty="0"/>
-              <a:t>independently</a:t>
-            </a:r>
-            <a:r>
-              <a:rPr spc="-5" dirty="0"/>
-              <a:t> </a:t>
-            </a:r>
-            <a:r>
-              <a:rPr spc="-75" dirty="0"/>
-              <a:t>sourced</a:t>
-            </a:r>
-            <a:r>
-              <a:rPr dirty="0"/>
-              <a:t> </a:t>
-            </a:r>
-            <a:r>
-              <a:rPr spc="-65" dirty="0"/>
-              <a:t>DARPA</a:t>
-            </a:r>
-            <a:r>
-              <a:rPr spc="-5" dirty="0"/>
-              <a:t> </a:t>
-            </a:r>
-            <a:r>
-              <a:rPr dirty="0"/>
-              <a:t>truth</a:t>
-            </a:r>
-            <a:r>
-              <a:rPr spc="-5" dirty="0"/>
-              <a:t> </a:t>
-            </a:r>
-            <a:r>
-              <a:rPr dirty="0"/>
-              <a:t>the</a:t>
-            </a:r>
-            <a:r>
-              <a:rPr spc="-5" dirty="0"/>
-              <a:t> </a:t>
-            </a:r>
-            <a:r>
-              <a:rPr spc="-105" dirty="0"/>
-              <a:t>same</a:t>
-            </a:r>
-            <a:r>
-              <a:rPr spc="30" dirty="0"/>
-              <a:t> </a:t>
-            </a:r>
-            <a:r>
-              <a:rPr spc="-10" dirty="0"/>
-              <a:t>bridge </a:t>
-            </a:r>
-            <a:r>
-              <a:rPr spc="-95" dirty="0"/>
-              <a:t>reaches</a:t>
-            </a:r>
-            <a:r>
-              <a:rPr spc="50" dirty="0"/>
-              <a:t> </a:t>
-            </a:r>
-            <a:r>
-              <a:rPr spc="-20" dirty="0"/>
-              <a:t>only</a:t>
-            </a:r>
-            <a:r>
-              <a:rPr spc="50" dirty="0"/>
-              <a:t> </a:t>
-            </a:r>
-            <a:r>
-              <a:rPr i="1" dirty="0">
-                <a:latin typeface="Arial"/>
-                <a:cs typeface="Arial"/>
-              </a:rPr>
-              <a:t>≈</a:t>
-            </a:r>
-            <a:r>
-              <a:rPr dirty="0"/>
-              <a:t>0.5</a:t>
-            </a:r>
-            <a:r>
-              <a:rPr spc="55" dirty="0"/>
-              <a:t> </a:t>
-            </a:r>
-            <a:r>
-              <a:rPr spc="-10" dirty="0"/>
-              <a:t>recall.</a:t>
-            </a:r>
+              <a:rPr lang="en-GB" dirty="0"/>
+              <a:t> </a:t>
+            </a:r>
+            <a:r>
+              <a:rPr lang="en-GB" spc="-70" dirty="0"/>
+              <a:t>Not payload</a:t>
+            </a:r>
+            <a:r>
+              <a:rPr lang="en-GB" spc="-5" dirty="0"/>
+              <a:t> </a:t>
+            </a:r>
+            <a:r>
+              <a:rPr lang="en-GB" dirty="0"/>
+              <a:t>or</a:t>
+            </a:r>
+            <a:r>
+              <a:rPr lang="en-GB" spc="-5" dirty="0"/>
+              <a:t> </a:t>
+            </a:r>
+            <a:r>
+              <a:rPr lang="en-GB" spc="-20" dirty="0"/>
+              <a:t>multi-</a:t>
+            </a:r>
+            <a:r>
+              <a:rPr lang="en-GB" spc="-10" dirty="0"/>
+              <a:t>flow</a:t>
+            </a:r>
+            <a:r>
+              <a:rPr lang="en-GB" spc="-5" dirty="0"/>
+              <a:t> </a:t>
+            </a:r>
+            <a:r>
+              <a:rPr lang="en-GB" spc="-20" dirty="0"/>
+              <a:t>state,</a:t>
+            </a:r>
+            <a:r>
+              <a:rPr lang="en-GB" dirty="0"/>
+              <a:t> </a:t>
+            </a:r>
+            <a:r>
+              <a:rPr lang="en-GB" spc="-90" dirty="0"/>
+              <a:t>so</a:t>
+            </a:r>
+            <a:r>
+              <a:rPr lang="en-GB" spc="15" dirty="0"/>
+              <a:t> </a:t>
+            </a:r>
+            <a:r>
+              <a:rPr lang="en-GB" spc="-10" dirty="0"/>
+              <a:t>minority </a:t>
+            </a:r>
+            <a:r>
+              <a:rPr lang="en-GB" spc="-105" dirty="0"/>
+              <a:t>classes</a:t>
+            </a:r>
+            <a:r>
+              <a:rPr lang="en-GB" spc="30" dirty="0"/>
+              <a:t> </a:t>
+            </a:r>
+            <a:r>
+              <a:rPr lang="en-GB" spc="-65" dirty="0"/>
+              <a:t>are</a:t>
+            </a:r>
+            <a:r>
+              <a:rPr lang="en-GB" dirty="0"/>
+              <a:t> </a:t>
+            </a:r>
+            <a:r>
+              <a:rPr lang="en-GB" spc="-90" dirty="0"/>
+              <a:t>missed</a:t>
+            </a:r>
+            <a:r>
+              <a:rPr lang="en-GB" spc="15" dirty="0"/>
+              <a:t> </a:t>
+            </a:r>
+            <a:r>
+              <a:rPr lang="en-GB" spc="-20" dirty="0"/>
+              <a:t>by</a:t>
+            </a:r>
+            <a:r>
+              <a:rPr lang="en-GB" spc="15" dirty="0"/>
+              <a:t> </a:t>
+            </a:r>
+            <a:r>
+              <a:rPr lang="en-GB" spc="-70" dirty="0"/>
+              <a:t>every</a:t>
+            </a:r>
+            <a:r>
+              <a:rPr lang="en-GB" spc="15" dirty="0"/>
+              <a:t> </a:t>
+            </a:r>
+            <a:r>
+              <a:rPr lang="en-GB" spc="-10" dirty="0"/>
+              <a:t>model.</a:t>
+            </a:r>
+            <a:endParaRPr lang="en-GB" spc="-65" dirty="0"/>
+          </a:p>
+          <a:p>
+            <a:pPr marL="12700" marR="55244">
+              <a:lnSpc>
+                <a:spcPct val="118000"/>
+              </a:lnSpc>
+              <a:spcBef>
+                <a:spcPts val="1090"/>
+              </a:spcBef>
+            </a:pPr>
+            <a:endParaRPr lang="en-GB" spc="-65" dirty="0"/>
           </a:p>
         </p:txBody>
       </p:sp>
@@ -13687,7 +13513,7 @@
         <p:spPr>
           <a:xfrm>
             <a:off x="347294" y="909863"/>
-            <a:ext cx="5044440" cy="1497330"/>
+            <a:ext cx="5044440" cy="1512594"/>
           </a:xfrm>
           <a:prstGeom prst="rect">
             <a:avLst/>
@@ -13710,7 +13536,7 @@
             <a:r>
               <a:rPr sz="1100" spc="-65" dirty="0">
                 <a:solidFill>
-                  <a:srgbClr val="22373A"/>
+                  <a:schemeClr val="tx1"/>
                 </a:solidFill>
                 <a:latin typeface="Arial MT"/>
                 <a:cs typeface="Arial MT"/>
@@ -13720,7 +13546,7 @@
             <a:r>
               <a:rPr sz="1100" spc="-70" dirty="0">
                 <a:solidFill>
-                  <a:srgbClr val="22373A"/>
+                  <a:schemeClr val="tx1"/>
                 </a:solidFill>
                 <a:latin typeface="Arial MT"/>
                 <a:cs typeface="Arial MT"/>
@@ -13730,7 +13556,7 @@
             <a:r>
               <a:rPr sz="1100" spc="25" dirty="0">
                 <a:solidFill>
-                  <a:srgbClr val="22373A"/>
+                  <a:schemeClr val="tx1"/>
                 </a:solidFill>
                 <a:latin typeface="Arial MT"/>
                 <a:cs typeface="Arial MT"/>
@@ -13740,7 +13566,7 @@
             <a:r>
               <a:rPr sz="1100" spc="-35" dirty="0">
                 <a:solidFill>
-                  <a:srgbClr val="22373A"/>
+                  <a:schemeClr val="tx1"/>
                 </a:solidFill>
                 <a:latin typeface="Arial MT"/>
                 <a:cs typeface="Arial MT"/>
@@ -13750,7 +13576,7 @@
             <a:r>
               <a:rPr sz="1100" spc="30" dirty="0">
                 <a:solidFill>
-                  <a:srgbClr val="22373A"/>
+                  <a:schemeClr val="tx1"/>
                 </a:solidFill>
                 <a:latin typeface="Arial MT"/>
                 <a:cs typeface="Arial MT"/>
@@ -13760,7 +13586,7 @@
             <a:r>
               <a:rPr sz="1100" spc="-55" dirty="0">
                 <a:solidFill>
-                  <a:srgbClr val="22373A"/>
+                  <a:schemeClr val="tx1"/>
                 </a:solidFill>
                 <a:latin typeface="Arial MT"/>
                 <a:cs typeface="Arial MT"/>
@@ -13770,7 +13596,7 @@
             <a:r>
               <a:rPr sz="1100" spc="25" dirty="0">
                 <a:solidFill>
-                  <a:srgbClr val="22373A"/>
+                  <a:schemeClr val="tx1"/>
                 </a:solidFill>
                 <a:latin typeface="Arial MT"/>
                 <a:cs typeface="Arial MT"/>
@@ -13780,7 +13606,7 @@
             <a:r>
               <a:rPr sz="1100" spc="-50" dirty="0">
                 <a:solidFill>
-                  <a:srgbClr val="22373A"/>
+                  <a:schemeClr val="tx1"/>
                 </a:solidFill>
                 <a:latin typeface="Arial MT"/>
                 <a:cs typeface="Arial MT"/>
@@ -13790,7 +13616,7 @@
             <a:r>
               <a:rPr sz="1100" spc="30" dirty="0">
                 <a:solidFill>
-                  <a:srgbClr val="22373A"/>
+                  <a:schemeClr val="tx1"/>
                 </a:solidFill>
                 <a:latin typeface="Arial MT"/>
                 <a:cs typeface="Arial MT"/>
@@ -13800,7 +13626,7 @@
             <a:r>
               <a:rPr sz="1100" dirty="0">
                 <a:solidFill>
-                  <a:srgbClr val="22373A"/>
+                  <a:schemeClr val="tx1"/>
                 </a:solidFill>
                 <a:latin typeface="Arial MT"/>
                 <a:cs typeface="Arial MT"/>
@@ -13810,7 +13636,7 @@
             <a:r>
               <a:rPr sz="1100" spc="25" dirty="0">
                 <a:solidFill>
-                  <a:srgbClr val="22373A"/>
+                  <a:schemeClr val="tx1"/>
                 </a:solidFill>
                 <a:latin typeface="Arial MT"/>
                 <a:cs typeface="Arial MT"/>
@@ -13820,7 +13646,7 @@
             <a:r>
               <a:rPr sz="1100" spc="-70" dirty="0">
                 <a:solidFill>
-                  <a:srgbClr val="2D7DB8"/>
+                  <a:schemeClr val="tx1"/>
                 </a:solidFill>
                 <a:latin typeface="Arial MT"/>
                 <a:cs typeface="Arial MT"/>
@@ -13830,7 +13656,7 @@
             <a:r>
               <a:rPr sz="1100" spc="30" dirty="0">
                 <a:solidFill>
-                  <a:srgbClr val="2D7DB8"/>
+                  <a:schemeClr val="tx1"/>
                 </a:solidFill>
                 <a:latin typeface="Arial MT"/>
                 <a:cs typeface="Arial MT"/>
@@ -13840,7 +13666,7 @@
             <a:r>
               <a:rPr sz="1100" spc="-35" dirty="0">
                 <a:solidFill>
-                  <a:srgbClr val="22373A"/>
+                  <a:schemeClr val="tx1"/>
                 </a:solidFill>
                 <a:latin typeface="Arial MT"/>
                 <a:cs typeface="Arial MT"/>
@@ -13850,7 +13676,7 @@
             <a:r>
               <a:rPr sz="1100" spc="30" dirty="0">
                 <a:solidFill>
-                  <a:srgbClr val="22373A"/>
+                  <a:schemeClr val="tx1"/>
                 </a:solidFill>
                 <a:latin typeface="Arial MT"/>
                 <a:cs typeface="Arial MT"/>
@@ -13860,7 +13686,7 @@
             <a:r>
               <a:rPr sz="1100" spc="-25" dirty="0">
                 <a:solidFill>
-                  <a:srgbClr val="22373A"/>
+                  <a:schemeClr val="tx1"/>
                 </a:solidFill>
                 <a:latin typeface="Arial MT"/>
                 <a:cs typeface="Arial MT"/>
@@ -13870,7 +13696,7 @@
             <a:r>
               <a:rPr sz="1100" spc="25" dirty="0">
                 <a:solidFill>
-                  <a:srgbClr val="22373A"/>
+                  <a:schemeClr val="tx1"/>
                 </a:solidFill>
                 <a:latin typeface="Arial MT"/>
                 <a:cs typeface="Arial MT"/>
@@ -13880,7 +13706,7 @@
             <a:r>
               <a:rPr sz="1100" spc="-10" dirty="0">
                 <a:solidFill>
-                  <a:srgbClr val="22373A"/>
+                  <a:schemeClr val="tx1"/>
                 </a:solidFill>
                 <a:latin typeface="Arial MT"/>
                 <a:cs typeface="Arial MT"/>
@@ -13890,7 +13716,7 @@
             <a:r>
               <a:rPr sz="1100" spc="-50" dirty="0">
                 <a:solidFill>
-                  <a:srgbClr val="22373A"/>
+                  <a:schemeClr val="tx1"/>
                 </a:solidFill>
                 <a:latin typeface="Arial MT"/>
                 <a:cs typeface="Arial MT"/>
@@ -13900,7 +13726,7 @@
             <a:r>
               <a:rPr sz="1100" dirty="0">
                 <a:solidFill>
-                  <a:srgbClr val="22373A"/>
+                  <a:schemeClr val="tx1"/>
                 </a:solidFill>
                 <a:latin typeface="Arial MT"/>
                 <a:cs typeface="Arial MT"/>
@@ -13910,7 +13736,7 @@
             <a:r>
               <a:rPr sz="1100" spc="-30" dirty="0">
                 <a:solidFill>
-                  <a:srgbClr val="22373A"/>
+                  <a:schemeClr val="tx1"/>
                 </a:solidFill>
                 <a:latin typeface="Arial MT"/>
                 <a:cs typeface="Arial MT"/>
@@ -13920,7 +13746,7 @@
             <a:r>
               <a:rPr sz="1100" spc="5" dirty="0">
                 <a:solidFill>
-                  <a:srgbClr val="22373A"/>
+                  <a:schemeClr val="tx1"/>
                 </a:solidFill>
                 <a:latin typeface="Arial MT"/>
                 <a:cs typeface="Arial MT"/>
@@ -13930,7 +13756,7 @@
             <a:r>
               <a:rPr sz="1100" spc="-45" dirty="0">
                 <a:solidFill>
-                  <a:srgbClr val="22373A"/>
+                  <a:schemeClr val="tx1"/>
                 </a:solidFill>
                 <a:latin typeface="Arial MT"/>
                 <a:cs typeface="Arial MT"/>
@@ -13940,7 +13766,7 @@
             <a:r>
               <a:rPr sz="1100" dirty="0">
                 <a:solidFill>
-                  <a:srgbClr val="22373A"/>
+                  <a:schemeClr val="tx1"/>
                 </a:solidFill>
                 <a:latin typeface="Arial MT"/>
                 <a:cs typeface="Arial MT"/>
@@ -13950,7 +13776,7 @@
             <a:r>
               <a:rPr sz="1100" spc="5" dirty="0">
                 <a:solidFill>
-                  <a:srgbClr val="22373A"/>
+                  <a:schemeClr val="tx1"/>
                 </a:solidFill>
                 <a:latin typeface="Arial MT"/>
                 <a:cs typeface="Arial MT"/>
@@ -13960,7 +13786,7 @@
             <a:r>
               <a:rPr sz="1100" spc="-25" dirty="0">
                 <a:solidFill>
-                  <a:srgbClr val="22373A"/>
+                  <a:schemeClr val="tx1"/>
                 </a:solidFill>
                 <a:latin typeface="Arial MT"/>
                 <a:cs typeface="Arial MT"/>
@@ -13970,7 +13796,7 @@
             <a:r>
               <a:rPr sz="1100" dirty="0">
                 <a:solidFill>
-                  <a:srgbClr val="22373A"/>
+                  <a:schemeClr val="tx1"/>
                 </a:solidFill>
                 <a:latin typeface="Arial MT"/>
                 <a:cs typeface="Arial MT"/>
@@ -13980,7 +13806,7 @@
             <a:r>
               <a:rPr sz="1100" spc="5" dirty="0">
                 <a:solidFill>
-                  <a:srgbClr val="22373A"/>
+                  <a:schemeClr val="tx1"/>
                 </a:solidFill>
                 <a:latin typeface="Arial MT"/>
                 <a:cs typeface="Arial MT"/>
@@ -13990,14 +13816,17 @@
             <a:r>
               <a:rPr sz="1100" spc="-10" dirty="0">
                 <a:solidFill>
-                  <a:srgbClr val="22373A"/>
+                  <a:schemeClr val="tx1"/>
                 </a:solidFill>
                 <a:latin typeface="Arial MT"/>
                 <a:cs typeface="Arial MT"/>
               </a:rPr>
               <a:t>retrieval.</a:t>
             </a:r>
-            <a:endParaRPr sz="1100">
+            <a:endParaRPr sz="1100" dirty="0">
+              <a:solidFill>
+                <a:schemeClr val="tx1"/>
+              </a:solidFill>
               <a:latin typeface="Arial MT"/>
               <a:cs typeface="Arial MT"/>
             </a:endParaRPr>
@@ -14011,7 +13840,10 @@
                 <a:spcPts val="509"/>
               </a:spcBef>
             </a:pPr>
-            <a:endParaRPr sz="1100">
+            <a:endParaRPr sz="1100" dirty="0">
+              <a:solidFill>
+                <a:schemeClr val="tx1"/>
+              </a:solidFill>
               <a:latin typeface="Arial MT"/>
               <a:cs typeface="Arial MT"/>
             </a:endParaRPr>
@@ -14029,7 +13861,7 @@
             <a:r>
               <a:rPr sz="1000" spc="-35" dirty="0">
                 <a:solidFill>
-                  <a:srgbClr val="22373A"/>
+                  <a:schemeClr val="tx1"/>
                 </a:solidFill>
                 <a:latin typeface="Microsoft Sans Serif"/>
                 <a:cs typeface="Microsoft Sans Serif"/>
@@ -14039,7 +13871,7 @@
             <a:r>
               <a:rPr sz="1000" spc="10" dirty="0">
                 <a:solidFill>
-                  <a:srgbClr val="22373A"/>
+                  <a:schemeClr val="tx1"/>
                 </a:solidFill>
                 <a:latin typeface="Microsoft Sans Serif"/>
                 <a:cs typeface="Microsoft Sans Serif"/>
@@ -14049,7 +13881,7 @@
             <a:r>
               <a:rPr sz="1000" dirty="0">
                 <a:solidFill>
-                  <a:srgbClr val="22373A"/>
+                  <a:schemeClr val="tx1"/>
                 </a:solidFill>
                 <a:latin typeface="Microsoft Sans Serif"/>
                 <a:cs typeface="Microsoft Sans Serif"/>
@@ -14059,7 +13891,7 @@
             <a:r>
               <a:rPr sz="1000" spc="10" dirty="0">
                 <a:solidFill>
-                  <a:srgbClr val="22373A"/>
+                  <a:schemeClr val="tx1"/>
                 </a:solidFill>
                 <a:latin typeface="Microsoft Sans Serif"/>
                 <a:cs typeface="Microsoft Sans Serif"/>
@@ -14069,7 +13901,7 @@
             <a:r>
               <a:rPr sz="1000" spc="-40" dirty="0">
                 <a:solidFill>
-                  <a:srgbClr val="22373A"/>
+                  <a:schemeClr val="tx1"/>
                 </a:solidFill>
                 <a:latin typeface="Microsoft Sans Serif"/>
                 <a:cs typeface="Microsoft Sans Serif"/>
@@ -14079,7 +13911,7 @@
             <a:r>
               <a:rPr sz="1000" spc="10" dirty="0">
                 <a:solidFill>
-                  <a:srgbClr val="22373A"/>
+                  <a:schemeClr val="tx1"/>
                 </a:solidFill>
                 <a:latin typeface="Microsoft Sans Serif"/>
                 <a:cs typeface="Microsoft Sans Serif"/>
@@ -14089,7 +13921,7 @@
             <a:r>
               <a:rPr sz="1000" spc="204" dirty="0">
                 <a:solidFill>
-                  <a:srgbClr val="22373A"/>
+                  <a:schemeClr val="tx1"/>
                 </a:solidFill>
                 <a:latin typeface="Microsoft Sans Serif"/>
                 <a:cs typeface="Microsoft Sans Serif"/>
@@ -14099,7 +13931,7 @@
             <a:r>
               <a:rPr sz="1000" spc="15" dirty="0">
                 <a:solidFill>
-                  <a:srgbClr val="22373A"/>
+                  <a:schemeClr val="tx1"/>
                 </a:solidFill>
                 <a:latin typeface="Microsoft Sans Serif"/>
                 <a:cs typeface="Microsoft Sans Serif"/>
@@ -14109,7 +13941,7 @@
             <a:r>
               <a:rPr sz="1000" spc="-35" dirty="0">
                 <a:solidFill>
-                  <a:srgbClr val="22373A"/>
+                  <a:schemeClr val="tx1"/>
                 </a:solidFill>
                 <a:latin typeface="Microsoft Sans Serif"/>
                 <a:cs typeface="Microsoft Sans Serif"/>
@@ -14119,7 +13951,7 @@
             <a:r>
               <a:rPr sz="1000" spc="10" dirty="0">
                 <a:solidFill>
-                  <a:srgbClr val="22373A"/>
+                  <a:schemeClr val="tx1"/>
                 </a:solidFill>
                 <a:latin typeface="Microsoft Sans Serif"/>
                 <a:cs typeface="Microsoft Sans Serif"/>
@@ -14129,7 +13961,7 @@
             <a:r>
               <a:rPr sz="1000" spc="-25" dirty="0">
                 <a:solidFill>
-                  <a:srgbClr val="22373A"/>
+                  <a:schemeClr val="tx1"/>
                 </a:solidFill>
                 <a:latin typeface="Microsoft Sans Serif"/>
                 <a:cs typeface="Microsoft Sans Serif"/>
@@ -14139,7 +13971,7 @@
             <a:r>
               <a:rPr sz="1000" spc="10" dirty="0">
                 <a:solidFill>
-                  <a:srgbClr val="22373A"/>
+                  <a:schemeClr val="tx1"/>
                 </a:solidFill>
                 <a:latin typeface="Microsoft Sans Serif"/>
                 <a:cs typeface="Microsoft Sans Serif"/>
@@ -14149,7 +13981,7 @@
             <a:r>
               <a:rPr sz="1000" spc="-50" dirty="0">
                 <a:solidFill>
-                  <a:srgbClr val="22373A"/>
+                  <a:schemeClr val="tx1"/>
                 </a:solidFill>
                 <a:latin typeface="Microsoft Sans Serif"/>
                 <a:cs typeface="Microsoft Sans Serif"/>
@@ -14159,7 +13991,7 @@
             <a:r>
               <a:rPr sz="1000" spc="-30" dirty="0">
                 <a:solidFill>
-                  <a:srgbClr val="22373A"/>
+                  <a:schemeClr val="tx1"/>
                 </a:solidFill>
                 <a:latin typeface="Microsoft Sans Serif"/>
                 <a:cs typeface="Microsoft Sans Serif"/>
@@ -14169,7 +14001,7 @@
             <a:r>
               <a:rPr sz="1000" spc="10" dirty="0">
                 <a:solidFill>
-                  <a:srgbClr val="22373A"/>
+                  <a:schemeClr val="tx1"/>
                 </a:solidFill>
                 <a:latin typeface="Microsoft Sans Serif"/>
                 <a:cs typeface="Microsoft Sans Serif"/>
@@ -14179,7 +14011,7 @@
             <a:r>
               <a:rPr sz="1000" spc="-10" dirty="0">
                 <a:solidFill>
-                  <a:srgbClr val="22373A"/>
+                  <a:schemeClr val="tx1"/>
                 </a:solidFill>
                 <a:latin typeface="Microsoft Sans Serif"/>
                 <a:cs typeface="Microsoft Sans Serif"/>
@@ -14189,7 +14021,7 @@
             <a:r>
               <a:rPr sz="1000" spc="15" dirty="0">
                 <a:solidFill>
-                  <a:srgbClr val="22373A"/>
+                  <a:schemeClr val="tx1"/>
                 </a:solidFill>
                 <a:latin typeface="Microsoft Sans Serif"/>
                 <a:cs typeface="Microsoft Sans Serif"/>
@@ -14199,7 +14031,7 @@
             <a:r>
               <a:rPr sz="1000" spc="204" dirty="0">
                 <a:solidFill>
-                  <a:srgbClr val="22373A"/>
+                  <a:schemeClr val="tx1"/>
                 </a:solidFill>
                 <a:latin typeface="Microsoft Sans Serif"/>
                 <a:cs typeface="Microsoft Sans Serif"/>
@@ -14209,7 +14041,7 @@
             <a:r>
               <a:rPr sz="1000" spc="10" dirty="0">
                 <a:solidFill>
-                  <a:srgbClr val="22373A"/>
+                  <a:schemeClr val="tx1"/>
                 </a:solidFill>
                 <a:latin typeface="Microsoft Sans Serif"/>
                 <a:cs typeface="Microsoft Sans Serif"/>
@@ -14219,7 +14051,7 @@
             <a:r>
               <a:rPr sz="1000" dirty="0">
                 <a:solidFill>
-                  <a:srgbClr val="22373A"/>
+                  <a:schemeClr val="tx1"/>
                 </a:solidFill>
                 <a:latin typeface="Microsoft Sans Serif"/>
                 <a:cs typeface="Microsoft Sans Serif"/>
@@ -14229,7 +14061,7 @@
             <a:r>
               <a:rPr sz="1000" spc="10" dirty="0">
                 <a:solidFill>
-                  <a:srgbClr val="22373A"/>
+                  <a:schemeClr val="tx1"/>
                 </a:solidFill>
                 <a:latin typeface="Microsoft Sans Serif"/>
                 <a:cs typeface="Microsoft Sans Serif"/>
@@ -14239,7 +14071,7 @@
             <a:r>
               <a:rPr sz="1000" spc="-25" dirty="0">
                 <a:solidFill>
-                  <a:srgbClr val="22373A"/>
+                  <a:schemeClr val="tx1"/>
                 </a:solidFill>
                 <a:latin typeface="Microsoft Sans Serif"/>
                 <a:cs typeface="Microsoft Sans Serif"/>
@@ -14249,7 +14081,7 @@
             <a:r>
               <a:rPr sz="1000" spc="-50" dirty="0">
                 <a:solidFill>
-                  <a:srgbClr val="22373A"/>
+                  <a:schemeClr val="tx1"/>
                 </a:solidFill>
                 <a:latin typeface="Microsoft Sans Serif"/>
                 <a:cs typeface="Microsoft Sans Serif"/>
@@ -14259,7 +14091,7 @@
             <a:r>
               <a:rPr sz="1000" spc="-40" dirty="0">
                 <a:solidFill>
-                  <a:srgbClr val="22373A"/>
+                  <a:schemeClr val="tx1"/>
                 </a:solidFill>
                 <a:latin typeface="Microsoft Sans Serif"/>
                 <a:cs typeface="Microsoft Sans Serif"/>
@@ -14269,7 +14101,7 @@
             <a:r>
               <a:rPr sz="1000" dirty="0">
                 <a:solidFill>
-                  <a:srgbClr val="22373A"/>
+                  <a:schemeClr val="tx1"/>
                 </a:solidFill>
                 <a:latin typeface="Microsoft Sans Serif"/>
                 <a:cs typeface="Microsoft Sans Serif"/>
@@ -14279,14 +14111,17 @@
             <a:r>
               <a:rPr sz="1000" spc="-20" dirty="0">
                 <a:solidFill>
-                  <a:srgbClr val="22373A"/>
+                  <a:schemeClr val="tx1"/>
                 </a:solidFill>
                 <a:latin typeface="Microsoft Sans Serif"/>
                 <a:cs typeface="Microsoft Sans Serif"/>
               </a:rPr>
               <a:t>step</a:t>
             </a:r>
-            <a:endParaRPr sz="1000">
+            <a:endParaRPr sz="1000" dirty="0">
+              <a:solidFill>
+                <a:schemeClr val="tx1"/>
+              </a:solidFill>
               <a:latin typeface="Microsoft Sans Serif"/>
               <a:cs typeface="Microsoft Sans Serif"/>
             </a:endParaRPr>
@@ -14307,7 +14142,7 @@
             <a:r>
               <a:rPr sz="1000" dirty="0">
                 <a:solidFill>
-                  <a:srgbClr val="22373A"/>
+                  <a:schemeClr val="tx1"/>
                 </a:solidFill>
                 <a:latin typeface="Microsoft Sans Serif"/>
                 <a:cs typeface="Microsoft Sans Serif"/>
@@ -14317,7 +14152,7 @@
             <a:r>
               <a:rPr sz="1000" spc="-35" dirty="0">
                 <a:solidFill>
-                  <a:srgbClr val="22373A"/>
+                  <a:schemeClr val="tx1"/>
                 </a:solidFill>
                 <a:latin typeface="Microsoft Sans Serif"/>
                 <a:cs typeface="Microsoft Sans Serif"/>
@@ -14327,7 +14162,7 @@
             <a:r>
               <a:rPr sz="1000" dirty="0">
                 <a:solidFill>
-                  <a:srgbClr val="22373A"/>
+                  <a:schemeClr val="tx1"/>
                 </a:solidFill>
                 <a:latin typeface="Microsoft Sans Serif"/>
                 <a:cs typeface="Microsoft Sans Serif"/>
@@ -14337,7 +14172,7 @@
             <a:r>
               <a:rPr sz="1000" spc="-30" dirty="0">
                 <a:solidFill>
-                  <a:srgbClr val="22373A"/>
+                  <a:schemeClr val="tx1"/>
                 </a:solidFill>
                 <a:latin typeface="Microsoft Sans Serif"/>
                 <a:cs typeface="Microsoft Sans Serif"/>
@@ -14347,7 +14182,7 @@
             <a:r>
               <a:rPr sz="1000" spc="5" dirty="0">
                 <a:solidFill>
-                  <a:srgbClr val="22373A"/>
+                  <a:schemeClr val="tx1"/>
                 </a:solidFill>
                 <a:latin typeface="Microsoft Sans Serif"/>
                 <a:cs typeface="Microsoft Sans Serif"/>
@@ -14357,7 +14192,7 @@
             <a:r>
               <a:rPr sz="1000" dirty="0">
                 <a:solidFill>
-                  <a:srgbClr val="22373A"/>
+                  <a:schemeClr val="tx1"/>
                 </a:solidFill>
                 <a:latin typeface="Microsoft Sans Serif"/>
                 <a:cs typeface="Microsoft Sans Serif"/>
@@ -14367,7 +14202,7 @@
             <a:r>
               <a:rPr sz="1000" spc="5" dirty="0">
                 <a:solidFill>
-                  <a:srgbClr val="22373A"/>
+                  <a:schemeClr val="tx1"/>
                 </a:solidFill>
                 <a:latin typeface="Microsoft Sans Serif"/>
                 <a:cs typeface="Microsoft Sans Serif"/>
@@ -14377,7 +14212,7 @@
             <a:r>
               <a:rPr sz="1000" spc="-30" dirty="0">
                 <a:solidFill>
-                  <a:srgbClr val="22373A"/>
+                  <a:schemeClr val="tx1"/>
                 </a:solidFill>
                 <a:latin typeface="Microsoft Sans Serif"/>
                 <a:cs typeface="Microsoft Sans Serif"/>
@@ -14387,7 +14222,7 @@
             <a:r>
               <a:rPr sz="1000" dirty="0">
                 <a:solidFill>
-                  <a:srgbClr val="22373A"/>
+                  <a:schemeClr val="tx1"/>
                 </a:solidFill>
                 <a:latin typeface="Microsoft Sans Serif"/>
                 <a:cs typeface="Microsoft Sans Serif"/>
@@ -14397,7 +14232,7 @@
             <a:r>
               <a:rPr sz="1000" spc="-25" dirty="0">
                 <a:solidFill>
-                  <a:srgbClr val="22373A"/>
+                  <a:schemeClr val="tx1"/>
                 </a:solidFill>
                 <a:latin typeface="Microsoft Sans Serif"/>
                 <a:cs typeface="Microsoft Sans Serif"/>
@@ -14407,7 +14242,7 @@
             <a:r>
               <a:rPr sz="1000" spc="5" dirty="0">
                 <a:solidFill>
-                  <a:srgbClr val="22373A"/>
+                  <a:schemeClr val="tx1"/>
                 </a:solidFill>
                 <a:latin typeface="Microsoft Sans Serif"/>
                 <a:cs typeface="Microsoft Sans Serif"/>
@@ -14417,7 +14252,7 @@
             <a:r>
               <a:rPr sz="1000" spc="-10" dirty="0">
                 <a:solidFill>
-                  <a:srgbClr val="22373A"/>
+                  <a:schemeClr val="tx1"/>
                 </a:solidFill>
                 <a:latin typeface="Microsoft Sans Serif"/>
                 <a:cs typeface="Microsoft Sans Serif"/>
@@ -14427,7 +14262,7 @@
             <a:r>
               <a:rPr sz="1000" dirty="0">
                 <a:solidFill>
-                  <a:srgbClr val="22373A"/>
+                  <a:schemeClr val="tx1"/>
                 </a:solidFill>
                 <a:latin typeface="Microsoft Sans Serif"/>
                 <a:cs typeface="Microsoft Sans Serif"/>
@@ -14437,7 +14272,7 @@
             <a:r>
               <a:rPr sz="1000" spc="-10" dirty="0">
                 <a:solidFill>
-                  <a:srgbClr val="22373A"/>
+                  <a:schemeClr val="tx1"/>
                 </a:solidFill>
                 <a:latin typeface="Microsoft Sans Serif"/>
                 <a:cs typeface="Microsoft Sans Serif"/>
@@ -14447,7 +14282,7 @@
             <a:r>
               <a:rPr sz="1000" spc="5" dirty="0">
                 <a:solidFill>
-                  <a:srgbClr val="22373A"/>
+                  <a:schemeClr val="tx1"/>
                 </a:solidFill>
                 <a:latin typeface="Microsoft Sans Serif"/>
                 <a:cs typeface="Microsoft Sans Serif"/>
@@ -14457,7 +14292,7 @@
             <a:r>
               <a:rPr sz="1000" spc="-35" dirty="0">
                 <a:solidFill>
-                  <a:srgbClr val="22373A"/>
+                  <a:schemeClr val="tx1"/>
                 </a:solidFill>
                 <a:latin typeface="Microsoft Sans Serif"/>
                 <a:cs typeface="Microsoft Sans Serif"/>
@@ -14467,7 +14302,7 @@
             <a:r>
               <a:rPr sz="1000" dirty="0">
                 <a:solidFill>
-                  <a:srgbClr val="22373A"/>
+                  <a:schemeClr val="tx1"/>
                 </a:solidFill>
                 <a:latin typeface="Microsoft Sans Serif"/>
                 <a:cs typeface="Microsoft Sans Serif"/>
@@ -14477,14 +14312,17 @@
             <a:r>
               <a:rPr sz="1000" spc="-10" dirty="0">
                 <a:solidFill>
-                  <a:srgbClr val="22373A"/>
+                  <a:schemeClr val="tx1"/>
                 </a:solidFill>
                 <a:latin typeface="Microsoft Sans Serif"/>
                 <a:cs typeface="Microsoft Sans Serif"/>
               </a:rPr>
               <a:t>directly</a:t>
             </a:r>
-            <a:endParaRPr sz="1000">
+            <a:endParaRPr sz="1000" dirty="0">
+              <a:solidFill>
+                <a:schemeClr val="tx1"/>
+              </a:solidFill>
               <a:latin typeface="Microsoft Sans Serif"/>
               <a:cs typeface="Microsoft Sans Serif"/>
             </a:endParaRPr>
@@ -14505,7 +14343,7 @@
             <a:r>
               <a:rPr sz="1000" spc="-10" dirty="0">
                 <a:solidFill>
-                  <a:srgbClr val="22373A"/>
+                  <a:schemeClr val="tx1"/>
                 </a:solidFill>
                 <a:latin typeface="Microsoft Sans Serif"/>
                 <a:cs typeface="Microsoft Sans Serif"/>
@@ -14515,7 +14353,7 @@
             <a:r>
               <a:rPr sz="1000" dirty="0">
                 <a:solidFill>
-                  <a:srgbClr val="22373A"/>
+                  <a:schemeClr val="tx1"/>
                 </a:solidFill>
                 <a:latin typeface="Microsoft Sans Serif"/>
                 <a:cs typeface="Microsoft Sans Serif"/>
@@ -14525,7 +14363,7 @@
             <a:r>
               <a:rPr sz="1000" spc="-25" dirty="0">
                 <a:solidFill>
-                  <a:srgbClr val="22373A"/>
+                  <a:schemeClr val="tx1"/>
                 </a:solidFill>
                 <a:latin typeface="Microsoft Sans Serif"/>
                 <a:cs typeface="Microsoft Sans Serif"/>
@@ -14535,7 +14373,7 @@
             <a:r>
               <a:rPr sz="1000" spc="5" dirty="0">
                 <a:solidFill>
-                  <a:srgbClr val="22373A"/>
+                  <a:schemeClr val="tx1"/>
                 </a:solidFill>
                 <a:latin typeface="Microsoft Sans Serif"/>
                 <a:cs typeface="Microsoft Sans Serif"/>
@@ -14545,7 +14383,7 @@
             <a:r>
               <a:rPr sz="1000" spc="-20" dirty="0">
                 <a:solidFill>
-                  <a:srgbClr val="22373A"/>
+                  <a:schemeClr val="tx1"/>
                 </a:solidFill>
                 <a:latin typeface="Microsoft Sans Serif"/>
                 <a:cs typeface="Microsoft Sans Serif"/>
@@ -14555,7 +14393,7 @@
             <a:r>
               <a:rPr sz="1000" spc="5" dirty="0">
                 <a:solidFill>
-                  <a:srgbClr val="22373A"/>
+                  <a:schemeClr val="tx1"/>
                 </a:solidFill>
                 <a:latin typeface="Microsoft Sans Serif"/>
                 <a:cs typeface="Microsoft Sans Serif"/>
@@ -14565,7 +14403,7 @@
             <a:r>
               <a:rPr sz="1000" spc="-20" dirty="0">
                 <a:solidFill>
-                  <a:srgbClr val="22373A"/>
+                  <a:schemeClr val="tx1"/>
                 </a:solidFill>
                 <a:latin typeface="Microsoft Sans Serif"/>
                 <a:cs typeface="Microsoft Sans Serif"/>
@@ -14575,7 +14413,7 @@
             <a:r>
               <a:rPr sz="1000" spc="5" dirty="0">
                 <a:solidFill>
-                  <a:srgbClr val="22373A"/>
+                  <a:schemeClr val="tx1"/>
                 </a:solidFill>
                 <a:latin typeface="Microsoft Sans Serif"/>
                 <a:cs typeface="Microsoft Sans Serif"/>
@@ -14585,7 +14423,7 @@
             <a:r>
               <a:rPr sz="1000" spc="-30" dirty="0">
                 <a:solidFill>
-                  <a:srgbClr val="22373A"/>
+                  <a:schemeClr val="tx1"/>
                 </a:solidFill>
                 <a:latin typeface="Microsoft Sans Serif"/>
                 <a:cs typeface="Microsoft Sans Serif"/>
@@ -14595,7 +14433,7 @@
             <a:r>
               <a:rPr sz="1000" dirty="0">
                 <a:solidFill>
-                  <a:srgbClr val="22373A"/>
+                  <a:schemeClr val="tx1"/>
                 </a:solidFill>
                 <a:latin typeface="Microsoft Sans Serif"/>
                 <a:cs typeface="Microsoft Sans Serif"/>
@@ -14605,7 +14443,7 @@
             <a:r>
               <a:rPr sz="1000" spc="5" dirty="0">
                 <a:solidFill>
-                  <a:srgbClr val="22373A"/>
+                  <a:schemeClr val="tx1"/>
                 </a:solidFill>
                 <a:latin typeface="Microsoft Sans Serif"/>
                 <a:cs typeface="Microsoft Sans Serif"/>
@@ -14615,7 +14453,7 @@
             <a:r>
               <a:rPr sz="1000" spc="-10" dirty="0">
                 <a:solidFill>
-                  <a:srgbClr val="22373A"/>
+                  <a:schemeClr val="tx1"/>
                 </a:solidFill>
                 <a:latin typeface="Microsoft Sans Serif"/>
                 <a:cs typeface="Microsoft Sans Serif"/>
@@ -14625,7 +14463,7 @@
             <a:r>
               <a:rPr sz="1000" spc="5" dirty="0">
                 <a:solidFill>
-                  <a:srgbClr val="22373A"/>
+                  <a:schemeClr val="tx1"/>
                 </a:solidFill>
                 <a:latin typeface="Microsoft Sans Serif"/>
                 <a:cs typeface="Microsoft Sans Serif"/>
@@ -14635,14 +14473,17 @@
             <a:r>
               <a:rPr sz="1000" spc="-10" dirty="0">
                 <a:solidFill>
-                  <a:srgbClr val="22373A"/>
+                  <a:schemeClr val="tx1"/>
                 </a:solidFill>
                 <a:latin typeface="Microsoft Sans Serif"/>
                 <a:cs typeface="Microsoft Sans Serif"/>
               </a:rPr>
               <a:t>quality</a:t>
             </a:r>
-            <a:endParaRPr sz="1000">
+            <a:endParaRPr sz="1000" dirty="0">
+              <a:solidFill>
+                <a:schemeClr val="tx1"/>
+              </a:solidFill>
               <a:latin typeface="Microsoft Sans Serif"/>
               <a:cs typeface="Microsoft Sans Serif"/>
             </a:endParaRPr>
@@ -33199,7 +33040,13 @@
           <p:cNvGraphicFramePr>
             <a:graphicFrameLocks noGrp="1"/>
           </p:cNvGraphicFramePr>
-          <p:nvPr/>
+          <p:nvPr>
+            <p:extLst>
+              <p:ext uri="{D42A27DB-BD31-4B8C-83A1-F6EECF244321}">
+                <p14:modId xmlns:p14="http://schemas.microsoft.com/office/powerpoint/2010/main" val="2043992358"/>
+              </p:ext>
+            </p:extLst>
+          </p:nvPr>
         </p:nvGraphicFramePr>
         <p:xfrm>
           <a:off x="1058379" y="1076172"/>
@@ -33279,7 +33126,7 @@
                       <a:r>
                         <a:rPr sz="1000" spc="-10" dirty="0">
                           <a:solidFill>
-                            <a:srgbClr val="22373A"/>
+                            <a:schemeClr val="tx1"/>
                           </a:solidFill>
                           <a:latin typeface="Microsoft Sans Serif"/>
                           <a:cs typeface="Microsoft Sans Serif"/>
@@ -33287,6 +33134,9 @@
                         <a:t>Model</a:t>
                       </a:r>
                       <a:endParaRPr sz="1000">
+                        <a:solidFill>
+                          <a:schemeClr val="tx1"/>
+                        </a:solidFill>
                         <a:latin typeface="Microsoft Sans Serif"/>
                         <a:cs typeface="Microsoft Sans Serif"/>
                       </a:endParaRPr>
@@ -33317,7 +33167,7 @@
                       <a:r>
                         <a:rPr sz="1000" spc="-50" dirty="0">
                           <a:solidFill>
-                            <a:srgbClr val="22373A"/>
+                            <a:schemeClr val="tx1"/>
                           </a:solidFill>
                           <a:latin typeface="Microsoft Sans Serif"/>
                           <a:cs typeface="Microsoft Sans Serif"/>
@@ -33325,6 +33175,9 @@
                         <a:t>Grounded</a:t>
                       </a:r>
                       <a:endParaRPr sz="1000">
+                        <a:solidFill>
+                          <a:schemeClr val="tx1"/>
+                        </a:solidFill>
                         <a:latin typeface="Microsoft Sans Serif"/>
                         <a:cs typeface="Microsoft Sans Serif"/>
                       </a:endParaRPr>
@@ -33361,7 +33214,7 @@
                       <a:r>
                         <a:rPr sz="1000" spc="-50" dirty="0">
                           <a:solidFill>
-                            <a:srgbClr val="22373A"/>
+                            <a:schemeClr val="tx1"/>
                           </a:solidFill>
                           <a:latin typeface="Microsoft Sans Serif"/>
                           <a:cs typeface="Microsoft Sans Serif"/>
@@ -33369,6 +33222,9 @@
                         <a:t>Baseline</a:t>
                       </a:r>
                       <a:endParaRPr sz="1000">
+                        <a:solidFill>
+                          <a:schemeClr val="tx1"/>
+                        </a:solidFill>
                         <a:latin typeface="Microsoft Sans Serif"/>
                         <a:cs typeface="Microsoft Sans Serif"/>
                       </a:endParaRPr>
@@ -33400,6 +33256,9 @@
                         </a:lnSpc>
                       </a:pPr>
                       <a:endParaRPr sz="1000">
+                        <a:solidFill>
+                          <a:schemeClr val="tx1"/>
+                        </a:solidFill>
                         <a:latin typeface="Times New Roman"/>
                         <a:cs typeface="Times New Roman"/>
                       </a:endParaRPr>
@@ -33430,7 +33289,7 @@
                       <a:r>
                         <a:rPr sz="1000" spc="-50" dirty="0">
                           <a:solidFill>
-                            <a:srgbClr val="22373A"/>
+                            <a:schemeClr val="tx1"/>
                           </a:solidFill>
                           <a:latin typeface="Microsoft Sans Serif"/>
                           <a:cs typeface="Microsoft Sans Serif"/>
@@ -33438,6 +33297,9 @@
                         <a:t>Grounded</a:t>
                       </a:r>
                       <a:endParaRPr sz="1000">
+                        <a:solidFill>
+                          <a:schemeClr val="tx1"/>
+                        </a:solidFill>
                         <a:latin typeface="Microsoft Sans Serif"/>
                         <a:cs typeface="Microsoft Sans Serif"/>
                       </a:endParaRPr>
@@ -33474,7 +33336,7 @@
                       <a:r>
                         <a:rPr sz="1000" spc="-50" dirty="0">
                           <a:solidFill>
-                            <a:srgbClr val="22373A"/>
+                            <a:schemeClr val="tx1"/>
                           </a:solidFill>
                           <a:latin typeface="Microsoft Sans Serif"/>
                           <a:cs typeface="Microsoft Sans Serif"/>
@@ -33482,6 +33344,9 @@
                         <a:t>Baseline</a:t>
                       </a:r>
                       <a:endParaRPr sz="1000">
+                        <a:solidFill>
+                          <a:schemeClr val="tx1"/>
+                        </a:solidFill>
                         <a:latin typeface="Microsoft Sans Serif"/>
                         <a:cs typeface="Microsoft Sans Serif"/>
                       </a:endParaRPr>
@@ -33513,6 +33378,9 @@
                         </a:lnSpc>
                       </a:pPr>
                       <a:endParaRPr sz="1000">
+                        <a:solidFill>
+                          <a:schemeClr val="tx1"/>
+                        </a:solidFill>
                         <a:latin typeface="Times New Roman"/>
                         <a:cs typeface="Times New Roman"/>
                       </a:endParaRPr>
@@ -33550,7 +33418,7 @@
                       <a:r>
                         <a:rPr sz="1000" spc="-35" dirty="0">
                           <a:solidFill>
-                            <a:srgbClr val="22373A"/>
+                            <a:schemeClr val="tx1"/>
                           </a:solidFill>
                           <a:latin typeface="Microsoft Sans Serif"/>
                           <a:cs typeface="Microsoft Sans Serif"/>
@@ -33560,7 +33428,7 @@
                       <a:r>
                         <a:rPr sz="1000" spc="-25" dirty="0">
                           <a:solidFill>
-                            <a:srgbClr val="22373A"/>
+                            <a:schemeClr val="tx1"/>
                           </a:solidFill>
                           <a:latin typeface="Microsoft Sans Serif"/>
                           <a:cs typeface="Microsoft Sans Serif"/>
@@ -33568,6 +33436,9 @@
                         <a:t>12B</a:t>
                       </a:r>
                       <a:endParaRPr sz="1000">
+                        <a:solidFill>
+                          <a:schemeClr val="tx1"/>
+                        </a:solidFill>
                         <a:latin typeface="Microsoft Sans Serif"/>
                         <a:cs typeface="Microsoft Sans Serif"/>
                       </a:endParaRPr>
@@ -33598,7 +33469,7 @@
                       <a:r>
                         <a:rPr sz="1000" spc="-10" dirty="0">
                           <a:solidFill>
-                            <a:srgbClr val="2D7DB8"/>
+                            <a:schemeClr val="tx1"/>
                           </a:solidFill>
                           <a:latin typeface="Microsoft Sans Serif"/>
                           <a:cs typeface="Microsoft Sans Serif"/>
@@ -33606,6 +33477,9 @@
                         <a:t>0.833</a:t>
                       </a:r>
                       <a:endParaRPr sz="1000">
+                        <a:solidFill>
+                          <a:schemeClr val="tx1"/>
+                        </a:solidFill>
                         <a:latin typeface="Microsoft Sans Serif"/>
                         <a:cs typeface="Microsoft Sans Serif"/>
                       </a:endParaRPr>
@@ -33636,7 +33510,7 @@
                       <a:r>
                         <a:rPr sz="1000" spc="-10" dirty="0">
                           <a:solidFill>
-                            <a:srgbClr val="22373A"/>
+                            <a:schemeClr val="tx1"/>
                           </a:solidFill>
                           <a:latin typeface="Microsoft Sans Serif"/>
                           <a:cs typeface="Microsoft Sans Serif"/>
@@ -33644,6 +33518,9 @@
                         <a:t>0.556</a:t>
                       </a:r>
                       <a:endParaRPr sz="1000">
+                        <a:solidFill>
+                          <a:schemeClr val="tx1"/>
+                        </a:solidFill>
                         <a:latin typeface="Microsoft Sans Serif"/>
                         <a:cs typeface="Microsoft Sans Serif"/>
                       </a:endParaRPr>
@@ -33669,6 +33546,9 @@
                         </a:lnSpc>
                       </a:pPr>
                       <a:endParaRPr sz="1000">
+                        <a:solidFill>
+                          <a:schemeClr val="tx1"/>
+                        </a:solidFill>
                         <a:latin typeface="Times New Roman"/>
                         <a:cs typeface="Times New Roman"/>
                       </a:endParaRPr>
@@ -33699,7 +33579,7 @@
                       <a:r>
                         <a:rPr sz="1000" spc="-10" dirty="0">
                           <a:solidFill>
-                            <a:srgbClr val="2D7DB8"/>
+                            <a:schemeClr val="tx1"/>
                           </a:solidFill>
                           <a:latin typeface="Microsoft Sans Serif"/>
                           <a:cs typeface="Microsoft Sans Serif"/>
@@ -33707,6 +33587,9 @@
                         <a:t>0.400</a:t>
                       </a:r>
                       <a:endParaRPr sz="1000">
+                        <a:solidFill>
+                          <a:schemeClr val="tx1"/>
+                        </a:solidFill>
                         <a:latin typeface="Microsoft Sans Serif"/>
                         <a:cs typeface="Microsoft Sans Serif"/>
                       </a:endParaRPr>
@@ -33737,7 +33620,7 @@
                       <a:r>
                         <a:rPr sz="1000" spc="-10" dirty="0">
                           <a:solidFill>
-                            <a:srgbClr val="22373A"/>
+                            <a:schemeClr val="tx1"/>
                           </a:solidFill>
                           <a:latin typeface="Microsoft Sans Serif"/>
                           <a:cs typeface="Microsoft Sans Serif"/>
@@ -33745,6 +33628,9 @@
                         <a:t>0.200</a:t>
                       </a:r>
                       <a:endParaRPr sz="1000">
+                        <a:solidFill>
+                          <a:schemeClr val="tx1"/>
+                        </a:solidFill>
                         <a:latin typeface="Microsoft Sans Serif"/>
                         <a:cs typeface="Microsoft Sans Serif"/>
                       </a:endParaRPr>
@@ -33770,6 +33656,9 @@
                         </a:lnSpc>
                       </a:pPr>
                       <a:endParaRPr sz="1000">
+                        <a:solidFill>
+                          <a:schemeClr val="tx1"/>
+                        </a:solidFill>
                         <a:latin typeface="Times New Roman"/>
                         <a:cs typeface="Times New Roman"/>
                       </a:endParaRPr>
@@ -33804,7 +33693,7 @@
                       <a:r>
                         <a:rPr sz="1000" spc="-60" dirty="0">
                           <a:solidFill>
-                            <a:srgbClr val="22373A"/>
+                            <a:schemeClr val="tx1"/>
                           </a:solidFill>
                           <a:latin typeface="Microsoft Sans Serif"/>
                           <a:cs typeface="Microsoft Sans Serif"/>
@@ -33814,7 +33703,7 @@
                       <a:r>
                         <a:rPr sz="1000" spc="-50" dirty="0">
                           <a:solidFill>
-                            <a:srgbClr val="22373A"/>
+                            <a:schemeClr val="tx1"/>
                           </a:solidFill>
                           <a:latin typeface="Microsoft Sans Serif"/>
                           <a:cs typeface="Microsoft Sans Serif"/>
@@ -33824,7 +33713,7 @@
                       <a:r>
                         <a:rPr sz="1000" spc="-25" dirty="0">
                           <a:solidFill>
-                            <a:srgbClr val="22373A"/>
+                            <a:schemeClr val="tx1"/>
                           </a:solidFill>
                           <a:latin typeface="Microsoft Sans Serif"/>
                           <a:cs typeface="Microsoft Sans Serif"/>
@@ -33832,6 +33721,9 @@
                         <a:t>7B</a:t>
                       </a:r>
                       <a:endParaRPr sz="1000">
+                        <a:solidFill>
+                          <a:schemeClr val="tx1"/>
+                        </a:solidFill>
                         <a:latin typeface="Microsoft Sans Serif"/>
                         <a:cs typeface="Microsoft Sans Serif"/>
                       </a:endParaRPr>
@@ -33852,14 +33744,17 @@
                       <a:r>
                         <a:rPr sz="1000" spc="-10" dirty="0">
                           <a:solidFill>
-                            <a:srgbClr val="22373A"/>
+                            <a:schemeClr val="tx1"/>
                           </a:solidFill>
                           <a:latin typeface="Microsoft Sans Serif"/>
                           <a:cs typeface="Microsoft Sans Serif"/>
                         </a:rPr>
                         <a:t>0.111</a:t>
                       </a:r>
-                      <a:endParaRPr sz="1000">
+                      <a:endParaRPr sz="1000" dirty="0">
+                        <a:solidFill>
+                          <a:schemeClr val="tx1"/>
+                        </a:solidFill>
                         <a:latin typeface="Microsoft Sans Serif"/>
                         <a:cs typeface="Microsoft Sans Serif"/>
                       </a:endParaRPr>
@@ -33880,7 +33775,7 @@
                       <a:r>
                         <a:rPr sz="1000" spc="-10" dirty="0">
                           <a:solidFill>
-                            <a:srgbClr val="22373A"/>
+                            <a:schemeClr val="tx1"/>
                           </a:solidFill>
                           <a:latin typeface="Microsoft Sans Serif"/>
                           <a:cs typeface="Microsoft Sans Serif"/>
@@ -33888,6 +33783,9 @@
                         <a:t>0.000</a:t>
                       </a:r>
                       <a:endParaRPr sz="1000">
+                        <a:solidFill>
+                          <a:schemeClr val="tx1"/>
+                        </a:solidFill>
                         <a:latin typeface="Microsoft Sans Serif"/>
                         <a:cs typeface="Microsoft Sans Serif"/>
                       </a:endParaRPr>
@@ -33906,6 +33804,9 @@
                         </a:lnSpc>
                       </a:pPr>
                       <a:endParaRPr sz="1000">
+                        <a:solidFill>
+                          <a:schemeClr val="tx1"/>
+                        </a:solidFill>
                         <a:latin typeface="Times New Roman"/>
                         <a:cs typeface="Times New Roman"/>
                       </a:endParaRPr>
@@ -33926,7 +33827,7 @@
                       <a:r>
                         <a:rPr sz="1000" spc="-10" dirty="0">
                           <a:solidFill>
-                            <a:srgbClr val="22373A"/>
+                            <a:schemeClr val="tx1"/>
                           </a:solidFill>
                           <a:latin typeface="Microsoft Sans Serif"/>
                           <a:cs typeface="Microsoft Sans Serif"/>
@@ -33934,6 +33835,9 @@
                         <a:t>0.200</a:t>
                       </a:r>
                       <a:endParaRPr sz="1000">
+                        <a:solidFill>
+                          <a:schemeClr val="tx1"/>
+                        </a:solidFill>
                         <a:latin typeface="Microsoft Sans Serif"/>
                         <a:cs typeface="Microsoft Sans Serif"/>
                       </a:endParaRPr>
@@ -33954,7 +33858,7 @@
                       <a:r>
                         <a:rPr sz="1000" spc="-10" dirty="0">
                           <a:solidFill>
-                            <a:srgbClr val="22373A"/>
+                            <a:schemeClr val="tx1"/>
                           </a:solidFill>
                           <a:latin typeface="Microsoft Sans Serif"/>
                           <a:cs typeface="Microsoft Sans Serif"/>
@@ -33962,6 +33866,9 @@
                         <a:t>0.000</a:t>
                       </a:r>
                       <a:endParaRPr sz="1000">
+                        <a:solidFill>
+                          <a:schemeClr val="tx1"/>
+                        </a:solidFill>
                         <a:latin typeface="Microsoft Sans Serif"/>
                         <a:cs typeface="Microsoft Sans Serif"/>
                       </a:endParaRPr>
@@ -33980,6 +33887,9 @@
                         </a:lnSpc>
                       </a:pPr>
                       <a:endParaRPr sz="1000">
+                        <a:solidFill>
+                          <a:schemeClr val="tx1"/>
+                        </a:solidFill>
                         <a:latin typeface="Times New Roman"/>
                         <a:cs typeface="Times New Roman"/>
                       </a:endParaRPr>
@@ -34007,7 +33917,7 @@
                       <a:r>
                         <a:rPr sz="1000" spc="-55" dirty="0">
                           <a:solidFill>
-                            <a:srgbClr val="22373A"/>
+                            <a:schemeClr val="tx1"/>
                           </a:solidFill>
                           <a:latin typeface="Microsoft Sans Serif"/>
                           <a:cs typeface="Microsoft Sans Serif"/>
@@ -34017,7 +33927,7 @@
                       <a:r>
                         <a:rPr sz="1000" spc="-25" dirty="0">
                           <a:solidFill>
-                            <a:srgbClr val="22373A"/>
+                            <a:schemeClr val="tx1"/>
                           </a:solidFill>
                           <a:latin typeface="Microsoft Sans Serif"/>
                           <a:cs typeface="Microsoft Sans Serif"/>
@@ -34025,6 +33935,9 @@
                         <a:t>3B</a:t>
                       </a:r>
                       <a:endParaRPr sz="1000">
+                        <a:solidFill>
+                          <a:schemeClr val="tx1"/>
+                        </a:solidFill>
                         <a:latin typeface="Microsoft Sans Serif"/>
                         <a:cs typeface="Microsoft Sans Serif"/>
                       </a:endParaRPr>
@@ -34052,7 +33965,7 @@
                       <a:r>
                         <a:rPr sz="1000" spc="-10" dirty="0">
                           <a:solidFill>
-                            <a:srgbClr val="22373A"/>
+                            <a:schemeClr val="tx1"/>
                           </a:solidFill>
                           <a:latin typeface="Microsoft Sans Serif"/>
                           <a:cs typeface="Microsoft Sans Serif"/>
@@ -34060,6 +33973,9 @@
                         <a:t>0.278</a:t>
                       </a:r>
                       <a:endParaRPr sz="1000">
+                        <a:solidFill>
+                          <a:schemeClr val="tx1"/>
+                        </a:solidFill>
                         <a:latin typeface="Microsoft Sans Serif"/>
                         <a:cs typeface="Microsoft Sans Serif"/>
                       </a:endParaRPr>
@@ -34087,7 +34003,7 @@
                       <a:r>
                         <a:rPr sz="1000" spc="-10" dirty="0">
                           <a:solidFill>
-                            <a:srgbClr val="22373A"/>
+                            <a:schemeClr val="tx1"/>
                           </a:solidFill>
                           <a:latin typeface="Microsoft Sans Serif"/>
                           <a:cs typeface="Microsoft Sans Serif"/>
@@ -34095,6 +34011,9 @@
                         <a:t>0.000</a:t>
                       </a:r>
                       <a:endParaRPr sz="1000">
+                        <a:solidFill>
+                          <a:schemeClr val="tx1"/>
+                        </a:solidFill>
                         <a:latin typeface="Microsoft Sans Serif"/>
                         <a:cs typeface="Microsoft Sans Serif"/>
                       </a:endParaRPr>
@@ -34120,6 +34039,9 @@
                         </a:lnSpc>
                       </a:pPr>
                       <a:endParaRPr sz="1000">
+                        <a:solidFill>
+                          <a:schemeClr val="tx1"/>
+                        </a:solidFill>
                         <a:latin typeface="Times New Roman"/>
                         <a:cs typeface="Times New Roman"/>
                       </a:endParaRPr>
@@ -34147,7 +34069,7 @@
                       <a:r>
                         <a:rPr sz="1000" spc="-10" dirty="0">
                           <a:solidFill>
-                            <a:srgbClr val="22373A"/>
+                            <a:schemeClr val="tx1"/>
                           </a:solidFill>
                           <a:latin typeface="Microsoft Sans Serif"/>
                           <a:cs typeface="Microsoft Sans Serif"/>
@@ -34155,6 +34077,9 @@
                         <a:t>0.114</a:t>
                       </a:r>
                       <a:endParaRPr sz="1000">
+                        <a:solidFill>
+                          <a:schemeClr val="tx1"/>
+                        </a:solidFill>
                         <a:latin typeface="Microsoft Sans Serif"/>
                         <a:cs typeface="Microsoft Sans Serif"/>
                       </a:endParaRPr>
@@ -34182,7 +34107,7 @@
                       <a:r>
                         <a:rPr sz="1000" spc="-10" dirty="0">
                           <a:solidFill>
-                            <a:srgbClr val="22373A"/>
+                            <a:schemeClr val="tx1"/>
                           </a:solidFill>
                           <a:latin typeface="Microsoft Sans Serif"/>
                           <a:cs typeface="Microsoft Sans Serif"/>
@@ -34190,6 +34115,9 @@
                         <a:t>0.000</a:t>
                       </a:r>
                       <a:endParaRPr sz="1000">
+                        <a:solidFill>
+                          <a:schemeClr val="tx1"/>
+                        </a:solidFill>
                         <a:latin typeface="Microsoft Sans Serif"/>
                         <a:cs typeface="Microsoft Sans Serif"/>
                       </a:endParaRPr>
@@ -34214,7 +34142,10 @@
                           <a:spcPct val="100000"/>
                         </a:lnSpc>
                       </a:pPr>
-                      <a:endParaRPr sz="1000">
+                      <a:endParaRPr sz="1000" dirty="0">
+                        <a:solidFill>
+                          <a:schemeClr val="tx1"/>
+                        </a:solidFill>
                         <a:latin typeface="Times New Roman"/>
                         <a:cs typeface="Times New Roman"/>
                       </a:endParaRPr>
@@ -34794,6 +34725,10 @@
           </p:nvPr>
         </p:nvSpPr>
         <p:spPr>
+          <a:xfrm>
+            <a:off x="122770" y="119380"/>
+            <a:ext cx="2785745" cy="207645"/>
+          </a:xfrm>
           <a:prstGeom prst="rect">
             <a:avLst/>
           </a:prstGeom>
@@ -35014,7 +34949,13 @@
           <p:cNvGraphicFramePr>
             <a:graphicFrameLocks noGrp="1"/>
           </p:cNvGraphicFramePr>
-          <p:nvPr/>
+          <p:nvPr>
+            <p:extLst>
+              <p:ext uri="{D42A27DB-BD31-4B8C-83A1-F6EECF244321}">
+                <p14:modId xmlns:p14="http://schemas.microsoft.com/office/powerpoint/2010/main" val="1568185132"/>
+              </p:ext>
+            </p:extLst>
+          </p:nvPr>
         </p:nvGraphicFramePr>
         <p:xfrm>
           <a:off x="1088618" y="676109"/>
@@ -35073,7 +35014,7 @@
                       <a:r>
                         <a:rPr sz="1000" spc="-10" dirty="0">
                           <a:solidFill>
-                            <a:srgbClr val="22373A"/>
+                            <a:schemeClr val="tx1"/>
                           </a:solidFill>
                           <a:latin typeface="Microsoft Sans Serif"/>
                           <a:cs typeface="Microsoft Sans Serif"/>
@@ -35081,6 +35022,9 @@
                         <a:t>Model</a:t>
                       </a:r>
                       <a:endParaRPr sz="1000">
+                        <a:solidFill>
+                          <a:schemeClr val="tx1"/>
+                        </a:solidFill>
                         <a:latin typeface="Microsoft Sans Serif"/>
                         <a:cs typeface="Microsoft Sans Serif"/>
                       </a:endParaRPr>
@@ -35117,7 +35061,7 @@
                       <a:r>
                         <a:rPr sz="1000" spc="-10" dirty="0">
                           <a:solidFill>
-                            <a:srgbClr val="22373A"/>
+                            <a:schemeClr val="tx1"/>
                           </a:solidFill>
                           <a:latin typeface="Microsoft Sans Serif"/>
                           <a:cs typeface="Microsoft Sans Serif"/>
@@ -35125,6 +35069,9 @@
                         <a:t>Reachable</a:t>
                       </a:r>
                       <a:endParaRPr sz="1000">
+                        <a:solidFill>
+                          <a:schemeClr val="tx1"/>
+                        </a:solidFill>
                         <a:latin typeface="Microsoft Sans Serif"/>
                         <a:cs typeface="Microsoft Sans Serif"/>
                       </a:endParaRPr>
@@ -35161,7 +35108,7 @@
                       <a:r>
                         <a:rPr sz="1000" spc="-45" dirty="0">
                           <a:solidFill>
-                            <a:srgbClr val="22373A"/>
+                            <a:schemeClr val="tx1"/>
                           </a:solidFill>
                           <a:latin typeface="Microsoft Sans Serif"/>
                           <a:cs typeface="Microsoft Sans Serif"/>
@@ -35171,7 +35118,7 @@
                       <a:r>
                         <a:rPr sz="1000" spc="-15" dirty="0">
                           <a:solidFill>
-                            <a:srgbClr val="22373A"/>
+                            <a:schemeClr val="tx1"/>
                           </a:solidFill>
                           <a:latin typeface="Microsoft Sans Serif"/>
                           <a:cs typeface="Microsoft Sans Serif"/>
@@ -35181,7 +35128,7 @@
                       <a:r>
                         <a:rPr sz="1000" spc="-10" dirty="0">
                           <a:solidFill>
-                            <a:srgbClr val="22373A"/>
+                            <a:schemeClr val="tx1"/>
                           </a:solidFill>
                           <a:latin typeface="Microsoft Sans Serif"/>
                           <a:cs typeface="Microsoft Sans Serif"/>
@@ -35189,6 +35136,9 @@
                         <a:t>correct</a:t>
                       </a:r>
                       <a:endParaRPr sz="1000">
+                        <a:solidFill>
+                          <a:schemeClr val="tx1"/>
+                        </a:solidFill>
                         <a:latin typeface="Microsoft Sans Serif"/>
                         <a:cs typeface="Microsoft Sans Serif"/>
                       </a:endParaRPr>
@@ -35225,7 +35175,7 @@
                       <a:r>
                         <a:rPr sz="1000" spc="-20" dirty="0">
                           <a:solidFill>
-                            <a:srgbClr val="22373A"/>
+                            <a:schemeClr val="tx1"/>
                           </a:solidFill>
                           <a:latin typeface="Microsoft Sans Serif"/>
                           <a:cs typeface="Microsoft Sans Serif"/>
@@ -35235,7 +35185,7 @@
                       <a:r>
                         <a:rPr sz="1000" spc="-10" dirty="0">
                           <a:solidFill>
-                            <a:srgbClr val="22373A"/>
+                            <a:schemeClr val="tx1"/>
                           </a:solidFill>
                           <a:latin typeface="Microsoft Sans Serif"/>
                           <a:cs typeface="Microsoft Sans Serif"/>
@@ -35245,7 +35195,7 @@
                       <a:r>
                         <a:rPr sz="1000" spc="-20" dirty="0">
                           <a:solidFill>
-                            <a:srgbClr val="22373A"/>
+                            <a:schemeClr val="tx1"/>
                           </a:solidFill>
                           <a:latin typeface="Microsoft Sans Serif"/>
                           <a:cs typeface="Microsoft Sans Serif"/>
@@ -35253,6 +35203,9 @@
                         <a:t>match</a:t>
                       </a:r>
                       <a:endParaRPr sz="1000">
+                        <a:solidFill>
+                          <a:schemeClr val="tx1"/>
+                        </a:solidFill>
                         <a:latin typeface="Microsoft Sans Serif"/>
                         <a:cs typeface="Microsoft Sans Serif"/>
                       </a:endParaRPr>
@@ -35296,7 +35249,7 @@
                       <a:r>
                         <a:rPr sz="1000" spc="-35" dirty="0">
                           <a:solidFill>
-                            <a:srgbClr val="22373A"/>
+                            <a:schemeClr val="tx1"/>
                           </a:solidFill>
                           <a:latin typeface="Microsoft Sans Serif"/>
                           <a:cs typeface="Microsoft Sans Serif"/>
@@ -35306,14 +35259,17 @@
                       <a:r>
                         <a:rPr sz="1000" spc="-25" dirty="0">
                           <a:solidFill>
-                            <a:srgbClr val="22373A"/>
+                            <a:schemeClr val="tx1"/>
                           </a:solidFill>
                           <a:latin typeface="Microsoft Sans Serif"/>
                           <a:cs typeface="Microsoft Sans Serif"/>
                         </a:rPr>
                         <a:t>12B</a:t>
                       </a:r>
-                      <a:endParaRPr sz="1000">
+                      <a:endParaRPr sz="1000" dirty="0">
+                        <a:solidFill>
+                          <a:schemeClr val="tx1"/>
+                        </a:solidFill>
                         <a:latin typeface="Microsoft Sans Serif"/>
                         <a:cs typeface="Microsoft Sans Serif"/>
                       </a:endParaRPr>
@@ -35344,7 +35300,7 @@
                       <a:r>
                         <a:rPr sz="1000" spc="-10" dirty="0">
                           <a:solidFill>
-                            <a:srgbClr val="22373A"/>
+                            <a:schemeClr val="tx1"/>
                           </a:solidFill>
                           <a:latin typeface="Microsoft Sans Serif"/>
                           <a:cs typeface="Microsoft Sans Serif"/>
@@ -35352,6 +35308,9 @@
                         <a:t>15/18</a:t>
                       </a:r>
                       <a:endParaRPr sz="1000">
+                        <a:solidFill>
+                          <a:schemeClr val="tx1"/>
+                        </a:solidFill>
                         <a:latin typeface="Microsoft Sans Serif"/>
                         <a:cs typeface="Microsoft Sans Serif"/>
                       </a:endParaRPr>
@@ -35382,7 +35341,7 @@
                       <a:r>
                         <a:rPr sz="1000" spc="-10" dirty="0">
                           <a:solidFill>
-                            <a:srgbClr val="2D7DB8"/>
+                            <a:schemeClr val="tx1"/>
                           </a:solidFill>
                           <a:latin typeface="Microsoft Sans Serif"/>
                           <a:cs typeface="Microsoft Sans Serif"/>
@@ -35390,6 +35349,9 @@
                         <a:t>15/15</a:t>
                       </a:r>
                       <a:endParaRPr sz="1000">
+                        <a:solidFill>
+                          <a:schemeClr val="tx1"/>
+                        </a:solidFill>
                         <a:latin typeface="Microsoft Sans Serif"/>
                         <a:cs typeface="Microsoft Sans Serif"/>
                       </a:endParaRPr>
@@ -35420,7 +35382,7 @@
                       <a:r>
                         <a:rPr sz="1000" spc="-10" dirty="0">
                           <a:solidFill>
-                            <a:srgbClr val="22373A"/>
+                            <a:schemeClr val="tx1"/>
                           </a:solidFill>
                           <a:latin typeface="Microsoft Sans Serif"/>
                           <a:cs typeface="Microsoft Sans Serif"/>
@@ -35428,6 +35390,9 @@
                         <a:t>0.833</a:t>
                       </a:r>
                       <a:endParaRPr sz="1000">
+                        <a:solidFill>
+                          <a:schemeClr val="tx1"/>
+                        </a:solidFill>
                         <a:latin typeface="Microsoft Sans Serif"/>
                         <a:cs typeface="Microsoft Sans Serif"/>
                       </a:endParaRPr>
@@ -35462,7 +35427,7 @@
                       <a:r>
                         <a:rPr sz="1000" spc="-60" dirty="0">
                           <a:solidFill>
-                            <a:srgbClr val="22373A"/>
+                            <a:schemeClr val="tx1"/>
                           </a:solidFill>
                           <a:latin typeface="Microsoft Sans Serif"/>
                           <a:cs typeface="Microsoft Sans Serif"/>
@@ -35472,7 +35437,7 @@
                       <a:r>
                         <a:rPr sz="1000" spc="-50" dirty="0">
                           <a:solidFill>
-                            <a:srgbClr val="22373A"/>
+                            <a:schemeClr val="tx1"/>
                           </a:solidFill>
                           <a:latin typeface="Microsoft Sans Serif"/>
                           <a:cs typeface="Microsoft Sans Serif"/>
@@ -35482,7 +35447,7 @@
                       <a:r>
                         <a:rPr sz="1000" spc="-25" dirty="0">
                           <a:solidFill>
-                            <a:srgbClr val="22373A"/>
+                            <a:schemeClr val="tx1"/>
                           </a:solidFill>
                           <a:latin typeface="Microsoft Sans Serif"/>
                           <a:cs typeface="Microsoft Sans Serif"/>
@@ -35490,6 +35455,9 @@
                         <a:t>7B</a:t>
                       </a:r>
                       <a:endParaRPr sz="1000">
+                        <a:solidFill>
+                          <a:schemeClr val="tx1"/>
+                        </a:solidFill>
                         <a:latin typeface="Microsoft Sans Serif"/>
                         <a:cs typeface="Microsoft Sans Serif"/>
                       </a:endParaRPr>
@@ -35510,7 +35478,7 @@
                       <a:r>
                         <a:rPr sz="1000" spc="-20" dirty="0">
                           <a:solidFill>
-                            <a:srgbClr val="22373A"/>
+                            <a:schemeClr val="tx1"/>
                           </a:solidFill>
                           <a:latin typeface="Microsoft Sans Serif"/>
                           <a:cs typeface="Microsoft Sans Serif"/>
@@ -35518,6 +35486,9 @@
                         <a:t>2/18</a:t>
                       </a:r>
                       <a:endParaRPr sz="1000">
+                        <a:solidFill>
+                          <a:schemeClr val="tx1"/>
+                        </a:solidFill>
                         <a:latin typeface="Microsoft Sans Serif"/>
                         <a:cs typeface="Microsoft Sans Serif"/>
                       </a:endParaRPr>
@@ -35538,14 +35509,17 @@
                       <a:r>
                         <a:rPr sz="1000" spc="-25" dirty="0">
                           <a:solidFill>
-                            <a:srgbClr val="2D7DB8"/>
+                            <a:schemeClr val="tx1"/>
                           </a:solidFill>
                           <a:latin typeface="Microsoft Sans Serif"/>
                           <a:cs typeface="Microsoft Sans Serif"/>
                         </a:rPr>
                         <a:t>2/2</a:t>
                       </a:r>
-                      <a:endParaRPr sz="1000">
+                      <a:endParaRPr sz="1000" dirty="0">
+                        <a:solidFill>
+                          <a:schemeClr val="tx1"/>
+                        </a:solidFill>
                         <a:latin typeface="Microsoft Sans Serif"/>
                         <a:cs typeface="Microsoft Sans Serif"/>
                       </a:endParaRPr>
@@ -35566,7 +35540,7 @@
                       <a:r>
                         <a:rPr sz="1000" spc="-10" dirty="0">
                           <a:solidFill>
-                            <a:srgbClr val="22373A"/>
+                            <a:schemeClr val="tx1"/>
                           </a:solidFill>
                           <a:latin typeface="Microsoft Sans Serif"/>
                           <a:cs typeface="Microsoft Sans Serif"/>
@@ -35574,6 +35548,9 @@
                         <a:t>0.111</a:t>
                       </a:r>
                       <a:endParaRPr sz="1000">
+                        <a:solidFill>
+                          <a:schemeClr val="tx1"/>
+                        </a:solidFill>
                         <a:latin typeface="Microsoft Sans Serif"/>
                         <a:cs typeface="Microsoft Sans Serif"/>
                       </a:endParaRPr>
@@ -35601,7 +35578,7 @@
                       <a:r>
                         <a:rPr sz="1000" spc="-55" dirty="0">
                           <a:solidFill>
-                            <a:srgbClr val="22373A"/>
+                            <a:schemeClr val="tx1"/>
                           </a:solidFill>
                           <a:latin typeface="Microsoft Sans Serif"/>
                           <a:cs typeface="Microsoft Sans Serif"/>
@@ -35611,7 +35588,7 @@
                       <a:r>
                         <a:rPr sz="1000" spc="-25" dirty="0">
                           <a:solidFill>
-                            <a:srgbClr val="22373A"/>
+                            <a:schemeClr val="tx1"/>
                           </a:solidFill>
                           <a:latin typeface="Microsoft Sans Serif"/>
                           <a:cs typeface="Microsoft Sans Serif"/>
@@ -35619,6 +35596,9 @@
                         <a:t>3B</a:t>
                       </a:r>
                       <a:endParaRPr sz="1000">
+                        <a:solidFill>
+                          <a:schemeClr val="tx1"/>
+                        </a:solidFill>
                         <a:latin typeface="Microsoft Sans Serif"/>
                         <a:cs typeface="Microsoft Sans Serif"/>
                       </a:endParaRPr>
@@ -35646,7 +35626,7 @@
                       <a:r>
                         <a:rPr sz="1000" spc="-20" dirty="0">
                           <a:solidFill>
-                            <a:srgbClr val="22373A"/>
+                            <a:schemeClr val="tx1"/>
                           </a:solidFill>
                           <a:latin typeface="Microsoft Sans Serif"/>
                           <a:cs typeface="Microsoft Sans Serif"/>
@@ -35654,6 +35634,9 @@
                         <a:t>5/18</a:t>
                       </a:r>
                       <a:endParaRPr sz="1000">
+                        <a:solidFill>
+                          <a:schemeClr val="tx1"/>
+                        </a:solidFill>
                         <a:latin typeface="Microsoft Sans Serif"/>
                         <a:cs typeface="Microsoft Sans Serif"/>
                       </a:endParaRPr>
@@ -35681,7 +35664,7 @@
                       <a:r>
                         <a:rPr sz="1000" spc="-25" dirty="0">
                           <a:solidFill>
-                            <a:srgbClr val="2D7DB8"/>
+                            <a:schemeClr val="tx1"/>
                           </a:solidFill>
                           <a:latin typeface="Microsoft Sans Serif"/>
                           <a:cs typeface="Microsoft Sans Serif"/>
@@ -35689,6 +35672,9 @@
                         <a:t>5/5</a:t>
                       </a:r>
                       <a:endParaRPr sz="1000">
+                        <a:solidFill>
+                          <a:schemeClr val="tx1"/>
+                        </a:solidFill>
                         <a:latin typeface="Microsoft Sans Serif"/>
                         <a:cs typeface="Microsoft Sans Serif"/>
                       </a:endParaRPr>
@@ -35716,14 +35702,17 @@
                       <a:r>
                         <a:rPr sz="1000" spc="-10" dirty="0">
                           <a:solidFill>
-                            <a:srgbClr val="22373A"/>
+                            <a:schemeClr val="tx1"/>
                           </a:solidFill>
                           <a:latin typeface="Microsoft Sans Serif"/>
                           <a:cs typeface="Microsoft Sans Serif"/>
                         </a:rPr>
                         <a:t>0.278</a:t>
                       </a:r>
-                      <a:endParaRPr sz="1000">
+                      <a:endParaRPr sz="1000" dirty="0">
+                        <a:solidFill>
+                          <a:schemeClr val="tx1"/>
+                        </a:solidFill>
                         <a:latin typeface="Microsoft Sans Serif"/>
                         <a:cs typeface="Microsoft Sans Serif"/>
                       </a:endParaRPr>
@@ -35757,7 +35746,7 @@
         <p:spPr>
           <a:xfrm>
             <a:off x="347294" y="1641409"/>
-            <a:ext cx="5067300" cy="421640"/>
+            <a:ext cx="5067300" cy="394532"/>
           </a:xfrm>
           <a:prstGeom prst="rect">
             <a:avLst/>
@@ -35780,7 +35769,7 @@
             <a:r>
               <a:rPr sz="1100" spc="-60" dirty="0">
                 <a:solidFill>
-                  <a:srgbClr val="22373A"/>
+                  <a:schemeClr val="tx1"/>
                 </a:solidFill>
                 <a:latin typeface="Arial MT"/>
                 <a:cs typeface="Arial MT"/>
@@ -35790,7 +35779,7 @@
             <a:r>
               <a:rPr sz="1100" spc="-15" dirty="0">
                 <a:solidFill>
-                  <a:srgbClr val="22373A"/>
+                  <a:schemeClr val="tx1"/>
                 </a:solidFill>
                 <a:latin typeface="Arial MT"/>
                 <a:cs typeface="Arial MT"/>
@@ -35800,7 +35789,7 @@
             <a:r>
               <a:rPr sz="1100" spc="-50" dirty="0">
                 <a:solidFill>
-                  <a:srgbClr val="22373A"/>
+                  <a:schemeClr val="tx1"/>
                 </a:solidFill>
                 <a:latin typeface="Arial MT"/>
                 <a:cs typeface="Arial MT"/>
@@ -35810,7 +35799,7 @@
             <a:r>
               <a:rPr sz="1100" spc="-10" dirty="0">
                 <a:solidFill>
-                  <a:srgbClr val="22373A"/>
+                  <a:schemeClr val="tx1"/>
                 </a:solidFill>
                 <a:latin typeface="Arial MT"/>
                 <a:cs typeface="Arial MT"/>
@@ -35820,7 +35809,7 @@
             <a:r>
               <a:rPr sz="1100" spc="-60" dirty="0">
                 <a:solidFill>
-                  <a:srgbClr val="22373A"/>
+                  <a:schemeClr val="tx1"/>
                 </a:solidFill>
                 <a:latin typeface="Arial MT"/>
                 <a:cs typeface="Arial MT"/>
@@ -35830,7 +35819,7 @@
             <a:r>
               <a:rPr sz="1100" dirty="0">
                 <a:solidFill>
-                  <a:srgbClr val="22373A"/>
+                  <a:schemeClr val="tx1"/>
                 </a:solidFill>
                 <a:latin typeface="Arial MT"/>
                 <a:cs typeface="Arial MT"/>
@@ -35840,7 +35829,7 @@
             <a:r>
               <a:rPr sz="1100" i="1" spc="-85" dirty="0">
                 <a:solidFill>
-                  <a:srgbClr val="22373A"/>
+                  <a:schemeClr val="tx1"/>
                 </a:solidFill>
                 <a:latin typeface="Arial"/>
                 <a:cs typeface="Arial"/>
@@ -35850,7 +35839,7 @@
             <a:r>
               <a:rPr sz="1100" i="1" spc="10" dirty="0">
                 <a:solidFill>
-                  <a:srgbClr val="22373A"/>
+                  <a:schemeClr val="tx1"/>
                 </a:solidFill>
                 <a:latin typeface="Arial"/>
                 <a:cs typeface="Arial"/>
@@ -35860,7 +35849,7 @@
             <a:r>
               <a:rPr sz="1100" dirty="0">
                 <a:solidFill>
-                  <a:srgbClr val="22373A"/>
+                  <a:schemeClr val="tx1"/>
                 </a:solidFill>
                 <a:latin typeface="Arial MT"/>
                 <a:cs typeface="Arial MT"/>
@@ -35870,7 +35859,7 @@
             <a:r>
               <a:rPr sz="1100" spc="-45" dirty="0">
                 <a:solidFill>
-                  <a:srgbClr val="22373A"/>
+                  <a:schemeClr val="tx1"/>
                 </a:solidFill>
                 <a:latin typeface="Arial MT"/>
                 <a:cs typeface="Arial MT"/>
@@ -35880,7 +35869,7 @@
             <a:r>
               <a:rPr sz="1100" spc="110" dirty="0">
                 <a:solidFill>
-                  <a:srgbClr val="22373A"/>
+                  <a:schemeClr val="tx1"/>
                 </a:solidFill>
                 <a:latin typeface="Arial MT"/>
                 <a:cs typeface="Arial MT"/>
@@ -35890,7 +35879,7 @@
             <a:r>
               <a:rPr sz="1100" spc="-80" dirty="0">
                 <a:solidFill>
-                  <a:srgbClr val="22373A"/>
+                  <a:schemeClr val="tx1"/>
                 </a:solidFill>
                 <a:latin typeface="Arial MT"/>
                 <a:cs typeface="Arial MT"/>
@@ -35900,7 +35889,7 @@
             <a:r>
               <a:rPr sz="1100" spc="5" dirty="0">
                 <a:solidFill>
-                  <a:srgbClr val="22373A"/>
+                  <a:schemeClr val="tx1"/>
                 </a:solidFill>
                 <a:latin typeface="Arial MT"/>
                 <a:cs typeface="Arial MT"/>
@@ -35910,7 +35899,7 @@
             <a:r>
               <a:rPr sz="1100" dirty="0">
                 <a:solidFill>
-                  <a:srgbClr val="22373A"/>
+                  <a:schemeClr val="tx1"/>
                 </a:solidFill>
                 <a:latin typeface="Arial MT"/>
                 <a:cs typeface="Arial MT"/>
@@ -35920,7 +35909,7 @@
             <a:r>
               <a:rPr sz="1100" spc="-25" dirty="0">
                 <a:solidFill>
-                  <a:srgbClr val="22373A"/>
+                  <a:schemeClr val="tx1"/>
                 </a:solidFill>
                 <a:latin typeface="Arial MT"/>
                 <a:cs typeface="Arial MT"/>
@@ -35930,7 +35919,7 @@
             <a:r>
               <a:rPr sz="1100" dirty="0">
                 <a:solidFill>
-                  <a:srgbClr val="22373A"/>
+                  <a:schemeClr val="tx1"/>
                 </a:solidFill>
                 <a:latin typeface="Arial MT"/>
                 <a:cs typeface="Arial MT"/>
@@ -35940,7 +35929,7 @@
             <a:r>
               <a:rPr sz="1100" spc="-90" dirty="0">
                 <a:solidFill>
-                  <a:srgbClr val="22373A"/>
+                  <a:schemeClr val="tx1"/>
                 </a:solidFill>
                 <a:latin typeface="Arial MT"/>
                 <a:cs typeface="Arial MT"/>
@@ -35950,7 +35939,7 @@
             <a:r>
               <a:rPr sz="1100" spc="15" dirty="0">
                 <a:solidFill>
-                  <a:srgbClr val="22373A"/>
+                  <a:schemeClr val="tx1"/>
                 </a:solidFill>
                 <a:latin typeface="Arial MT"/>
                 <a:cs typeface="Arial MT"/>
@@ -35960,7 +35949,7 @@
             <a:r>
               <a:rPr sz="1100" spc="-60" dirty="0">
                 <a:solidFill>
-                  <a:srgbClr val="22373A"/>
+                  <a:schemeClr val="tx1"/>
                 </a:solidFill>
                 <a:latin typeface="Arial MT"/>
                 <a:cs typeface="Arial MT"/>
@@ -35970,7 +35959,7 @@
             <a:r>
               <a:rPr sz="1100" spc="5" dirty="0">
                 <a:solidFill>
-                  <a:srgbClr val="22373A"/>
+                  <a:schemeClr val="tx1"/>
                 </a:solidFill>
                 <a:latin typeface="Arial MT"/>
                 <a:cs typeface="Arial MT"/>
@@ -35980,7 +35969,7 @@
             <a:r>
               <a:rPr sz="1100" spc="-25" dirty="0">
                 <a:solidFill>
-                  <a:srgbClr val="22373A"/>
+                  <a:schemeClr val="tx1"/>
                 </a:solidFill>
                 <a:latin typeface="Arial MT"/>
                 <a:cs typeface="Arial MT"/>
@@ -35990,7 +35979,7 @@
             <a:r>
               <a:rPr sz="1100" spc="-80" dirty="0">
                 <a:solidFill>
-                  <a:srgbClr val="22373A"/>
+                  <a:schemeClr val="tx1"/>
                 </a:solidFill>
                 <a:latin typeface="Arial MT"/>
                 <a:cs typeface="Arial MT"/>
@@ -36000,7 +35989,7 @@
             <a:r>
               <a:rPr sz="1100" spc="5" dirty="0">
                 <a:solidFill>
-                  <a:srgbClr val="22373A"/>
+                  <a:schemeClr val="tx1"/>
                 </a:solidFill>
                 <a:latin typeface="Arial MT"/>
                 <a:cs typeface="Arial MT"/>
@@ -36010,7 +35999,7 @@
             <a:r>
               <a:rPr sz="1100" spc="-30" dirty="0">
                 <a:solidFill>
-                  <a:srgbClr val="22373A"/>
+                  <a:schemeClr val="tx1"/>
                 </a:solidFill>
                 <a:latin typeface="Arial MT"/>
                 <a:cs typeface="Arial MT"/>
@@ -36020,7 +36009,7 @@
             <a:r>
               <a:rPr sz="1100" spc="-10" dirty="0">
                 <a:solidFill>
-                  <a:srgbClr val="22373A"/>
+                  <a:schemeClr val="tx1"/>
                 </a:solidFill>
                 <a:latin typeface="Arial MT"/>
                 <a:cs typeface="Arial MT"/>
@@ -36030,7 +36019,7 @@
             <a:r>
               <a:rPr sz="1100" spc="-70" dirty="0">
                 <a:solidFill>
-                  <a:srgbClr val="22373A"/>
+                  <a:schemeClr val="tx1"/>
                 </a:solidFill>
                 <a:latin typeface="Arial MT"/>
                 <a:cs typeface="Arial MT"/>
@@ -36040,7 +36029,7 @@
             <a:r>
               <a:rPr sz="1100" spc="-5" dirty="0">
                 <a:solidFill>
-                  <a:srgbClr val="22373A"/>
+                  <a:schemeClr val="tx1"/>
                 </a:solidFill>
                 <a:latin typeface="Arial MT"/>
                 <a:cs typeface="Arial MT"/>
@@ -36050,7 +36039,7 @@
             <a:r>
               <a:rPr sz="1100" spc="-50" dirty="0">
                 <a:solidFill>
-                  <a:srgbClr val="22373A"/>
+                  <a:schemeClr val="tx1"/>
                 </a:solidFill>
                 <a:latin typeface="Arial MT"/>
                 <a:cs typeface="Arial MT"/>
@@ -36060,7 +36049,7 @@
             <a:r>
               <a:rPr sz="1100" dirty="0">
                 <a:solidFill>
-                  <a:srgbClr val="22373A"/>
+                  <a:schemeClr val="tx1"/>
                 </a:solidFill>
                 <a:latin typeface="Arial MT"/>
                 <a:cs typeface="Arial MT"/>
@@ -36070,7 +36059,7 @@
             <a:r>
               <a:rPr sz="1100" spc="-55" dirty="0">
                 <a:solidFill>
-                  <a:srgbClr val="22373A"/>
+                  <a:schemeClr val="tx1"/>
                 </a:solidFill>
                 <a:latin typeface="Arial MT"/>
                 <a:cs typeface="Arial MT"/>
@@ -36080,7 +36069,7 @@
             <a:r>
               <a:rPr sz="1100" spc="-5" dirty="0">
                 <a:solidFill>
-                  <a:srgbClr val="22373A"/>
+                  <a:schemeClr val="tx1"/>
                 </a:solidFill>
                 <a:latin typeface="Arial MT"/>
                 <a:cs typeface="Arial MT"/>
@@ -36090,7 +36079,7 @@
             <a:r>
               <a:rPr sz="1100" dirty="0">
                 <a:solidFill>
-                  <a:srgbClr val="22373A"/>
+                  <a:schemeClr val="tx1"/>
                 </a:solidFill>
                 <a:latin typeface="Arial MT"/>
                 <a:cs typeface="Arial MT"/>
@@ -36100,7 +36089,7 @@
             <a:r>
               <a:rPr sz="1100" spc="-30" dirty="0">
                 <a:solidFill>
-                  <a:srgbClr val="2D7DB8"/>
+                  <a:schemeClr val="tx1"/>
                 </a:solidFill>
                 <a:latin typeface="Arial MT"/>
                 <a:cs typeface="Arial MT"/>
@@ -36110,7 +36099,7 @@
             <a:r>
               <a:rPr sz="1100" spc="-5" dirty="0">
                 <a:solidFill>
-                  <a:srgbClr val="2D7DB8"/>
+                  <a:schemeClr val="tx1"/>
                 </a:solidFill>
                 <a:latin typeface="Arial MT"/>
                 <a:cs typeface="Arial MT"/>
@@ -36120,24 +36109,17 @@
             <a:r>
               <a:rPr sz="1100" spc="-10" dirty="0">
                 <a:solidFill>
-                  <a:srgbClr val="2D7DB8"/>
-                </a:solidFill>
-                <a:latin typeface="Arial MT"/>
-                <a:cs typeface="Arial MT"/>
-              </a:rPr>
-              <a:t>right</a:t>
-            </a:r>
-            <a:r>
-              <a:rPr sz="1100" spc="-10" dirty="0">
-                <a:solidFill>
-                  <a:srgbClr val="22373A"/>
-                </a:solidFill>
-                <a:latin typeface="Arial MT"/>
-                <a:cs typeface="Arial MT"/>
-              </a:rPr>
-              <a:t>.</a:t>
-            </a:r>
-            <a:endParaRPr sz="1100">
+                  <a:schemeClr val="tx1"/>
+                </a:solidFill>
+                <a:latin typeface="Arial MT"/>
+                <a:cs typeface="Arial MT"/>
+              </a:rPr>
+              <a:t>right.</a:t>
+            </a:r>
+            <a:endParaRPr sz="1100" dirty="0">
+              <a:solidFill>
+                <a:schemeClr val="tx1"/>
+              </a:solidFill>
               <a:latin typeface="Arial MT"/>
               <a:cs typeface="Arial MT"/>
             </a:endParaRPr>
@@ -36343,7 +36325,187 @@
                 <a:latin typeface="Microsoft Sans Serif"/>
                 <a:cs typeface="Microsoft Sans Serif"/>
               </a:rPr>
-              <a:t>whose</a:t>
+              <a:t>w</a:t>
+            </a:r>
+            <a:r>
+              <a:rPr lang="en-GB" sz="1000" spc="-70" dirty="0">
+                <a:solidFill>
+                  <a:srgbClr val="22373A"/>
+                </a:solidFill>
+                <a:latin typeface="Microsoft Sans Serif"/>
+                <a:cs typeface="Microsoft Sans Serif"/>
+              </a:rPr>
+              <a:t>hose</a:t>
+            </a:r>
+            <a:r>
+              <a:rPr lang="en-DE" sz="1000" spc="20" dirty="0">
+                <a:solidFill>
+                  <a:srgbClr val="22373A"/>
+                </a:solidFill>
+                <a:latin typeface="Microsoft Sans Serif"/>
+                <a:cs typeface="Microsoft Sans Serif"/>
+              </a:rPr>
+              <a:t> </a:t>
+            </a:r>
+            <a:r>
+              <a:rPr lang="en-GB" sz="1000" spc="-40" dirty="0">
+                <a:solidFill>
+                  <a:srgbClr val="22373A"/>
+                </a:solidFill>
+                <a:latin typeface="Microsoft Sans Serif"/>
+                <a:cs typeface="Microsoft Sans Serif"/>
+              </a:rPr>
+              <a:t>behaviour</a:t>
+            </a:r>
+            <a:r>
+              <a:rPr lang="en-DE" sz="1000" spc="20" dirty="0">
+                <a:solidFill>
+                  <a:srgbClr val="22373A"/>
+                </a:solidFill>
+                <a:latin typeface="Microsoft Sans Serif"/>
+                <a:cs typeface="Microsoft Sans Serif"/>
+              </a:rPr>
+              <a:t> </a:t>
+            </a:r>
+            <a:r>
+              <a:rPr lang="en-GB" sz="1000" dirty="0">
+                <a:solidFill>
+                  <a:srgbClr val="22373A"/>
+                </a:solidFill>
+                <a:latin typeface="Microsoft Sans Serif"/>
+                <a:cs typeface="Microsoft Sans Serif"/>
+              </a:rPr>
+              <a:t>it</a:t>
+            </a:r>
+            <a:r>
+              <a:rPr lang="en-DE" sz="1000" spc="20" dirty="0">
+                <a:solidFill>
+                  <a:srgbClr val="22373A"/>
+                </a:solidFill>
+                <a:latin typeface="Microsoft Sans Serif"/>
+                <a:cs typeface="Microsoft Sans Serif"/>
+              </a:rPr>
+              <a:t> </a:t>
+            </a:r>
+            <a:r>
+              <a:rPr lang="en-GB" sz="1000" spc="-20" dirty="0">
+                <a:solidFill>
+                  <a:srgbClr val="22373A"/>
+                </a:solidFill>
+                <a:latin typeface="Microsoft Sans Serif"/>
+                <a:cs typeface="Microsoft Sans Serif"/>
+              </a:rPr>
+              <a:t>had</a:t>
+            </a:r>
+            <a:r>
+              <a:rPr lang="en-DE" sz="1000" spc="20" dirty="0">
+                <a:solidFill>
+                  <a:srgbClr val="22373A"/>
+                </a:solidFill>
+                <a:latin typeface="Microsoft Sans Serif"/>
+                <a:cs typeface="Microsoft Sans Serif"/>
+              </a:rPr>
+              <a:t> </a:t>
+            </a:r>
+            <a:r>
+              <a:rPr lang="en-GB" sz="1000" spc="-30" dirty="0">
+                <a:solidFill>
+                  <a:srgbClr val="22373A"/>
+                </a:solidFill>
+                <a:latin typeface="Microsoft Sans Serif"/>
+                <a:cs typeface="Microsoft Sans Serif"/>
+              </a:rPr>
+              <a:t>extracted</a:t>
+            </a:r>
+            <a:r>
+              <a:rPr lang="en-DE" sz="1000" spc="15" dirty="0">
+                <a:solidFill>
+                  <a:srgbClr val="22373A"/>
+                </a:solidFill>
+                <a:latin typeface="Microsoft Sans Serif"/>
+                <a:cs typeface="Microsoft Sans Serif"/>
+              </a:rPr>
+              <a:t> </a:t>
+            </a:r>
+            <a:r>
+              <a:rPr lang="en-GB" sz="1000" spc="-25" dirty="0">
+                <a:solidFill>
+                  <a:srgbClr val="22373A"/>
+                </a:solidFill>
+                <a:latin typeface="Microsoft Sans Serif"/>
+                <a:cs typeface="Microsoft Sans Serif"/>
+              </a:rPr>
+              <a:t>correctly</a:t>
+            </a:r>
+            <a:r>
+              <a:rPr lang="en-DE" sz="1000" spc="-25" dirty="0">
+                <a:solidFill>
+                  <a:srgbClr val="22373A"/>
+                </a:solidFill>
+                <a:latin typeface="Microsoft Sans Serif"/>
+                <a:cs typeface="Microsoft Sans Serif"/>
+              </a:rPr>
+              <a:t>.</a:t>
+            </a:r>
+            <a:r>
+              <a:rPr lang="en-DE" sz="1000" spc="110" dirty="0">
+                <a:solidFill>
+                  <a:srgbClr val="22373A"/>
+                </a:solidFill>
+                <a:latin typeface="Microsoft Sans Serif"/>
+                <a:cs typeface="Microsoft Sans Serif"/>
+              </a:rPr>
+              <a:t> </a:t>
+            </a:r>
+            <a:r>
+              <a:rPr lang="en-GB" sz="1000" spc="-25" dirty="0">
+                <a:solidFill>
+                  <a:srgbClr val="22373A"/>
+                </a:solidFill>
+                <a:latin typeface="Microsoft Sans Serif"/>
+                <a:cs typeface="Microsoft Sans Serif"/>
+              </a:rPr>
+              <a:t>The</a:t>
+            </a:r>
+            <a:r>
+              <a:rPr lang="en-DE" sz="1000" spc="-25" dirty="0">
+                <a:solidFill>
+                  <a:srgbClr val="22373A"/>
+                </a:solidFill>
+                <a:latin typeface="Microsoft Sans Serif"/>
+                <a:cs typeface="Microsoft Sans Serif"/>
+              </a:rPr>
+              <a:t> </a:t>
+            </a:r>
+            <a:r>
+              <a:rPr lang="en-GB" sz="1000" spc="-20" dirty="0">
+                <a:solidFill>
+                  <a:srgbClr val="22373A"/>
+                </a:solidFill>
+                <a:latin typeface="Microsoft Sans Serif"/>
+                <a:cs typeface="Microsoft Sans Serif"/>
+              </a:rPr>
+              <a:t>bottleneck</a:t>
+            </a:r>
+            <a:r>
+              <a:rPr lang="en-DE" sz="1000" spc="15" dirty="0">
+                <a:solidFill>
+                  <a:srgbClr val="22373A"/>
+                </a:solidFill>
+                <a:latin typeface="Microsoft Sans Serif"/>
+                <a:cs typeface="Microsoft Sans Serif"/>
+              </a:rPr>
+              <a:t> </a:t>
+            </a:r>
+            <a:r>
+              <a:rPr sz="1000" dirty="0">
+                <a:solidFill>
+                  <a:srgbClr val="22373A"/>
+                </a:solidFill>
+                <a:latin typeface="Microsoft Sans Serif"/>
+                <a:cs typeface="Microsoft Sans Serif"/>
+              </a:rPr>
+              <a:t>is</a:t>
             </a:r>
             <a:r>
               <a:rPr sz="1000" spc="20" dirty="0">
@@ -36356,14 +36518,34 @@
               <a:t> </a:t>
             </a:r>
             <a:r>
-              <a:rPr sz="1000" spc="-40" dirty="0">
-                <a:solidFill>
-                  <a:srgbClr val="22373A"/>
-                </a:solidFill>
-                <a:latin typeface="Microsoft Sans Serif"/>
-                <a:cs typeface="Microsoft Sans Serif"/>
-              </a:rPr>
-              <a:t>behaviour</a:t>
+              <a:rPr sz="1000" spc="-20" dirty="0">
+                <a:solidFill>
+                  <a:srgbClr val="22373A"/>
+                </a:solidFill>
+                <a:latin typeface="Microsoft Sans Serif"/>
+                <a:cs typeface="Microsoft Sans Serif"/>
+              </a:rPr>
+              <a:t>extraction,</a:t>
+            </a:r>
+            <a:r>
+              <a:rPr sz="1000" spc="15" dirty="0">
+                <a:solidFill>
+                  <a:srgbClr val="22373A"/>
+                </a:solidFill>
+                <a:latin typeface="Microsoft Sans Serif"/>
+                <a:cs typeface="Microsoft Sans Serif"/>
+              </a:rPr>
+              <a:t> </a:t>
+            </a:r>
+            <a:r>
+              <a:rPr sz="1000" dirty="0">
+                <a:solidFill>
+                  <a:srgbClr val="22373A"/>
+                </a:solidFill>
+                <a:latin typeface="Microsoft Sans Serif"/>
+                <a:cs typeface="Microsoft Sans Serif"/>
+              </a:rPr>
+              <a:t>not</a:t>
             </a:r>
             <a:r>
               <a:rPr sz="1000" spc="20" dirty="0">
@@ -36376,176 +36558,6 @@
               <a:t> </a:t>
             </a:r>
             <a:r>
-              <a:rPr sz="1000" dirty="0">
-                <a:solidFill>
-                  <a:srgbClr val="22373A"/>
-                </a:solidFill>
-                <a:latin typeface="Microsoft Sans Serif"/>
-                <a:cs typeface="Microsoft Sans Serif"/>
-              </a:rPr>
-              <a:t>it</a:t>
-            </a:r>
-            <a:r>
-              <a:rPr sz="1000" spc="20" dirty="0">
-                <a:solidFill>
-                  <a:srgbClr val="22373A"/>
-                </a:solidFill>
-                <a:latin typeface="Microsoft Sans Serif"/>
-                <a:cs typeface="Microsoft Sans Serif"/>
-              </a:rPr>
-              <a:t> </a:t>
-            </a:r>
-            <a:r>
-              <a:rPr sz="1000" spc="-20" dirty="0">
-                <a:solidFill>
-                  <a:srgbClr val="22373A"/>
-                </a:solidFill>
-                <a:latin typeface="Microsoft Sans Serif"/>
-                <a:cs typeface="Microsoft Sans Serif"/>
-              </a:rPr>
-              <a:t>had</a:t>
-            </a:r>
-            <a:r>
-              <a:rPr sz="1000" spc="20" dirty="0">
-                <a:solidFill>
-                  <a:srgbClr val="22373A"/>
-                </a:solidFill>
-                <a:latin typeface="Microsoft Sans Serif"/>
-                <a:cs typeface="Microsoft Sans Serif"/>
-              </a:rPr>
-              <a:t> </a:t>
-            </a:r>
-            <a:r>
-              <a:rPr sz="1000" spc="-30" dirty="0">
-                <a:solidFill>
-                  <a:srgbClr val="22373A"/>
-                </a:solidFill>
-                <a:latin typeface="Microsoft Sans Serif"/>
-                <a:cs typeface="Microsoft Sans Serif"/>
-              </a:rPr>
-              <a:t>extracted</a:t>
-            </a:r>
-            <a:r>
-              <a:rPr sz="1000" spc="15" dirty="0">
-                <a:solidFill>
-                  <a:srgbClr val="22373A"/>
-                </a:solidFill>
-                <a:latin typeface="Microsoft Sans Serif"/>
-                <a:cs typeface="Microsoft Sans Serif"/>
-              </a:rPr>
-              <a:t> </a:t>
-            </a:r>
-            <a:r>
-              <a:rPr sz="1000" spc="-25" dirty="0">
-                <a:solidFill>
-                  <a:srgbClr val="22373A"/>
-                </a:solidFill>
-                <a:latin typeface="Microsoft Sans Serif"/>
-                <a:cs typeface="Microsoft Sans Serif"/>
-              </a:rPr>
-              <a:t>correctly.</a:t>
-            </a:r>
-            <a:r>
-              <a:rPr sz="1000" spc="110" dirty="0">
-                <a:solidFill>
-                  <a:srgbClr val="22373A"/>
-                </a:solidFill>
-                <a:latin typeface="Microsoft Sans Serif"/>
-                <a:cs typeface="Microsoft Sans Serif"/>
-              </a:rPr>
-              <a:t> </a:t>
-            </a:r>
-            <a:r>
-              <a:rPr sz="1000" spc="-25" dirty="0">
-                <a:solidFill>
-                  <a:srgbClr val="22373A"/>
-                </a:solidFill>
-                <a:latin typeface="Microsoft Sans Serif"/>
-                <a:cs typeface="Microsoft Sans Serif"/>
-              </a:rPr>
-              <a:t>The </a:t>
-            </a:r>
-            <a:r>
-              <a:rPr sz="1000" spc="-20" dirty="0">
-                <a:solidFill>
-                  <a:srgbClr val="22373A"/>
-                </a:solidFill>
-                <a:latin typeface="Microsoft Sans Serif"/>
-                <a:cs typeface="Microsoft Sans Serif"/>
-              </a:rPr>
-              <a:t>bottleneck</a:t>
-            </a:r>
-            <a:r>
-              <a:rPr sz="1000" spc="15" dirty="0">
-                <a:solidFill>
-                  <a:srgbClr val="22373A"/>
-                </a:solidFill>
-                <a:latin typeface="Microsoft Sans Serif"/>
-                <a:cs typeface="Microsoft Sans Serif"/>
-              </a:rPr>
-              <a:t> </a:t>
-            </a:r>
-            <a:r>
-              <a:rPr sz="1000" dirty="0">
-                <a:solidFill>
-                  <a:srgbClr val="22373A"/>
-                </a:solidFill>
-                <a:latin typeface="Microsoft Sans Serif"/>
-                <a:cs typeface="Microsoft Sans Serif"/>
-              </a:rPr>
-              <a:t>is</a:t>
-            </a:r>
-            <a:r>
-              <a:rPr sz="1000" spc="20" dirty="0">
-                <a:solidFill>
-                  <a:srgbClr val="22373A"/>
-                </a:solidFill>
-                <a:latin typeface="Microsoft Sans Serif"/>
-                <a:cs typeface="Microsoft Sans Serif"/>
-              </a:rPr>
-              <a:t> </a:t>
-            </a:r>
-            <a:r>
-              <a:rPr sz="1000" spc="-20" dirty="0">
-                <a:solidFill>
-                  <a:srgbClr val="22373A"/>
-                </a:solidFill>
-                <a:latin typeface="Microsoft Sans Serif"/>
-                <a:cs typeface="Microsoft Sans Serif"/>
-              </a:rPr>
-              <a:t>extraction,</a:t>
-            </a:r>
-            <a:r>
-              <a:rPr sz="1000" spc="15" dirty="0">
-                <a:solidFill>
-                  <a:srgbClr val="22373A"/>
-                </a:solidFill>
-                <a:latin typeface="Microsoft Sans Serif"/>
-                <a:cs typeface="Microsoft Sans Serif"/>
-              </a:rPr>
-              <a:t> </a:t>
-            </a:r>
-            <a:r>
-              <a:rPr sz="1000" dirty="0">
-                <a:solidFill>
-                  <a:srgbClr val="22373A"/>
-                </a:solidFill>
-                <a:latin typeface="Microsoft Sans Serif"/>
-                <a:cs typeface="Microsoft Sans Serif"/>
-              </a:rPr>
-              <a:t>not</a:t>
-            </a:r>
-            <a:r>
-              <a:rPr sz="1000" spc="20" dirty="0">
-                <a:solidFill>
-                  <a:srgbClr val="22373A"/>
-                </a:solidFill>
-                <a:latin typeface="Microsoft Sans Serif"/>
-                <a:cs typeface="Microsoft Sans Serif"/>
-              </a:rPr>
-              <a:t> </a:t>
-            </a:r>
-            <a:r>
               <a:rPr sz="1000" spc="-10" dirty="0">
                 <a:solidFill>
                   <a:srgbClr val="22373A"/>
@@ -36555,7 +36567,7 @@
               </a:rPr>
               <a:t>retrieval.</a:t>
             </a:r>
-            <a:endParaRPr sz="1000">
+            <a:endParaRPr sz="1000" dirty="0">
               <a:latin typeface="Microsoft Sans Serif"/>
               <a:cs typeface="Microsoft Sans Serif"/>
             </a:endParaRPr>
@@ -37125,7 +37137,13 @@
           <p:cNvGraphicFramePr>
             <a:graphicFrameLocks noGrp="1"/>
           </p:cNvGraphicFramePr>
-          <p:nvPr/>
+          <p:nvPr>
+            <p:extLst>
+              <p:ext uri="{D42A27DB-BD31-4B8C-83A1-F6EECF244321}">
+                <p14:modId xmlns:p14="http://schemas.microsoft.com/office/powerpoint/2010/main" val="3448740608"/>
+              </p:ext>
+            </p:extLst>
+          </p:nvPr>
         </p:nvGraphicFramePr>
         <p:xfrm>
           <a:off x="1241577" y="829906"/>
@@ -37177,7 +37195,7 @@
                       <a:r>
                         <a:rPr sz="1000" spc="-10" dirty="0">
                           <a:solidFill>
-                            <a:srgbClr val="22373A"/>
+                            <a:schemeClr val="tx1"/>
                           </a:solidFill>
                           <a:latin typeface="Microsoft Sans Serif"/>
                           <a:cs typeface="Microsoft Sans Serif"/>
@@ -37185,6 +37203,9 @@
                         <a:t>Model</a:t>
                       </a:r>
                       <a:endParaRPr sz="1000">
+                        <a:solidFill>
+                          <a:schemeClr val="tx1"/>
+                        </a:solidFill>
                         <a:latin typeface="Microsoft Sans Serif"/>
                         <a:cs typeface="Microsoft Sans Serif"/>
                       </a:endParaRPr>
@@ -37221,7 +37242,7 @@
                       <a:r>
                         <a:rPr sz="1000" spc="-10" dirty="0">
                           <a:solidFill>
-                            <a:srgbClr val="22373A"/>
+                            <a:schemeClr val="tx1"/>
                           </a:solidFill>
                           <a:latin typeface="Microsoft Sans Serif"/>
                           <a:cs typeface="Microsoft Sans Serif"/>
@@ -37229,6 +37250,9 @@
                         <a:t>Scoped</a:t>
                       </a:r>
                       <a:endParaRPr sz="1000">
+                        <a:solidFill>
+                          <a:schemeClr val="tx1"/>
+                        </a:solidFill>
                         <a:latin typeface="Microsoft Sans Serif"/>
                         <a:cs typeface="Microsoft Sans Serif"/>
                       </a:endParaRPr>
@@ -37265,7 +37289,7 @@
                       <a:r>
                         <a:rPr sz="1000" spc="-60" dirty="0">
                           <a:solidFill>
-                            <a:srgbClr val="22373A"/>
+                            <a:schemeClr val="tx1"/>
                           </a:solidFill>
                           <a:latin typeface="Microsoft Sans Serif"/>
                           <a:cs typeface="Microsoft Sans Serif"/>
@@ -37275,7 +37299,7 @@
                       <a:r>
                         <a:rPr sz="1000" spc="-5" dirty="0">
                           <a:solidFill>
-                            <a:srgbClr val="22373A"/>
+                            <a:schemeClr val="tx1"/>
                           </a:solidFill>
                           <a:latin typeface="Microsoft Sans Serif"/>
                           <a:cs typeface="Microsoft Sans Serif"/>
@@ -37285,7 +37309,7 @@
                       <a:r>
                         <a:rPr sz="1000" spc="-10" dirty="0">
                           <a:solidFill>
-                            <a:srgbClr val="22373A"/>
+                            <a:schemeClr val="tx1"/>
                           </a:solidFill>
                           <a:latin typeface="Microsoft Sans Serif"/>
                           <a:cs typeface="Microsoft Sans Serif"/>
@@ -37295,7 +37319,7 @@
                       <a:r>
                         <a:rPr sz="1000" dirty="0">
                           <a:solidFill>
-                            <a:srgbClr val="22373A"/>
+                            <a:schemeClr val="tx1"/>
                           </a:solidFill>
                           <a:latin typeface="Microsoft Sans Serif"/>
                           <a:cs typeface="Microsoft Sans Serif"/>
@@ -37305,7 +37329,7 @@
                       <a:r>
                         <a:rPr sz="1000" spc="-10" dirty="0">
                           <a:solidFill>
-                            <a:srgbClr val="22373A"/>
+                            <a:schemeClr val="tx1"/>
                           </a:solidFill>
                           <a:latin typeface="Microsoft Sans Serif"/>
                           <a:cs typeface="Microsoft Sans Serif"/>
@@ -37313,6 +37337,9 @@
                         <a:t>techniques)</a:t>
                       </a:r>
                       <a:endParaRPr sz="1000">
+                        <a:solidFill>
+                          <a:schemeClr val="tx1"/>
+                        </a:solidFill>
                         <a:latin typeface="Microsoft Sans Serif"/>
                         <a:cs typeface="Microsoft Sans Serif"/>
                       </a:endParaRPr>
@@ -37356,7 +37383,7 @@
                       <a:r>
                         <a:rPr sz="1000" spc="-35" dirty="0">
                           <a:solidFill>
-                            <a:srgbClr val="22373A"/>
+                            <a:schemeClr val="tx1"/>
                           </a:solidFill>
                           <a:latin typeface="Microsoft Sans Serif"/>
                           <a:cs typeface="Microsoft Sans Serif"/>
@@ -37366,7 +37393,7 @@
                       <a:r>
                         <a:rPr sz="1000" spc="-25" dirty="0">
                           <a:solidFill>
-                            <a:srgbClr val="22373A"/>
+                            <a:schemeClr val="tx1"/>
                           </a:solidFill>
                           <a:latin typeface="Microsoft Sans Serif"/>
                           <a:cs typeface="Microsoft Sans Serif"/>
@@ -37374,6 +37401,9 @@
                         <a:t>12B</a:t>
                       </a:r>
                       <a:endParaRPr sz="1000">
+                        <a:solidFill>
+                          <a:schemeClr val="tx1"/>
+                        </a:solidFill>
                         <a:latin typeface="Microsoft Sans Serif"/>
                         <a:cs typeface="Microsoft Sans Serif"/>
                       </a:endParaRPr>
@@ -37404,7 +37434,7 @@
                       <a:r>
                         <a:rPr sz="1000" spc="-10" dirty="0">
                           <a:solidFill>
-                            <a:srgbClr val="22373A"/>
+                            <a:schemeClr val="tx1"/>
                           </a:solidFill>
                           <a:latin typeface="Microsoft Sans Serif"/>
                           <a:cs typeface="Microsoft Sans Serif"/>
@@ -37412,6 +37442,9 @@
                         <a:t>0.833</a:t>
                       </a:r>
                       <a:endParaRPr sz="1000">
+                        <a:solidFill>
+                          <a:schemeClr val="tx1"/>
+                        </a:solidFill>
                         <a:latin typeface="Microsoft Sans Serif"/>
                         <a:cs typeface="Microsoft Sans Serif"/>
                       </a:endParaRPr>
@@ -37442,7 +37475,7 @@
                       <a:r>
                         <a:rPr sz="1000" spc="-10" dirty="0">
                           <a:solidFill>
-                            <a:srgbClr val="2D7DB8"/>
+                            <a:schemeClr val="tx1"/>
                           </a:solidFill>
                           <a:latin typeface="Microsoft Sans Serif"/>
                           <a:cs typeface="Microsoft Sans Serif"/>
@@ -37450,6 +37483,9 @@
                         <a:t>0.000</a:t>
                       </a:r>
                       <a:endParaRPr sz="1000">
+                        <a:solidFill>
+                          <a:schemeClr val="tx1"/>
+                        </a:solidFill>
                         <a:latin typeface="Microsoft Sans Serif"/>
                         <a:cs typeface="Microsoft Sans Serif"/>
                       </a:endParaRPr>
@@ -37484,7 +37520,7 @@
                       <a:r>
                         <a:rPr sz="1000" spc="-60" dirty="0">
                           <a:solidFill>
-                            <a:srgbClr val="22373A"/>
+                            <a:schemeClr val="tx1"/>
                           </a:solidFill>
                           <a:latin typeface="Microsoft Sans Serif"/>
                           <a:cs typeface="Microsoft Sans Serif"/>
@@ -37494,7 +37530,7 @@
                       <a:r>
                         <a:rPr sz="1000" spc="-50" dirty="0">
                           <a:solidFill>
-                            <a:srgbClr val="22373A"/>
+                            <a:schemeClr val="tx1"/>
                           </a:solidFill>
                           <a:latin typeface="Microsoft Sans Serif"/>
                           <a:cs typeface="Microsoft Sans Serif"/>
@@ -37504,7 +37540,7 @@
                       <a:r>
                         <a:rPr sz="1000" spc="-25" dirty="0">
                           <a:solidFill>
-                            <a:srgbClr val="22373A"/>
+                            <a:schemeClr val="tx1"/>
                           </a:solidFill>
                           <a:latin typeface="Microsoft Sans Serif"/>
                           <a:cs typeface="Microsoft Sans Serif"/>
@@ -37512,6 +37548,9 @@
                         <a:t>7B</a:t>
                       </a:r>
                       <a:endParaRPr sz="1000">
+                        <a:solidFill>
+                          <a:schemeClr val="tx1"/>
+                        </a:solidFill>
                         <a:latin typeface="Microsoft Sans Serif"/>
                         <a:cs typeface="Microsoft Sans Serif"/>
                       </a:endParaRPr>
@@ -37532,14 +37571,17 @@
                       <a:r>
                         <a:rPr sz="1000" spc="-10" dirty="0">
                           <a:solidFill>
-                            <a:srgbClr val="22373A"/>
+                            <a:schemeClr val="tx1"/>
                           </a:solidFill>
                           <a:latin typeface="Microsoft Sans Serif"/>
                           <a:cs typeface="Microsoft Sans Serif"/>
                         </a:rPr>
                         <a:t>0.111</a:t>
                       </a:r>
-                      <a:endParaRPr sz="1000">
+                      <a:endParaRPr sz="1000" dirty="0">
+                        <a:solidFill>
+                          <a:schemeClr val="tx1"/>
+                        </a:solidFill>
                         <a:latin typeface="Microsoft Sans Serif"/>
                         <a:cs typeface="Microsoft Sans Serif"/>
                       </a:endParaRPr>
@@ -37560,7 +37602,7 @@
                       <a:r>
                         <a:rPr sz="1000" spc="-10" dirty="0">
                           <a:solidFill>
-                            <a:srgbClr val="2D7DB8"/>
+                            <a:schemeClr val="tx1"/>
                           </a:solidFill>
                           <a:latin typeface="Microsoft Sans Serif"/>
                           <a:cs typeface="Microsoft Sans Serif"/>
@@ -37568,6 +37610,9 @@
                         <a:t>0.000</a:t>
                       </a:r>
                       <a:endParaRPr sz="1000">
+                        <a:solidFill>
+                          <a:schemeClr val="tx1"/>
+                        </a:solidFill>
                         <a:latin typeface="Microsoft Sans Serif"/>
                         <a:cs typeface="Microsoft Sans Serif"/>
                       </a:endParaRPr>
@@ -37595,7 +37640,7 @@
                       <a:r>
                         <a:rPr sz="1000" spc="-55" dirty="0">
                           <a:solidFill>
-                            <a:srgbClr val="22373A"/>
+                            <a:schemeClr val="tx1"/>
                           </a:solidFill>
                           <a:latin typeface="Microsoft Sans Serif"/>
                           <a:cs typeface="Microsoft Sans Serif"/>
@@ -37605,7 +37650,7 @@
                       <a:r>
                         <a:rPr sz="1000" spc="-25" dirty="0">
                           <a:solidFill>
-                            <a:srgbClr val="22373A"/>
+                            <a:schemeClr val="tx1"/>
                           </a:solidFill>
                           <a:latin typeface="Microsoft Sans Serif"/>
                           <a:cs typeface="Microsoft Sans Serif"/>
@@ -37613,6 +37658,9 @@
                         <a:t>3B</a:t>
                       </a:r>
                       <a:endParaRPr sz="1000">
+                        <a:solidFill>
+                          <a:schemeClr val="tx1"/>
+                        </a:solidFill>
                         <a:latin typeface="Microsoft Sans Serif"/>
                         <a:cs typeface="Microsoft Sans Serif"/>
                       </a:endParaRPr>
@@ -37640,7 +37688,7 @@
                       <a:r>
                         <a:rPr sz="1000" spc="-10" dirty="0">
                           <a:solidFill>
-                            <a:srgbClr val="22373A"/>
+                            <a:schemeClr val="tx1"/>
                           </a:solidFill>
                           <a:latin typeface="Microsoft Sans Serif"/>
                           <a:cs typeface="Microsoft Sans Serif"/>
@@ -37648,6 +37696,9 @@
                         <a:t>0.278</a:t>
                       </a:r>
                       <a:endParaRPr sz="1000">
+                        <a:solidFill>
+                          <a:schemeClr val="tx1"/>
+                        </a:solidFill>
                         <a:latin typeface="Microsoft Sans Serif"/>
                         <a:cs typeface="Microsoft Sans Serif"/>
                       </a:endParaRPr>
@@ -37675,14 +37726,17 @@
                       <a:r>
                         <a:rPr sz="1000" spc="-10" dirty="0">
                           <a:solidFill>
-                            <a:srgbClr val="2D7DB8"/>
+                            <a:schemeClr val="tx1"/>
                           </a:solidFill>
                           <a:latin typeface="Microsoft Sans Serif"/>
                           <a:cs typeface="Microsoft Sans Serif"/>
                         </a:rPr>
                         <a:t>0.056</a:t>
                       </a:r>
-                      <a:endParaRPr sz="1000">
+                      <a:endParaRPr sz="1000" dirty="0">
+                        <a:solidFill>
+                          <a:schemeClr val="tx1"/>
+                        </a:solidFill>
                         <a:latin typeface="Microsoft Sans Serif"/>
                         <a:cs typeface="Microsoft Sans Serif"/>
                       </a:endParaRPr>

--- a/IACyC_2026_Joel_Mwende_ppt.pptx
+++ b/IACyC_2026_Joel_Mwende_ppt.pptx
@@ -24110,13 +24110,15 @@
             </a:endParaRPr>
           </a:p>
           <a:p>
-            <a:pPr marL="12700" marR="275590">
+            <a:pPr marL="184150" marR="275590" indent="-171450">
               <a:lnSpc>
                 <a:spcPct val="118000"/>
               </a:lnSpc>
               <a:spcBef>
                 <a:spcPts val="1195"/>
               </a:spcBef>
+              <a:buFont typeface="Arial" panose="020B0604020202020204" pitchFamily="34" charset="0"/>
+              <a:buChar char="•"/>
             </a:pPr>
             <a:r>
               <a:rPr dirty="0">
@@ -29632,67 +29634,17 @@
                 <a:latin typeface="Microsoft Sans Serif"/>
                 <a:cs typeface="Microsoft Sans Serif"/>
               </a:rPr>
-              <a:t>vocabulary</a:t>
-            </a:r>
-            <a:r>
-              <a:rPr sz="1000" dirty="0">
-                <a:solidFill>
-                  <a:schemeClr val="tx1"/>
-                </a:solidFill>
-                <a:latin typeface="Microsoft Sans Serif"/>
-                <a:cs typeface="Microsoft Sans Serif"/>
-              </a:rPr>
-              <a:t> (7 </a:t>
-            </a:r>
-            <a:r>
-              <a:rPr sz="1000" spc="-30" dirty="0">
-                <a:solidFill>
-                  <a:schemeClr val="tx1"/>
-                </a:solidFill>
-                <a:latin typeface="Microsoft Sans Serif"/>
-                <a:cs typeface="Microsoft Sans Serif"/>
-              </a:rPr>
-              <a:t>network,</a:t>
-            </a:r>
-            <a:r>
-              <a:rPr sz="1000" dirty="0">
-                <a:solidFill>
-                  <a:schemeClr val="tx1"/>
-                </a:solidFill>
-                <a:latin typeface="Microsoft Sans Serif"/>
-                <a:cs typeface="Microsoft Sans Serif"/>
-              </a:rPr>
-              <a:t> </a:t>
-            </a:r>
-            <a:r>
-              <a:rPr sz="1000" spc="-10" dirty="0">
-                <a:solidFill>
-                  <a:schemeClr val="tx1"/>
-                </a:solidFill>
-                <a:latin typeface="Microsoft Sans Serif"/>
-                <a:cs typeface="Microsoft Sans Serif"/>
-              </a:rPr>
-              <a:t>10</a:t>
-            </a:r>
-            <a:r>
-              <a:rPr sz="1000" dirty="0">
-                <a:solidFill>
-                  <a:schemeClr val="tx1"/>
-                </a:solidFill>
-                <a:latin typeface="Microsoft Sans Serif"/>
-                <a:cs typeface="Microsoft Sans Serif"/>
-              </a:rPr>
-              <a:t> </a:t>
-            </a:r>
-            <a:r>
-              <a:rPr sz="1000" spc="-10" dirty="0">
-                <a:solidFill>
-                  <a:schemeClr val="tx1"/>
-                </a:solidFill>
-                <a:latin typeface="Microsoft Sans Serif"/>
-                <a:cs typeface="Microsoft Sans Serif"/>
-              </a:rPr>
-              <a:t>host)</a:t>
+              <a:t>vocabular</a:t>
+            </a:r>
+            <a:r>
+              <a:rPr lang="en-GB" sz="1000" spc="-40" dirty="0">
+                <a:solidFill>
+                  <a:schemeClr val="tx1"/>
+                </a:solidFill>
+                <a:latin typeface="Microsoft Sans Serif"/>
+                <a:cs typeface="Microsoft Sans Serif"/>
+              </a:rPr>
+              <a:t>y.</a:t>
             </a:r>
             <a:endParaRPr sz="1000" dirty="0">
               <a:solidFill>

--- a/IACyC_2026_Joel_Mwende_ppt.pptx
+++ b/IACyC_2026_Joel_Mwende_ppt.pptx
@@ -8549,7 +8549,7 @@
           <p:nvPr>
             <p:extLst>
               <p:ext uri="{D42A27DB-BD31-4B8C-83A1-F6EECF244321}">
-                <p14:modId xmlns:p14="http://schemas.microsoft.com/office/powerpoint/2010/main" val="1723551505"/>
+                <p14:modId xmlns:p14="http://schemas.microsoft.com/office/powerpoint/2010/main" val="2984006598"/>
               </p:ext>
             </p:extLst>
           </p:nvPr>
@@ -8621,7 +8621,17 @@
                         </a:rPr>
                         <a:t>Nemo</a:t>
                       </a:r>
-                      <a:endParaRPr sz="1000">
+                      <a:r>
+                        <a:rPr lang="en-GB" sz="1000" spc="-20" dirty="0">
+                          <a:solidFill>
+                            <a:schemeClr val="tx1"/>
+                          </a:solidFill>
+                          <a:latin typeface="Microsoft Sans Serif"/>
+                          <a:cs typeface="Microsoft Sans Serif"/>
+                        </a:rPr>
+                        <a:t>-12B</a:t>
+                      </a:r>
+                      <a:endParaRPr sz="1000" dirty="0">
                         <a:solidFill>
                           <a:schemeClr val="tx1"/>
                         </a:solidFill>
@@ -36210,27 +36220,37 @@
               <a:t> </a:t>
             </a:r>
             <a:r>
-              <a:rPr sz="1000" spc="-50" dirty="0">
-                <a:solidFill>
-                  <a:srgbClr val="22373A"/>
-                </a:solidFill>
-                <a:latin typeface="Microsoft Sans Serif"/>
-                <a:cs typeface="Microsoft Sans Serif"/>
-              </a:rPr>
-              <a:t>misclassified</a:t>
-            </a:r>
-            <a:r>
-              <a:rPr sz="1000" spc="20" dirty="0">
-                <a:solidFill>
-                  <a:srgbClr val="22373A"/>
-                </a:solidFill>
-                <a:latin typeface="Microsoft Sans Serif"/>
-                <a:cs typeface="Microsoft Sans Serif"/>
-              </a:rPr>
-              <a:t> </a:t>
-            </a:r>
-            <a:r>
-              <a:rPr sz="1000" dirty="0">
+              <a:rPr sz="1000" spc="-50" dirty="0" err="1">
+                <a:solidFill>
+                  <a:srgbClr val="22373A"/>
+                </a:solidFill>
+                <a:latin typeface="Microsoft Sans Serif"/>
+                <a:cs typeface="Microsoft Sans Serif"/>
+              </a:rPr>
+              <a:t>misclas</a:t>
+            </a:r>
+            <a:r>
+              <a:rPr lang="en-GB" sz="1000" spc="-50" dirty="0" err="1">
+                <a:solidFill>
+                  <a:srgbClr val="22373A"/>
+                </a:solidFill>
+                <a:latin typeface="Microsoft Sans Serif"/>
+                <a:cs typeface="Microsoft Sans Serif"/>
+              </a:rPr>
+              <a:t>sified</a:t>
+            </a:r>
+            <a:r>
+              <a:rPr lang="en-DE" sz="1000" spc="20" dirty="0">
+                <a:solidFill>
+                  <a:srgbClr val="22373A"/>
+                </a:solidFill>
+                <a:latin typeface="Microsoft Sans Serif"/>
+                <a:cs typeface="Microsoft Sans Serif"/>
+              </a:rPr>
+              <a:t> </a:t>
+            </a:r>
+            <a:r>
+              <a:rPr lang="en-GB" sz="1000" dirty="0">
                 <a:solidFill>
                   <a:srgbClr val="22373A"/>
                 </a:solidFill>
@@ -36240,17 +36260,17 @@
               <a:t>a</a:t>
             </a:r>
             <a:r>
-              <a:rPr sz="1000" spc="20" dirty="0">
-                <a:solidFill>
-                  <a:srgbClr val="22373A"/>
-                </a:solidFill>
-                <a:latin typeface="Microsoft Sans Serif"/>
-                <a:cs typeface="Microsoft Sans Serif"/>
-              </a:rPr>
-              <a:t> </a:t>
-            </a:r>
-            <a:r>
-              <a:rPr sz="1000" spc="-30" dirty="0">
+              <a:rPr lang="en-DE" sz="1000" spc="20" dirty="0">
+                <a:solidFill>
+                  <a:srgbClr val="22373A"/>
+                </a:solidFill>
+                <a:latin typeface="Microsoft Sans Serif"/>
+                <a:cs typeface="Microsoft Sans Serif"/>
+              </a:rPr>
+              <a:t> </a:t>
+            </a:r>
+            <a:r>
+              <a:rPr lang="en-GB" sz="1000" spc="-30" dirty="0">
                 <a:solidFill>
                   <a:srgbClr val="22373A"/>
                 </a:solidFill>
@@ -36260,24 +36280,14 @@
               <a:t>community</a:t>
             </a:r>
             <a:r>
-              <a:rPr sz="1000" spc="15" dirty="0">
-                <a:solidFill>
-                  <a:srgbClr val="22373A"/>
-                </a:solidFill>
-                <a:latin typeface="Microsoft Sans Serif"/>
-                <a:cs typeface="Microsoft Sans Serif"/>
-              </a:rPr>
-              <a:t> </a:t>
-            </a:r>
-            <a:r>
-              <a:rPr sz="1000" spc="-70" dirty="0">
-                <a:solidFill>
-                  <a:srgbClr val="22373A"/>
-                </a:solidFill>
-                <a:latin typeface="Microsoft Sans Serif"/>
-                <a:cs typeface="Microsoft Sans Serif"/>
-              </a:rPr>
-              <a:t>w</a:t>
+              <a:rPr lang="en-DE" sz="1000" spc="15" dirty="0">
+                <a:solidFill>
+                  <a:srgbClr val="22373A"/>
+                </a:solidFill>
+                <a:latin typeface="Microsoft Sans Serif"/>
+                <a:cs typeface="Microsoft Sans Serif"/>
+              </a:rPr>
+              <a:t> </a:t>
             </a:r>
             <a:r>
               <a:rPr lang="en-GB" sz="1000" spc="-70" dirty="0">
@@ -36287,7 +36297,7 @@
                 <a:latin typeface="Microsoft Sans Serif"/>
                 <a:cs typeface="Microsoft Sans Serif"/>
               </a:rPr>
-              <a:t>hose</a:t>
+              <a:t>whose</a:t>
             </a:r>
             <a:r>
               <a:rPr lang="en-DE" sz="1000" spc="20" dirty="0">
@@ -36409,6 +36419,23 @@
               </a:rPr>
               <a:t> </a:t>
             </a:r>
+            <a:endParaRPr lang="en-GB" sz="1000" spc="110" dirty="0">
+              <a:solidFill>
+                <a:srgbClr val="22373A"/>
+              </a:solidFill>
+              <a:latin typeface="Microsoft Sans Serif"/>
+              <a:cs typeface="Microsoft Sans Serif"/>
+            </a:endParaRPr>
+          </a:p>
+          <a:p>
+            <a:pPr marL="12700" marR="5080">
+              <a:lnSpc>
+                <a:spcPct val="114599"/>
+              </a:lnSpc>
+              <a:spcBef>
+                <a:spcPts val="100"/>
+              </a:spcBef>
+            </a:pPr>
             <a:r>
               <a:rPr lang="en-GB" sz="1000" spc="-25" dirty="0">
                 <a:solidFill>
